--- a/curriculum/week-01/week1-topic-01-hashing.pptx
+++ b/curriculum/week-01/week1-topic-01-hashing.pptx
@@ -3270,8 +3270,8 @@
         </p:nvSpPr>
         <p:spPr>
           <a:xfrm>
-            <a:off x="822960" y="1188720"/>
-            <a:ext cx="5486400" cy="1188720"/>
+            <a:off x="822960" y="502920"/>
+            <a:ext cx="9144000" cy="365760"/>
           </a:xfrm>
           <a:prstGeom prst="rect">
             <a:avLst/>
@@ -3290,13 +3290,13 @@
               </a:lnSpc>
             </a:pPr>
             <a:r>
-              <a:rPr sz="10000" b="1" i="0">
-                <a:solidFill>
-                  <a:srgbClr val="FFFFFF"/>
-                </a:solidFill>
-                <a:latin typeface="Century Gothic"/>
-              </a:rPr>
-              <a:t>01</a:t>
+              <a:rPr sz="1300" b="1" i="0">
+                <a:solidFill>
+                  <a:srgbClr val="FFC53D"/>
+                </a:solidFill>
+                <a:latin typeface="Calibri"/>
+              </a:rPr>
+              <a:t>BlockchainCourse · Curriculum · Week 01 · Topic 01 of 04</a:t>
             </a:r>
           </a:p>
         </p:txBody>
@@ -3309,8 +3309,8 @@
         </p:nvSpPr>
         <p:spPr>
           <a:xfrm>
-            <a:off x="822960" y="2423160"/>
-            <a:ext cx="8961120" cy="1554480"/>
+            <a:off x="822960" y="1188720"/>
+            <a:ext cx="5486400" cy="1188720"/>
           </a:xfrm>
           <a:prstGeom prst="rect">
             <a:avLst/>
@@ -3325,17 +3325,17 @@
           <a:p>
             <a:pPr algn="l">
               <a:lnSpc>
-                <a:spcPct val="105000"/>
-              </a:lnSpc>
-            </a:pPr>
-            <a:r>
-              <a:rPr sz="4600" b="1" i="0">
+                <a:spcPct val="115000"/>
+              </a:lnSpc>
+            </a:pPr>
+            <a:r>
+              <a:rPr sz="10000" b="1" i="0">
                 <a:solidFill>
                   <a:srgbClr val="FFFFFF"/>
                 </a:solidFill>
                 <a:latin typeface="Century Gothic"/>
               </a:rPr>
-              <a:t>Hashing</a:t>
+              <a:t>01</a:t>
             </a:r>
           </a:p>
         </p:txBody>
@@ -3348,8 +3348,8 @@
         </p:nvSpPr>
         <p:spPr>
           <a:xfrm>
-            <a:off x="822960" y="4160520"/>
-            <a:ext cx="6858000" cy="1097280"/>
+            <a:off x="822960" y="2423160"/>
+            <a:ext cx="8961120" cy="1554480"/>
           </a:xfrm>
           <a:prstGeom prst="rect">
             <a:avLst/>
@@ -3364,17 +3364,17 @@
           <a:p>
             <a:pPr algn="l">
               <a:lnSpc>
-                <a:spcPct val="125000"/>
-              </a:lnSpc>
-            </a:pPr>
-            <a:r>
-              <a:rPr sz="1900" b="0" i="0">
+                <a:spcPct val="105000"/>
+              </a:lnSpc>
+            </a:pPr>
+            <a:r>
+              <a:rPr sz="4600" b="1" i="0">
                 <a:solidFill>
                   <a:srgbClr val="FFFFFF"/>
                 </a:solidFill>
-                <a:latin typeface="Calibri"/>
-              </a:rPr>
-              <a:t>A tamper-evident fingerprint for data — change one letter, get an unrecognizable result.</a:t>
+                <a:latin typeface="Century Gothic"/>
+              </a:rPr>
+              <a:t>Hashing</a:t>
             </a:r>
           </a:p>
         </p:txBody>
@@ -3387,8 +3387,8 @@
         </p:nvSpPr>
         <p:spPr>
           <a:xfrm>
-            <a:off x="822960" y="6446520"/>
-            <a:ext cx="8229600" cy="320040"/>
+            <a:off x="822960" y="4160520"/>
+            <a:ext cx="6858000" cy="1097280"/>
           </a:xfrm>
           <a:prstGeom prst="rect">
             <a:avLst/>
@@ -3403,6 +3403,277 @@
           <a:p>
             <a:pPr algn="l">
               <a:lnSpc>
+                <a:spcPct val="125000"/>
+              </a:lnSpc>
+            </a:pPr>
+            <a:r>
+              <a:rPr sz="1900" b="0" i="0">
+                <a:solidFill>
+                  <a:srgbClr val="FFFFFF"/>
+                </a:solidFill>
+                <a:latin typeface="Calibri"/>
+              </a:rPr>
+              <a:t>A tamper-evident fingerprint for data — change one letter, get an unrecognizable result.</a:t>
+            </a:r>
+          </a:p>
+        </p:txBody>
+      </p:sp>
+      <p:sp>
+        <p:nvSpPr>
+          <p:cNvPr id="10" name="Rounded Rectangle 9"/>
+          <p:cNvSpPr/>
+          <p:nvPr/>
+        </p:nvSpPr>
+        <p:spPr>
+          <a:xfrm>
+            <a:off x="822960" y="5669280"/>
+            <a:ext cx="1100937" cy="402336"/>
+          </a:xfrm>
+          <a:prstGeom prst="roundRect">
+            <a:avLst>
+              <a:gd name="adj" fmla="val 50000"/>
+            </a:avLst>
+          </a:prstGeom>
+          <a:solidFill>
+            <a:srgbClr val="C1432B"/>
+          </a:solidFill>
+          <a:ln>
+            <a:noFill/>
+          </a:ln>
+          <a:effectLst/>
+        </p:spPr>
+        <p:style>
+          <a:lnRef idx="1">
+            <a:schemeClr val="accent1"/>
+          </a:lnRef>
+          <a:fillRef idx="3">
+            <a:schemeClr val="accent1"/>
+          </a:fillRef>
+          <a:effectRef idx="2">
+            <a:schemeClr val="accent1"/>
+          </a:effectRef>
+          <a:fontRef idx="minor">
+            <a:schemeClr val="lt1"/>
+          </a:fontRef>
+        </p:style>
+        <p:txBody>
+          <a:bodyPr rtlCol="0" anchor="ctr" lIns="109728" rIns="109728" tIns="18288" bIns="18288" wrap="none"/>
+          <a:lstStyle/>
+          <a:p>
+            <a:pPr algn="ctr"/>
+            <a:r>
+              <a:rPr sz="1100" b="1">
+                <a:solidFill>
+                  <a:srgbClr val="FFFFFF"/>
+                </a:solidFill>
+                <a:latin typeface="Calibri"/>
+              </a:rPr>
+              <a:t>01 · Hashing</a:t>
+            </a:r>
+          </a:p>
+        </p:txBody>
+      </p:sp>
+      <p:sp>
+        <p:nvSpPr>
+          <p:cNvPr id="11" name="Rounded Rectangle 10"/>
+          <p:cNvSpPr/>
+          <p:nvPr/>
+        </p:nvSpPr>
+        <p:spPr>
+          <a:xfrm>
+            <a:off x="2070201" y="5669280"/>
+            <a:ext cx="2022652" cy="402336"/>
+          </a:xfrm>
+          <a:prstGeom prst="roundRect">
+            <a:avLst>
+              <a:gd name="adj" fmla="val 50000"/>
+            </a:avLst>
+          </a:prstGeom>
+          <a:solidFill>
+            <a:srgbClr val="FFFFFF">
+              <a:alpha val="14000"/>
+            </a:srgbClr>
+          </a:solidFill>
+          <a:ln w="9525">
+            <a:solidFill>
+              <a:srgbClr val="FFFFFF"/>
+            </a:solidFill>
+          </a:ln>
+          <a:effectLst/>
+        </p:spPr>
+        <p:style>
+          <a:lnRef idx="1">
+            <a:schemeClr val="accent1"/>
+          </a:lnRef>
+          <a:fillRef idx="3">
+            <a:schemeClr val="accent1"/>
+          </a:fillRef>
+          <a:effectRef idx="2">
+            <a:schemeClr val="accent1"/>
+          </a:effectRef>
+          <a:fontRef idx="minor">
+            <a:schemeClr val="lt1"/>
+          </a:fontRef>
+        </p:style>
+        <p:txBody>
+          <a:bodyPr rtlCol="0" anchor="ctr" lIns="109728" rIns="109728" tIns="18288" bIns="18288" wrap="none"/>
+          <a:lstStyle/>
+          <a:p>
+            <a:pPr algn="ctr"/>
+            <a:r>
+              <a:rPr sz="1100" b="0">
+                <a:solidFill>
+                  <a:srgbClr val="DDD9E8"/>
+                </a:solidFill>
+                <a:latin typeface="Calibri"/>
+              </a:rPr>
+              <a:t>02 · Public / Private Keys</a:t>
+            </a:r>
+          </a:p>
+        </p:txBody>
+      </p:sp>
+      <p:sp>
+        <p:nvSpPr>
+          <p:cNvPr id="12" name="Rounded Rectangle 11"/>
+          <p:cNvSpPr/>
+          <p:nvPr/>
+        </p:nvSpPr>
+        <p:spPr>
+          <a:xfrm>
+            <a:off x="4239157" y="5669280"/>
+            <a:ext cx="1627632" cy="402336"/>
+          </a:xfrm>
+          <a:prstGeom prst="roundRect">
+            <a:avLst>
+              <a:gd name="adj" fmla="val 50000"/>
+            </a:avLst>
+          </a:prstGeom>
+          <a:solidFill>
+            <a:srgbClr val="FFFFFF">
+              <a:alpha val="14000"/>
+            </a:srgbClr>
+          </a:solidFill>
+          <a:ln w="9525">
+            <a:solidFill>
+              <a:srgbClr val="FFFFFF"/>
+            </a:solidFill>
+          </a:ln>
+          <a:effectLst/>
+        </p:spPr>
+        <p:style>
+          <a:lnRef idx="1">
+            <a:schemeClr val="accent1"/>
+          </a:lnRef>
+          <a:fillRef idx="3">
+            <a:schemeClr val="accent1"/>
+          </a:fillRef>
+          <a:effectRef idx="2">
+            <a:schemeClr val="accent1"/>
+          </a:effectRef>
+          <a:fontRef idx="minor">
+            <a:schemeClr val="lt1"/>
+          </a:fontRef>
+        </p:style>
+        <p:txBody>
+          <a:bodyPr rtlCol="0" anchor="ctr" lIns="109728" rIns="109728" tIns="18288" bIns="18288" wrap="none"/>
+          <a:lstStyle/>
+          <a:p>
+            <a:pPr algn="ctr"/>
+            <a:r>
+              <a:rPr sz="1100" b="0">
+                <a:solidFill>
+                  <a:srgbClr val="DDD9E8"/>
+                </a:solidFill>
+                <a:latin typeface="Calibri"/>
+              </a:rPr>
+              <a:t>03 · Blocks &amp; Chains</a:t>
+            </a:r>
+          </a:p>
+        </p:txBody>
+      </p:sp>
+      <p:sp>
+        <p:nvSpPr>
+          <p:cNvPr id="13" name="Rounded Rectangle 12"/>
+          <p:cNvSpPr/>
+          <p:nvPr/>
+        </p:nvSpPr>
+        <p:spPr>
+          <a:xfrm>
+            <a:off x="6013093" y="5669280"/>
+            <a:ext cx="1232611" cy="402336"/>
+          </a:xfrm>
+          <a:prstGeom prst="roundRect">
+            <a:avLst>
+              <a:gd name="adj" fmla="val 50000"/>
+            </a:avLst>
+          </a:prstGeom>
+          <a:solidFill>
+            <a:srgbClr val="FFFFFF">
+              <a:alpha val="14000"/>
+            </a:srgbClr>
+          </a:solidFill>
+          <a:ln w="9525">
+            <a:solidFill>
+              <a:srgbClr val="FFFFFF"/>
+            </a:solidFill>
+          </a:ln>
+          <a:effectLst/>
+        </p:spPr>
+        <p:style>
+          <a:lnRef idx="1">
+            <a:schemeClr val="accent1"/>
+          </a:lnRef>
+          <a:fillRef idx="3">
+            <a:schemeClr val="accent1"/>
+          </a:fillRef>
+          <a:effectRef idx="2">
+            <a:schemeClr val="accent1"/>
+          </a:effectRef>
+          <a:fontRef idx="minor">
+            <a:schemeClr val="lt1"/>
+          </a:fontRef>
+        </p:style>
+        <p:txBody>
+          <a:bodyPr rtlCol="0" anchor="ctr" lIns="109728" rIns="109728" tIns="18288" bIns="18288" wrap="none"/>
+          <a:lstStyle/>
+          <a:p>
+            <a:pPr algn="ctr"/>
+            <a:r>
+              <a:rPr sz="1100" b="0">
+                <a:solidFill>
+                  <a:srgbClr val="DDD9E8"/>
+                </a:solidFill>
+                <a:latin typeface="Calibri"/>
+              </a:rPr>
+              <a:t>04 · Consensus</a:t>
+            </a:r>
+          </a:p>
+        </p:txBody>
+      </p:sp>
+      <p:sp>
+        <p:nvSpPr>
+          <p:cNvPr id="14" name="TextBox 13"/>
+          <p:cNvSpPr txBox="1"/>
+          <p:nvPr/>
+        </p:nvSpPr>
+        <p:spPr>
+          <a:xfrm>
+            <a:off x="822960" y="6446520"/>
+            <a:ext cx="8229600" cy="320040"/>
+          </a:xfrm>
+          <a:prstGeom prst="rect">
+            <a:avLst/>
+          </a:prstGeom>
+          <a:noFill/>
+        </p:spPr>
+        <p:txBody>
+          <a:bodyPr wrap="square" anchor="t" lIns="0" rIns="0" tIns="0" bIns="0">
+            <a:spAutoFit/>
+          </a:bodyPr>
+          <a:lstStyle/>
+          <a:p>
+            <a:pPr algn="l">
+              <a:lnSpc>
                 <a:spcPct val="115000"/>
               </a:lnSpc>
             </a:pPr>
@@ -3420,7 +3691,7 @@
       </p:sp>
       <p:sp>
         <p:nvSpPr>
-          <p:cNvPr id="10" name="TextBox 9"/>
+          <p:cNvPr id="15" name="TextBox 14"/>
           <p:cNvSpPr txBox="1"/>
           <p:nvPr/>
         </p:nvSpPr>

--- a/curriculum/week-01/week1-topic-01-hashing.pptx
+++ b/curriculum/week-01/week1-topic-01-hashing.pptx
@@ -20,6 +20,9 @@
     <p:sldId id="268" r:id="rId19"/>
     <p:sldId id="269" r:id="rId20"/>
     <p:sldId id="270" r:id="rId21"/>
+    <p:sldId id="271" r:id="rId22"/>
+    <p:sldId id="272" r:id="rId23"/>
+    <p:sldId id="273" r:id="rId24"/>
   </p:sldIdLst>
   <p:sldSz cx="12191695" cy="6858000" type="screen4x3"/>
   <p:notesSz cx="6858000" cy="9144000"/>
@@ -3146,51 +3149,162 @@
           </a:p>
         </p:txBody>
       </p:sp>
-      <p:pic>
-        <p:nvPicPr>
-          <p:cNvPr id="3" name="Picture 2" descr="_cover_01.jpg"/>
-          <p:cNvPicPr>
-            <a:picLocks noChangeAspect="1"/>
-          </p:cNvPicPr>
-          <p:nvPr/>
-        </p:nvPicPr>
-        <p:blipFill>
-          <a:blip r:embed="rId2"/>
-          <a:stretch>
-            <a:fillRect/>
-          </a:stretch>
-        </p:blipFill>
-        <p:spPr>
-          <a:xfrm>
-            <a:off x="0" y="0"/>
-            <a:ext cx="12191695" cy="6858000"/>
-          </a:xfrm>
-          <a:prstGeom prst="rect">
-            <a:avLst/>
-          </a:prstGeom>
-        </p:spPr>
-      </p:pic>
-      <p:sp>
-        <p:nvSpPr>
-          <p:cNvPr id="4" name="Rectangle 3"/>
+      <p:sp>
+        <p:nvSpPr>
+          <p:cNvPr id="3" name="TextBox 2"/>
+          <p:cNvSpPr txBox="1"/>
+          <p:nvPr/>
+        </p:nvSpPr>
+        <p:spPr>
+          <a:xfrm>
+            <a:off x="822960" y="822960"/>
+            <a:ext cx="10058400" cy="365760"/>
+          </a:xfrm>
+          <a:prstGeom prst="rect">
+            <a:avLst/>
+          </a:prstGeom>
+          <a:noFill/>
+        </p:spPr>
+        <p:txBody>
+          <a:bodyPr wrap="square" anchor="t" lIns="0" rIns="0" tIns="0" bIns="0">
+            <a:spAutoFit/>
+          </a:bodyPr>
+          <a:lstStyle/>
+          <a:p>
+            <a:pPr algn="l">
+              <a:lnSpc>
+                <a:spcPct val="115000"/>
+              </a:lnSpc>
+            </a:pPr>
+            <a:r>
+              <a:rPr sz="1300" b="1" i="0">
+                <a:solidFill>
+                  <a:srgbClr val="FFC53D"/>
+                </a:solidFill>
+                <a:latin typeface="Calibri"/>
+              </a:rPr>
+              <a:t>BLOCKCHAINCOURSE</a:t>
+            </a:r>
+          </a:p>
+        </p:txBody>
+      </p:sp>
+      <p:sp>
+        <p:nvSpPr>
+          <p:cNvPr id="4" name="TextBox 3"/>
+          <p:cNvSpPr txBox="1"/>
+          <p:nvPr/>
+        </p:nvSpPr>
+        <p:spPr>
+          <a:xfrm>
+            <a:off x="822960" y="1371600"/>
+            <a:ext cx="9144000" cy="1600200"/>
+          </a:xfrm>
+          <a:prstGeom prst="rect">
+            <a:avLst/>
+          </a:prstGeom>
+          <a:noFill/>
+        </p:spPr>
+        <p:txBody>
+          <a:bodyPr wrap="square" anchor="t" lIns="0" rIns="0" tIns="0" bIns="0">
+            <a:spAutoFit/>
+          </a:bodyPr>
+          <a:lstStyle/>
+          <a:p>
+            <a:pPr algn="l">
+              <a:lnSpc>
+                <a:spcPct val="105000"/>
+              </a:lnSpc>
+            </a:pPr>
+            <a:r>
+              <a:rPr sz="4200" b="1" i="0">
+                <a:solidFill>
+                  <a:srgbClr val="FFFFFF"/>
+                </a:solidFill>
+                <a:latin typeface="Century Gothic"/>
+              </a:rPr>
+              <a:t>Practical Engineering</a:t>
+            </a:r>
+          </a:p>
+          <a:p>
+            <a:pPr algn="l">
+              <a:lnSpc>
+                <a:spcPct val="105000"/>
+              </a:lnSpc>
+            </a:pPr>
+            <a:r>
+              <a:rPr sz="4200" b="1" i="0">
+                <a:solidFill>
+                  <a:srgbClr val="FFFFFF"/>
+                </a:solidFill>
+                <a:latin typeface="Century Gothic"/>
+              </a:rPr>
+              <a:t>Over Hype</a:t>
+            </a:r>
+          </a:p>
+        </p:txBody>
+      </p:sp>
+      <p:sp>
+        <p:nvSpPr>
+          <p:cNvPr id="5" name="TextBox 4"/>
+          <p:cNvSpPr txBox="1"/>
+          <p:nvPr/>
+        </p:nvSpPr>
+        <p:spPr>
+          <a:xfrm>
+            <a:off x="822960" y="3246120"/>
+            <a:ext cx="8961120" cy="1463040"/>
+          </a:xfrm>
+          <a:prstGeom prst="rect">
+            <a:avLst/>
+          </a:prstGeom>
+          <a:noFill/>
+        </p:spPr>
+        <p:txBody>
+          <a:bodyPr wrap="square" anchor="t" lIns="0" rIns="0" tIns="0" bIns="0">
+            <a:spAutoFit/>
+          </a:bodyPr>
+          <a:lstStyle/>
+          <a:p>
+            <a:pPr algn="l">
+              <a:lnSpc>
+                <a:spcPct val="140000"/>
+              </a:lnSpc>
+            </a:pPr>
+            <a:r>
+              <a:rPr sz="1650" b="0" i="0">
+                <a:solidFill>
+                  <a:srgbClr val="D8D3E8"/>
+                </a:solidFill>
+                <a:latin typeface="Calibri"/>
+              </a:rPr>
+              <a:t>Most newcomers memorize buzzwords or copy-paste Solidity templates they can't explain. This course is built differently: understand EVM execution, state transitions, and security trade-offs — before you ever touch a framework.</a:t>
+            </a:r>
+          </a:p>
+        </p:txBody>
+      </p:sp>
+      <p:sp>
+        <p:nvSpPr>
+          <p:cNvPr id="6" name="Rounded Rectangle 5"/>
           <p:cNvSpPr/>
           <p:nvPr/>
         </p:nvSpPr>
         <p:spPr>
           <a:xfrm>
-            <a:off x="0" y="0"/>
-            <a:ext cx="12191695" cy="6858000"/>
-          </a:xfrm>
-          <a:prstGeom prst="rect">
-            <a:avLst/>
+            <a:off x="822960" y="4892040"/>
+            <a:ext cx="822960" cy="384048"/>
+          </a:xfrm>
+          <a:prstGeom prst="roundRect">
+            <a:avLst>
+              <a:gd name="adj" fmla="val 50000"/>
+            </a:avLst>
           </a:prstGeom>
           <a:solidFill>
-            <a:srgbClr val="1C1730">
-              <a:alpha val="45000"/>
-            </a:srgbClr>
+            <a:srgbClr val="FFF9EB"/>
           </a:solidFill>
-          <a:ln>
-            <a:noFill/>
+          <a:ln w="12700">
+            <a:solidFill>
+              <a:srgbClr val="FFC53D"/>
+            </a:solidFill>
           </a:ln>
           <a:effectLst/>
         </p:spPr>
@@ -3209,34 +3323,45 @@
           </a:fontRef>
         </p:style>
         <p:txBody>
-          <a:bodyPr rtlCol="0" anchor="ctr"/>
+          <a:bodyPr rtlCol="0" anchor="ctr" lIns="109728" rIns="109728" tIns="18288" bIns="18288" wrap="none"/>
           <a:lstStyle/>
           <a:p>
             <a:pPr algn="ctr"/>
-          </a:p>
-        </p:txBody>
-      </p:sp>
-      <p:sp>
-        <p:nvSpPr>
-          <p:cNvPr id="5" name="Rectangle 4"/>
+            <a:r>
+              <a:rPr sz="1200" b="1">
+                <a:solidFill>
+                  <a:srgbClr val="FFC53D"/>
+                </a:solidFill>
+                <a:latin typeface="Calibri"/>
+              </a:rPr>
+              <a:t>2 Halves</a:t>
+            </a:r>
+          </a:p>
+        </p:txBody>
+      </p:sp>
+      <p:sp>
+        <p:nvSpPr>
+          <p:cNvPr id="7" name="Rounded Rectangle 6"/>
           <p:cNvSpPr/>
           <p:nvPr/>
         </p:nvSpPr>
         <p:spPr>
           <a:xfrm>
-            <a:off x="0" y="0"/>
-            <a:ext cx="12191695" cy="6858000"/>
-          </a:xfrm>
-          <a:prstGeom prst="rect">
-            <a:avLst/>
+            <a:off x="1783080" y="4892040"/>
+            <a:ext cx="745236" cy="384048"/>
+          </a:xfrm>
+          <a:prstGeom prst="roundRect">
+            <a:avLst>
+              <a:gd name="adj" fmla="val 50000"/>
+            </a:avLst>
           </a:prstGeom>
           <a:solidFill>
-            <a:srgbClr val="C1432B">
-              <a:alpha val="35000"/>
-            </a:srgbClr>
+            <a:srgbClr val="FFF9EB"/>
           </a:solidFill>
-          <a:ln>
-            <a:noFill/>
+          <a:ln w="12700">
+            <a:solidFill>
+              <a:srgbClr val="FFC53D"/>
+            </a:solidFill>
           </a:ln>
           <a:effectLst/>
         </p:spPr>
@@ -3255,179 +3380,32 @@
           </a:fontRef>
         </p:style>
         <p:txBody>
-          <a:bodyPr rtlCol="0" anchor="ctr"/>
+          <a:bodyPr rtlCol="0" anchor="ctr" lIns="109728" rIns="109728" tIns="18288" bIns="18288" wrap="none"/>
           <a:lstStyle/>
           <a:p>
             <a:pPr algn="ctr"/>
-          </a:p>
-        </p:txBody>
-      </p:sp>
-      <p:sp>
-        <p:nvSpPr>
-          <p:cNvPr id="6" name="TextBox 5"/>
-          <p:cNvSpPr txBox="1"/>
-          <p:nvPr/>
-        </p:nvSpPr>
-        <p:spPr>
-          <a:xfrm>
-            <a:off x="822960" y="502920"/>
-            <a:ext cx="9144000" cy="365760"/>
-          </a:xfrm>
-          <a:prstGeom prst="rect">
-            <a:avLst/>
-          </a:prstGeom>
-          <a:noFill/>
-        </p:spPr>
-        <p:txBody>
-          <a:bodyPr wrap="square" anchor="t" lIns="0" rIns="0" tIns="0" bIns="0">
-            <a:spAutoFit/>
-          </a:bodyPr>
-          <a:lstStyle/>
-          <a:p>
-            <a:pPr algn="l">
-              <a:lnSpc>
-                <a:spcPct val="115000"/>
-              </a:lnSpc>
-            </a:pPr>
-            <a:r>
-              <a:rPr sz="1300" b="1" i="0">
+            <a:r>
+              <a:rPr sz="1200" b="1">
                 <a:solidFill>
                   <a:srgbClr val="FFC53D"/>
                 </a:solidFill>
                 <a:latin typeface="Calibri"/>
               </a:rPr>
-              <a:t>BlockchainCourse · Curriculum · Week 01 · Topic 01 of 04</a:t>
-            </a:r>
-          </a:p>
-        </p:txBody>
-      </p:sp>
-      <p:sp>
-        <p:nvSpPr>
-          <p:cNvPr id="7" name="TextBox 6"/>
-          <p:cNvSpPr txBox="1"/>
-          <p:nvPr/>
-        </p:nvSpPr>
-        <p:spPr>
-          <a:xfrm>
-            <a:off x="822960" y="1188720"/>
-            <a:ext cx="5486400" cy="1188720"/>
-          </a:xfrm>
-          <a:prstGeom prst="rect">
-            <a:avLst/>
-          </a:prstGeom>
-          <a:noFill/>
-        </p:spPr>
-        <p:txBody>
-          <a:bodyPr wrap="square" anchor="t" lIns="0" rIns="0" tIns="0" bIns="0">
-            <a:spAutoFit/>
-          </a:bodyPr>
-          <a:lstStyle/>
-          <a:p>
-            <a:pPr algn="l">
-              <a:lnSpc>
-                <a:spcPct val="115000"/>
-              </a:lnSpc>
-            </a:pPr>
-            <a:r>
-              <a:rPr sz="10000" b="1" i="0">
-                <a:solidFill>
-                  <a:srgbClr val="FFFFFF"/>
-                </a:solidFill>
-                <a:latin typeface="Century Gothic"/>
-              </a:rPr>
-              <a:t>01</a:t>
-            </a:r>
-          </a:p>
-        </p:txBody>
-      </p:sp>
-      <p:sp>
-        <p:nvSpPr>
-          <p:cNvPr id="8" name="TextBox 7"/>
-          <p:cNvSpPr txBox="1"/>
-          <p:nvPr/>
-        </p:nvSpPr>
-        <p:spPr>
-          <a:xfrm>
-            <a:off x="822960" y="2423160"/>
-            <a:ext cx="8961120" cy="1554480"/>
-          </a:xfrm>
-          <a:prstGeom prst="rect">
-            <a:avLst/>
-          </a:prstGeom>
-          <a:noFill/>
-        </p:spPr>
-        <p:txBody>
-          <a:bodyPr wrap="square" anchor="t" lIns="0" rIns="0" tIns="0" bIns="0">
-            <a:spAutoFit/>
-          </a:bodyPr>
-          <a:lstStyle/>
-          <a:p>
-            <a:pPr algn="l">
-              <a:lnSpc>
-                <a:spcPct val="105000"/>
-              </a:lnSpc>
-            </a:pPr>
-            <a:r>
-              <a:rPr sz="4600" b="1" i="0">
-                <a:solidFill>
-                  <a:srgbClr val="FFFFFF"/>
-                </a:solidFill>
-                <a:latin typeface="Century Gothic"/>
-              </a:rPr>
-              <a:t>Hashing</a:t>
-            </a:r>
-          </a:p>
-        </p:txBody>
-      </p:sp>
-      <p:sp>
-        <p:nvSpPr>
-          <p:cNvPr id="9" name="TextBox 8"/>
-          <p:cNvSpPr txBox="1"/>
-          <p:nvPr/>
-        </p:nvSpPr>
-        <p:spPr>
-          <a:xfrm>
-            <a:off x="822960" y="4160520"/>
-            <a:ext cx="6858000" cy="1097280"/>
-          </a:xfrm>
-          <a:prstGeom prst="rect">
-            <a:avLst/>
-          </a:prstGeom>
-          <a:noFill/>
-        </p:spPr>
-        <p:txBody>
-          <a:bodyPr wrap="square" anchor="t" lIns="0" rIns="0" tIns="0" bIns="0">
-            <a:spAutoFit/>
-          </a:bodyPr>
-          <a:lstStyle/>
-          <a:p>
-            <a:pPr algn="l">
-              <a:lnSpc>
-                <a:spcPct val="125000"/>
-              </a:lnSpc>
-            </a:pPr>
-            <a:r>
-              <a:rPr sz="1900" b="0" i="0">
-                <a:solidFill>
-                  <a:srgbClr val="FFFFFF"/>
-                </a:solidFill>
-                <a:latin typeface="Calibri"/>
-              </a:rPr>
-              <a:t>A tamper-evident fingerprint for data — change one letter, get an unrecognizable result.</a:t>
-            </a:r>
-          </a:p>
-        </p:txBody>
-      </p:sp>
-      <p:sp>
-        <p:nvSpPr>
-          <p:cNvPr id="10" name="Rounded Rectangle 9"/>
+              <a:t>8 Weeks</a:t>
+            </a:r>
+          </a:p>
+        </p:txBody>
+      </p:sp>
+      <p:sp>
+        <p:nvSpPr>
+          <p:cNvPr id="8" name="Rounded Rectangle 7"/>
           <p:cNvSpPr/>
           <p:nvPr/>
         </p:nvSpPr>
         <p:spPr>
           <a:xfrm>
-            <a:off x="822960" y="5669280"/>
-            <a:ext cx="1100937" cy="402336"/>
+            <a:off x="2665476" y="4892040"/>
+            <a:ext cx="2144268" cy="384048"/>
           </a:xfrm>
           <a:prstGeom prst="roundRect">
             <a:avLst>
@@ -3435,10 +3413,12 @@
             </a:avLst>
           </a:prstGeom>
           <a:solidFill>
-            <a:srgbClr val="C1432B"/>
+            <a:srgbClr val="FFF9EB"/>
           </a:solidFill>
-          <a:ln>
-            <a:noFill/>
+          <a:ln w="12700">
+            <a:solidFill>
+              <a:srgbClr val="FFC53D"/>
+            </a:solidFill>
           </a:ln>
           <a:effectLst/>
         </p:spPr>
@@ -3462,27 +3442,27 @@
           <a:p>
             <a:pPr algn="ctr"/>
             <a:r>
-              <a:rPr sz="1100" b="1">
-                <a:solidFill>
-                  <a:srgbClr val="FFFFFF"/>
+              <a:rPr sz="1200" b="1">
+                <a:solidFill>
+                  <a:srgbClr val="FFC53D"/>
                 </a:solidFill>
                 <a:latin typeface="Calibri"/>
               </a:rPr>
-              <a:t>01 · Hashing</a:t>
-            </a:r>
-          </a:p>
-        </p:txBody>
-      </p:sp>
-      <p:sp>
-        <p:nvSpPr>
-          <p:cNvPr id="11" name="Rounded Rectangle 10"/>
+              <a:t>Hackathon-Ready by Week 4</a:t>
+            </a:r>
+          </a:p>
+        </p:txBody>
+      </p:sp>
+      <p:sp>
+        <p:nvSpPr>
+          <p:cNvPr id="9" name="Rounded Rectangle 8"/>
           <p:cNvSpPr/>
           <p:nvPr/>
         </p:nvSpPr>
         <p:spPr>
           <a:xfrm>
-            <a:off x="2070201" y="5669280"/>
-            <a:ext cx="2022652" cy="402336"/>
+            <a:off x="4946904" y="4892040"/>
+            <a:ext cx="1988820" cy="384048"/>
           </a:xfrm>
           <a:prstGeom prst="roundRect">
             <a:avLst>
@@ -3490,13 +3470,11 @@
             </a:avLst>
           </a:prstGeom>
           <a:solidFill>
-            <a:srgbClr val="FFFFFF">
-              <a:alpha val="14000"/>
-            </a:srgbClr>
+            <a:srgbClr val="FFF9EB"/>
           </a:solidFill>
-          <a:ln w="9525">
+          <a:ln w="12700">
             <a:solidFill>
-              <a:srgbClr val="FFFFFF"/>
+              <a:srgbClr val="FFC53D"/>
             </a:solidFill>
           </a:ln>
           <a:effectLst/>
@@ -3521,177 +3499,20 @@
           <a:p>
             <a:pPr algn="ctr"/>
             <a:r>
-              <a:rPr sz="1100" b="0">
-                <a:solidFill>
-                  <a:srgbClr val="DDD9E8"/>
+              <a:rPr sz="1200" b="1">
+                <a:solidFill>
+                  <a:srgbClr val="FFC53D"/>
                 </a:solidFill>
                 <a:latin typeface="Calibri"/>
               </a:rPr>
-              <a:t>02 · Public / Private Keys</a:t>
-            </a:r>
-          </a:p>
-        </p:txBody>
-      </p:sp>
-      <p:sp>
-        <p:nvSpPr>
-          <p:cNvPr id="12" name="Rounded Rectangle 11"/>
-          <p:cNvSpPr/>
-          <p:nvPr/>
-        </p:nvSpPr>
-        <p:spPr>
-          <a:xfrm>
-            <a:off x="4239157" y="5669280"/>
-            <a:ext cx="1627632" cy="402336"/>
-          </a:xfrm>
-          <a:prstGeom prst="roundRect">
-            <a:avLst>
-              <a:gd name="adj" fmla="val 50000"/>
-            </a:avLst>
-          </a:prstGeom>
-          <a:solidFill>
-            <a:srgbClr val="FFFFFF">
-              <a:alpha val="14000"/>
-            </a:srgbClr>
-          </a:solidFill>
-          <a:ln w="9525">
-            <a:solidFill>
-              <a:srgbClr val="FFFFFF"/>
-            </a:solidFill>
-          </a:ln>
-          <a:effectLst/>
-        </p:spPr>
-        <p:style>
-          <a:lnRef idx="1">
-            <a:schemeClr val="accent1"/>
-          </a:lnRef>
-          <a:fillRef idx="3">
-            <a:schemeClr val="accent1"/>
-          </a:fillRef>
-          <a:effectRef idx="2">
-            <a:schemeClr val="accent1"/>
-          </a:effectRef>
-          <a:fontRef idx="minor">
-            <a:schemeClr val="lt1"/>
-          </a:fontRef>
-        </p:style>
-        <p:txBody>
-          <a:bodyPr rtlCol="0" anchor="ctr" lIns="109728" rIns="109728" tIns="18288" bIns="18288" wrap="none"/>
-          <a:lstStyle/>
-          <a:p>
-            <a:pPr algn="ctr"/>
-            <a:r>
-              <a:rPr sz="1100" b="0">
-                <a:solidFill>
-                  <a:srgbClr val="DDD9E8"/>
-                </a:solidFill>
-                <a:latin typeface="Calibri"/>
-              </a:rPr>
-              <a:t>03 · Blocks &amp; Chains</a:t>
-            </a:r>
-          </a:p>
-        </p:txBody>
-      </p:sp>
-      <p:sp>
-        <p:nvSpPr>
-          <p:cNvPr id="13" name="Rounded Rectangle 12"/>
-          <p:cNvSpPr/>
-          <p:nvPr/>
-        </p:nvSpPr>
-        <p:spPr>
-          <a:xfrm>
-            <a:off x="6013093" y="5669280"/>
-            <a:ext cx="1232611" cy="402336"/>
-          </a:xfrm>
-          <a:prstGeom prst="roundRect">
-            <a:avLst>
-              <a:gd name="adj" fmla="val 50000"/>
-            </a:avLst>
-          </a:prstGeom>
-          <a:solidFill>
-            <a:srgbClr val="FFFFFF">
-              <a:alpha val="14000"/>
-            </a:srgbClr>
-          </a:solidFill>
-          <a:ln w="9525">
-            <a:solidFill>
-              <a:srgbClr val="FFFFFF"/>
-            </a:solidFill>
-          </a:ln>
-          <a:effectLst/>
-        </p:spPr>
-        <p:style>
-          <a:lnRef idx="1">
-            <a:schemeClr val="accent1"/>
-          </a:lnRef>
-          <a:fillRef idx="3">
-            <a:schemeClr val="accent1"/>
-          </a:fillRef>
-          <a:effectRef idx="2">
-            <a:schemeClr val="accent1"/>
-          </a:effectRef>
-          <a:fontRef idx="minor">
-            <a:schemeClr val="lt1"/>
-          </a:fontRef>
-        </p:style>
-        <p:txBody>
-          <a:bodyPr rtlCol="0" anchor="ctr" lIns="109728" rIns="109728" tIns="18288" bIns="18288" wrap="none"/>
-          <a:lstStyle/>
-          <a:p>
-            <a:pPr algn="ctr"/>
-            <a:r>
-              <a:rPr sz="1100" b="0">
-                <a:solidFill>
-                  <a:srgbClr val="DDD9E8"/>
-                </a:solidFill>
-                <a:latin typeface="Calibri"/>
-              </a:rPr>
-              <a:t>04 · Consensus</a:t>
-            </a:r>
-          </a:p>
-        </p:txBody>
-      </p:sp>
-      <p:sp>
-        <p:nvSpPr>
-          <p:cNvPr id="14" name="TextBox 13"/>
-          <p:cNvSpPr txBox="1"/>
-          <p:nvPr/>
-        </p:nvSpPr>
-        <p:spPr>
-          <a:xfrm>
-            <a:off x="822960" y="6446520"/>
-            <a:ext cx="8229600" cy="320040"/>
-          </a:xfrm>
-          <a:prstGeom prst="rect">
-            <a:avLst/>
-          </a:prstGeom>
-          <a:noFill/>
-        </p:spPr>
-        <p:txBody>
-          <a:bodyPr wrap="square" anchor="t" lIns="0" rIns="0" tIns="0" bIns="0">
-            <a:spAutoFit/>
-          </a:bodyPr>
-          <a:lstStyle/>
-          <a:p>
-            <a:pPr algn="l">
-              <a:lnSpc>
-                <a:spcPct val="115000"/>
-              </a:lnSpc>
-            </a:pPr>
-            <a:r>
-              <a:rPr sz="1000" b="0" i="0">
-                <a:solidFill>
-                  <a:srgbClr val="E9E6F2"/>
-                </a:solidFill>
-                <a:latin typeface="Calibri"/>
-              </a:rPr>
-              <a:t>Photo: Simon A. Eugster (LivingShadow) / Wikimedia Commons, CC BY-SA 3.0</a:t>
-            </a:r>
-          </a:p>
-        </p:txBody>
-      </p:sp>
-      <p:sp>
-        <p:nvSpPr>
-          <p:cNvPr id="15" name="TextBox 14"/>
+              <a:t>Understand How It Works</a:t>
+            </a:r>
+          </a:p>
+        </p:txBody>
+      </p:sp>
+      <p:sp>
+        <p:nvSpPr>
+          <p:cNvPr id="10" name="TextBox 9"/>
           <p:cNvSpPr txBox="1"/>
           <p:nvPr/>
         </p:nvSpPr>
@@ -3723,7 +3544,7 @@
                 </a:solidFill>
                 <a:latin typeface="Consolas"/>
               </a:rPr>
-              <a:t>01 / 15</a:t>
+              <a:t>01 / 18</a:t>
             </a:r>
           </a:p>
         </p:txBody>
@@ -3824,7 +3645,7 @@
                 </a:solidFill>
                 <a:latin typeface="Calibri"/>
               </a:rPr>
-              <a:t>REAL-WORLD USES</a:t>
+              <a:t>TOPIC 01 — HASHING</a:t>
             </a:r>
           </a:p>
         </p:txBody>
@@ -3837,7 +3658,46 @@
         </p:nvSpPr>
         <p:spPr>
           <a:xfrm>
-            <a:off x="822960" y="1051560"/>
+            <a:off x="8503920" y="640080"/>
+            <a:ext cx="2834640" cy="365760"/>
+          </a:xfrm>
+          <a:prstGeom prst="rect">
+            <a:avLst/>
+          </a:prstGeom>
+          <a:noFill/>
+        </p:spPr>
+        <p:txBody>
+          <a:bodyPr wrap="square" anchor="t" lIns="0" rIns="0" tIns="0" bIns="0">
+            <a:spAutoFit/>
+          </a:bodyPr>
+          <a:lstStyle/>
+          <a:p>
+            <a:pPr algn="r">
+              <a:lnSpc>
+                <a:spcPct val="115000"/>
+              </a:lnSpc>
+            </a:pPr>
+            <a:r>
+              <a:rPr sz="1200" b="1" i="0">
+                <a:solidFill>
+                  <a:srgbClr val="5C576E"/>
+                </a:solidFill>
+                <a:latin typeface="Calibri"/>
+              </a:rPr>
+              <a:t>KEY IDEA 4 / 4</a:t>
+            </a:r>
+          </a:p>
+        </p:txBody>
+      </p:sp>
+      <p:sp>
+        <p:nvSpPr>
+          <p:cNvPr id="5" name="TextBox 4"/>
+          <p:cNvSpPr txBox="1"/>
+          <p:nvPr/>
+        </p:nvSpPr>
+        <p:spPr>
+          <a:xfrm>
+            <a:off x="822960" y="1097280"/>
             <a:ext cx="9601200" cy="1005840"/>
           </a:xfrm>
           <a:prstGeom prst="rect">
@@ -3863,34 +3723,71 @@
                 </a:solidFill>
                 <a:latin typeface="Century Gothic"/>
               </a:rPr>
-              <a:t>Not Just Blockchain</a:t>
-            </a:r>
-          </a:p>
-        </p:txBody>
-      </p:sp>
-      <p:sp>
-        <p:nvSpPr>
-          <p:cNvPr id="5" name="Rounded Rectangle 4"/>
+              <a:t>Collision-Resistant</a:t>
+            </a:r>
+          </a:p>
+        </p:txBody>
+      </p:sp>
+      <p:sp>
+        <p:nvSpPr>
+          <p:cNvPr id="6" name="TextBox 5"/>
+          <p:cNvSpPr txBox="1"/>
+          <p:nvPr/>
+        </p:nvSpPr>
+        <p:spPr>
+          <a:xfrm>
+            <a:off x="822960" y="2148840"/>
+            <a:ext cx="9875520" cy="2011680"/>
+          </a:xfrm>
+          <a:prstGeom prst="rect">
+            <a:avLst/>
+          </a:prstGeom>
+          <a:noFill/>
+        </p:spPr>
+        <p:txBody>
+          <a:bodyPr wrap="square" anchor="t" lIns="0" rIns="0" tIns="0" bIns="0">
+            <a:spAutoFit/>
+          </a:bodyPr>
+          <a:lstStyle/>
+          <a:p>
+            <a:pPr algn="l">
+              <a:lnSpc>
+                <a:spcPct val="150000"/>
+              </a:lnSpc>
+            </a:pPr>
+            <a:r>
+              <a:rPr sz="1650" b="0" i="0">
+                <a:solidFill>
+                  <a:srgbClr val="1C1730"/>
+                </a:solidFill>
+                <a:latin typeface="Calibri"/>
+              </a:rPr>
+              <a:t>It should be practically impossible to find two different inputs that produce the same hash. This is what makes a hash trustworthy as a stand-in for the original data — one hash, one piece of data.</a:t>
+            </a:r>
+          </a:p>
+        </p:txBody>
+      </p:sp>
+      <p:sp>
+        <p:nvSpPr>
+          <p:cNvPr id="7" name="Rounded Rectangle 6"/>
           <p:cNvSpPr/>
           <p:nvPr/>
         </p:nvSpPr>
         <p:spPr>
           <a:xfrm>
-            <a:off x="822960" y="2011680"/>
-            <a:ext cx="3322320" cy="1508760"/>
+            <a:off x="822960" y="4434840"/>
+            <a:ext cx="10515600" cy="1280160"/>
           </a:xfrm>
           <a:prstGeom prst="roundRect">
             <a:avLst>
-              <a:gd name="adj" fmla="val 9000"/>
+              <a:gd name="adj" fmla="val 6000"/>
             </a:avLst>
           </a:prstGeom>
           <a:solidFill>
-            <a:srgbClr val="FFFFFF"/>
+            <a:srgbClr val="F8ECE9"/>
           </a:solidFill>
-          <a:ln w="12700">
-            <a:solidFill>
-              <a:srgbClr val="DED9EA"/>
-            </a:solidFill>
+          <a:ln>
+            <a:noFill/>
           </a:ln>
           <a:effectLst/>
         </p:spPr>
@@ -3918,14 +3815,14 @@
       </p:sp>
       <p:sp>
         <p:nvSpPr>
-          <p:cNvPr id="6" name="TextBox 5"/>
-          <p:cNvSpPr txBox="1"/>
-          <p:nvPr/>
-        </p:nvSpPr>
-        <p:spPr>
-          <a:xfrm>
-            <a:off x="1078992" y="2267712"/>
-            <a:ext cx="2810256" cy="457200"/>
+          <p:cNvPr id="8" name="TextBox 7"/>
+          <p:cNvSpPr txBox="1"/>
+          <p:nvPr/>
+        </p:nvSpPr>
+        <p:spPr>
+          <a:xfrm>
+            <a:off x="1143000" y="4617720"/>
+            <a:ext cx="9875520" cy="320040"/>
           </a:xfrm>
           <a:prstGeom prst="rect">
             <a:avLst/>
@@ -3944,27 +3841,27 @@
               </a:lnSpc>
             </a:pPr>
             <a:r>
-              <a:rPr sz="1450" b="1" i="0">
+              <a:rPr sz="1100" b="1" i="0">
                 <a:solidFill>
                   <a:srgbClr val="C1432B"/>
                 </a:solidFill>
-                <a:latin typeface="Century Gothic"/>
-              </a:rPr>
-              <a:t>Software Checksums</a:t>
-            </a:r>
-          </a:p>
-        </p:txBody>
-      </p:sp>
-      <p:sp>
-        <p:nvSpPr>
-          <p:cNvPr id="7" name="TextBox 6"/>
-          <p:cNvSpPr txBox="1"/>
-          <p:nvPr/>
-        </p:nvSpPr>
-        <p:spPr>
-          <a:xfrm>
-            <a:off x="1078992" y="2724912"/>
-            <a:ext cx="2810256" cy="658368"/>
+                <a:latin typeface="Calibri"/>
+              </a:rPr>
+              <a:t>EXAMPLE</a:t>
+            </a:r>
+          </a:p>
+        </p:txBody>
+      </p:sp>
+      <p:sp>
+        <p:nvSpPr>
+          <p:cNvPr id="9" name="TextBox 8"/>
+          <p:cNvSpPr txBox="1"/>
+          <p:nvPr/>
+        </p:nvSpPr>
+        <p:spPr>
+          <a:xfrm>
+            <a:off x="1143000" y="4956048"/>
+            <a:ext cx="9875520" cy="640080"/>
           </a:xfrm>
           <a:prstGeom prst="rect">
             <a:avLst/>
@@ -3979,104 +3876,17 @@
           <a:p>
             <a:pPr algn="l">
               <a:lnSpc>
-                <a:spcPct val="128000"/>
-              </a:lnSpc>
-            </a:pPr>
-            <a:r>
-              <a:rPr sz="1150" b="0" i="0">
+                <a:spcPct val="130000"/>
+              </a:lnSpc>
+            </a:pPr>
+            <a:r>
+              <a:rPr sz="1400" b="0" i="0">
                 <a:solidFill>
                   <a:srgbClr val="1C1730"/>
                 </a:solidFill>
-                <a:latin typeface="Calibri"/>
-              </a:rPr>
-              <a:t>Verify a download wasn't corrupted or tampered with in transit.</a:t>
-            </a:r>
-          </a:p>
-        </p:txBody>
-      </p:sp>
-      <p:sp>
-        <p:nvSpPr>
-          <p:cNvPr id="8" name="Rounded Rectangle 7"/>
-          <p:cNvSpPr/>
-          <p:nvPr/>
-        </p:nvSpPr>
-        <p:spPr>
-          <a:xfrm>
-            <a:off x="4419600" y="2011680"/>
-            <a:ext cx="3322320" cy="1508760"/>
-          </a:xfrm>
-          <a:prstGeom prst="roundRect">
-            <a:avLst>
-              <a:gd name="adj" fmla="val 9000"/>
-            </a:avLst>
-          </a:prstGeom>
-          <a:solidFill>
-            <a:srgbClr val="FFFFFF"/>
-          </a:solidFill>
-          <a:ln w="12700">
-            <a:solidFill>
-              <a:srgbClr val="DED9EA"/>
-            </a:solidFill>
-          </a:ln>
-          <a:effectLst/>
-        </p:spPr>
-        <p:style>
-          <a:lnRef idx="1">
-            <a:schemeClr val="accent1"/>
-          </a:lnRef>
-          <a:fillRef idx="3">
-            <a:schemeClr val="accent1"/>
-          </a:fillRef>
-          <a:effectRef idx="2">
-            <a:schemeClr val="accent1"/>
-          </a:effectRef>
-          <a:fontRef idx="minor">
-            <a:schemeClr val="lt1"/>
-          </a:fontRef>
-        </p:style>
-        <p:txBody>
-          <a:bodyPr rtlCol="0" anchor="ctr"/>
-          <a:lstStyle/>
-          <a:p>
-            <a:pPr algn="ctr"/>
-          </a:p>
-        </p:txBody>
-      </p:sp>
-      <p:sp>
-        <p:nvSpPr>
-          <p:cNvPr id="9" name="TextBox 8"/>
-          <p:cNvSpPr txBox="1"/>
-          <p:nvPr/>
-        </p:nvSpPr>
-        <p:spPr>
-          <a:xfrm>
-            <a:off x="4675632" y="2267712"/>
-            <a:ext cx="2810256" cy="457200"/>
-          </a:xfrm>
-          <a:prstGeom prst="rect">
-            <a:avLst/>
-          </a:prstGeom>
-          <a:noFill/>
-        </p:spPr>
-        <p:txBody>
-          <a:bodyPr wrap="square" anchor="t" lIns="0" rIns="0" tIns="0" bIns="0">
-            <a:spAutoFit/>
-          </a:bodyPr>
-          <a:lstStyle/>
-          <a:p>
-            <a:pPr algn="l">
-              <a:lnSpc>
-                <a:spcPct val="115000"/>
-              </a:lnSpc>
-            </a:pPr>
-            <a:r>
-              <a:rPr sz="1450" b="1" i="0">
-                <a:solidFill>
-                  <a:srgbClr val="C1432B"/>
-                </a:solidFill>
-                <a:latin typeface="Century Gothic"/>
-              </a:rPr>
-              <a:t>Git Version Control</a:t>
+                <a:latin typeface="Consolas"/>
+              </a:rPr>
+              <a:t>No two distinct files should ever share a SHA-256 hash in practice.</a:t>
             </a:r>
           </a:p>
         </p:txBody>
@@ -4084,549 +3894,6 @@
       <p:sp>
         <p:nvSpPr>
           <p:cNvPr id="10" name="TextBox 9"/>
-          <p:cNvSpPr txBox="1"/>
-          <p:nvPr/>
-        </p:nvSpPr>
-        <p:spPr>
-          <a:xfrm>
-            <a:off x="4675632" y="2724912"/>
-            <a:ext cx="2810256" cy="658368"/>
-          </a:xfrm>
-          <a:prstGeom prst="rect">
-            <a:avLst/>
-          </a:prstGeom>
-          <a:noFill/>
-        </p:spPr>
-        <p:txBody>
-          <a:bodyPr wrap="square" anchor="t" lIns="0" rIns="0" tIns="0" bIns="0">
-            <a:spAutoFit/>
-          </a:bodyPr>
-          <a:lstStyle/>
-          <a:p>
-            <a:pPr algn="l">
-              <a:lnSpc>
-                <a:spcPct val="128000"/>
-              </a:lnSpc>
-            </a:pPr>
-            <a:r>
-              <a:rPr sz="1150" b="0" i="0">
-                <a:solidFill>
-                  <a:srgbClr val="1C1730"/>
-                </a:solidFill>
-                <a:latin typeface="Calibri"/>
-              </a:rPr>
-              <a:t>Every commit and file is identified by a hash — full deep-dive in Topic 03.</a:t>
-            </a:r>
-          </a:p>
-        </p:txBody>
-      </p:sp>
-      <p:sp>
-        <p:nvSpPr>
-          <p:cNvPr id="11" name="Rounded Rectangle 10"/>
-          <p:cNvSpPr/>
-          <p:nvPr/>
-        </p:nvSpPr>
-        <p:spPr>
-          <a:xfrm>
-            <a:off x="8016240" y="2011680"/>
-            <a:ext cx="3322320" cy="1508760"/>
-          </a:xfrm>
-          <a:prstGeom prst="roundRect">
-            <a:avLst>
-              <a:gd name="adj" fmla="val 9000"/>
-            </a:avLst>
-          </a:prstGeom>
-          <a:solidFill>
-            <a:srgbClr val="FFFFFF"/>
-          </a:solidFill>
-          <a:ln w="12700">
-            <a:solidFill>
-              <a:srgbClr val="DED9EA"/>
-            </a:solidFill>
-          </a:ln>
-          <a:effectLst/>
-        </p:spPr>
-        <p:style>
-          <a:lnRef idx="1">
-            <a:schemeClr val="accent1"/>
-          </a:lnRef>
-          <a:fillRef idx="3">
-            <a:schemeClr val="accent1"/>
-          </a:fillRef>
-          <a:effectRef idx="2">
-            <a:schemeClr val="accent1"/>
-          </a:effectRef>
-          <a:fontRef idx="minor">
-            <a:schemeClr val="lt1"/>
-          </a:fontRef>
-        </p:style>
-        <p:txBody>
-          <a:bodyPr rtlCol="0" anchor="ctr"/>
-          <a:lstStyle/>
-          <a:p>
-            <a:pPr algn="ctr"/>
-          </a:p>
-        </p:txBody>
-      </p:sp>
-      <p:sp>
-        <p:nvSpPr>
-          <p:cNvPr id="12" name="TextBox 11"/>
-          <p:cNvSpPr txBox="1"/>
-          <p:nvPr/>
-        </p:nvSpPr>
-        <p:spPr>
-          <a:xfrm>
-            <a:off x="8272272" y="2267712"/>
-            <a:ext cx="2810256" cy="457200"/>
-          </a:xfrm>
-          <a:prstGeom prst="rect">
-            <a:avLst/>
-          </a:prstGeom>
-          <a:noFill/>
-        </p:spPr>
-        <p:txBody>
-          <a:bodyPr wrap="square" anchor="t" lIns="0" rIns="0" tIns="0" bIns="0">
-            <a:spAutoFit/>
-          </a:bodyPr>
-          <a:lstStyle/>
-          <a:p>
-            <a:pPr algn="l">
-              <a:lnSpc>
-                <a:spcPct val="115000"/>
-              </a:lnSpc>
-            </a:pPr>
-            <a:r>
-              <a:rPr sz="1450" b="1" i="0">
-                <a:solidFill>
-                  <a:srgbClr val="C1432B"/>
-                </a:solidFill>
-                <a:latin typeface="Century Gothic"/>
-              </a:rPr>
-              <a:t>Password Storage</a:t>
-            </a:r>
-          </a:p>
-        </p:txBody>
-      </p:sp>
-      <p:sp>
-        <p:nvSpPr>
-          <p:cNvPr id="13" name="TextBox 12"/>
-          <p:cNvSpPr txBox="1"/>
-          <p:nvPr/>
-        </p:nvSpPr>
-        <p:spPr>
-          <a:xfrm>
-            <a:off x="8272272" y="2724912"/>
-            <a:ext cx="2810256" cy="658368"/>
-          </a:xfrm>
-          <a:prstGeom prst="rect">
-            <a:avLst/>
-          </a:prstGeom>
-          <a:noFill/>
-        </p:spPr>
-        <p:txBody>
-          <a:bodyPr wrap="square" anchor="t" lIns="0" rIns="0" tIns="0" bIns="0">
-            <a:spAutoFit/>
-          </a:bodyPr>
-          <a:lstStyle/>
-          <a:p>
-            <a:pPr algn="l">
-              <a:lnSpc>
-                <a:spcPct val="128000"/>
-              </a:lnSpc>
-            </a:pPr>
-            <a:r>
-              <a:rPr sz="1150" b="0" i="0">
-                <a:solidFill>
-                  <a:srgbClr val="1C1730"/>
-                </a:solidFill>
-                <a:latin typeface="Calibri"/>
-              </a:rPr>
-              <a:t>Systems store a hash of your password, never the password itself.</a:t>
-            </a:r>
-          </a:p>
-        </p:txBody>
-      </p:sp>
-      <p:sp>
-        <p:nvSpPr>
-          <p:cNvPr id="14" name="Rounded Rectangle 13"/>
-          <p:cNvSpPr/>
-          <p:nvPr/>
-        </p:nvSpPr>
-        <p:spPr>
-          <a:xfrm>
-            <a:off x="822960" y="3749040"/>
-            <a:ext cx="3322320" cy="1508760"/>
-          </a:xfrm>
-          <a:prstGeom prst="roundRect">
-            <a:avLst>
-              <a:gd name="adj" fmla="val 9000"/>
-            </a:avLst>
-          </a:prstGeom>
-          <a:solidFill>
-            <a:srgbClr val="FFFFFF"/>
-          </a:solidFill>
-          <a:ln w="12700">
-            <a:solidFill>
-              <a:srgbClr val="DED9EA"/>
-            </a:solidFill>
-          </a:ln>
-          <a:effectLst/>
-        </p:spPr>
-        <p:style>
-          <a:lnRef idx="1">
-            <a:schemeClr val="accent1"/>
-          </a:lnRef>
-          <a:fillRef idx="3">
-            <a:schemeClr val="accent1"/>
-          </a:fillRef>
-          <a:effectRef idx="2">
-            <a:schemeClr val="accent1"/>
-          </a:effectRef>
-          <a:fontRef idx="minor">
-            <a:schemeClr val="lt1"/>
-          </a:fontRef>
-        </p:style>
-        <p:txBody>
-          <a:bodyPr rtlCol="0" anchor="ctr"/>
-          <a:lstStyle/>
-          <a:p>
-            <a:pPr algn="ctr"/>
-          </a:p>
-        </p:txBody>
-      </p:sp>
-      <p:sp>
-        <p:nvSpPr>
-          <p:cNvPr id="15" name="TextBox 14"/>
-          <p:cNvSpPr txBox="1"/>
-          <p:nvPr/>
-        </p:nvSpPr>
-        <p:spPr>
-          <a:xfrm>
-            <a:off x="1078992" y="4005072"/>
-            <a:ext cx="2810256" cy="457200"/>
-          </a:xfrm>
-          <a:prstGeom prst="rect">
-            <a:avLst/>
-          </a:prstGeom>
-          <a:noFill/>
-        </p:spPr>
-        <p:txBody>
-          <a:bodyPr wrap="square" anchor="t" lIns="0" rIns="0" tIns="0" bIns="0">
-            <a:spAutoFit/>
-          </a:bodyPr>
-          <a:lstStyle/>
-          <a:p>
-            <a:pPr algn="l">
-              <a:lnSpc>
-                <a:spcPct val="115000"/>
-              </a:lnSpc>
-            </a:pPr>
-            <a:r>
-              <a:rPr sz="1450" b="1" i="0">
-                <a:solidFill>
-                  <a:srgbClr val="C1432B"/>
-                </a:solidFill>
-                <a:latin typeface="Century Gothic"/>
-              </a:rPr>
-              <a:t>Cloud Deduplication</a:t>
-            </a:r>
-          </a:p>
-        </p:txBody>
-      </p:sp>
-      <p:sp>
-        <p:nvSpPr>
-          <p:cNvPr id="16" name="TextBox 15"/>
-          <p:cNvSpPr txBox="1"/>
-          <p:nvPr/>
-        </p:nvSpPr>
-        <p:spPr>
-          <a:xfrm>
-            <a:off x="1078992" y="4462272"/>
-            <a:ext cx="2810256" cy="658368"/>
-          </a:xfrm>
-          <a:prstGeom prst="rect">
-            <a:avLst/>
-          </a:prstGeom>
-          <a:noFill/>
-        </p:spPr>
-        <p:txBody>
-          <a:bodyPr wrap="square" anchor="t" lIns="0" rIns="0" tIns="0" bIns="0">
-            <a:spAutoFit/>
-          </a:bodyPr>
-          <a:lstStyle/>
-          <a:p>
-            <a:pPr algn="l">
-              <a:lnSpc>
-                <a:spcPct val="128000"/>
-              </a:lnSpc>
-            </a:pPr>
-            <a:r>
-              <a:rPr sz="1150" b="0" i="0">
-                <a:solidFill>
-                  <a:srgbClr val="1C1730"/>
-                </a:solidFill>
-                <a:latin typeface="Calibri"/>
-              </a:rPr>
-              <a:t>Identical files across users are recognized by matching hashes.</a:t>
-            </a:r>
-          </a:p>
-        </p:txBody>
-      </p:sp>
-      <p:sp>
-        <p:nvSpPr>
-          <p:cNvPr id="17" name="Rounded Rectangle 16"/>
-          <p:cNvSpPr/>
-          <p:nvPr/>
-        </p:nvSpPr>
-        <p:spPr>
-          <a:xfrm>
-            <a:off x="4419600" y="3749040"/>
-            <a:ext cx="3322320" cy="1508760"/>
-          </a:xfrm>
-          <a:prstGeom prst="roundRect">
-            <a:avLst>
-              <a:gd name="adj" fmla="val 9000"/>
-            </a:avLst>
-          </a:prstGeom>
-          <a:solidFill>
-            <a:srgbClr val="FFFFFF"/>
-          </a:solidFill>
-          <a:ln w="12700">
-            <a:solidFill>
-              <a:srgbClr val="DED9EA"/>
-            </a:solidFill>
-          </a:ln>
-          <a:effectLst/>
-        </p:spPr>
-        <p:style>
-          <a:lnRef idx="1">
-            <a:schemeClr val="accent1"/>
-          </a:lnRef>
-          <a:fillRef idx="3">
-            <a:schemeClr val="accent1"/>
-          </a:fillRef>
-          <a:effectRef idx="2">
-            <a:schemeClr val="accent1"/>
-          </a:effectRef>
-          <a:fontRef idx="minor">
-            <a:schemeClr val="lt1"/>
-          </a:fontRef>
-        </p:style>
-        <p:txBody>
-          <a:bodyPr rtlCol="0" anchor="ctr"/>
-          <a:lstStyle/>
-          <a:p>
-            <a:pPr algn="ctr"/>
-          </a:p>
-        </p:txBody>
-      </p:sp>
-      <p:sp>
-        <p:nvSpPr>
-          <p:cNvPr id="18" name="TextBox 17"/>
-          <p:cNvSpPr txBox="1"/>
-          <p:nvPr/>
-        </p:nvSpPr>
-        <p:spPr>
-          <a:xfrm>
-            <a:off x="4675632" y="4005072"/>
-            <a:ext cx="2810256" cy="457200"/>
-          </a:xfrm>
-          <a:prstGeom prst="rect">
-            <a:avLst/>
-          </a:prstGeom>
-          <a:noFill/>
-        </p:spPr>
-        <p:txBody>
-          <a:bodyPr wrap="square" anchor="t" lIns="0" rIns="0" tIns="0" bIns="0">
-            <a:spAutoFit/>
-          </a:bodyPr>
-          <a:lstStyle/>
-          <a:p>
-            <a:pPr algn="l">
-              <a:lnSpc>
-                <a:spcPct val="115000"/>
-              </a:lnSpc>
-            </a:pPr>
-            <a:r>
-              <a:rPr sz="1450" b="1" i="0">
-                <a:solidFill>
-                  <a:srgbClr val="C1432B"/>
-                </a:solidFill>
-                <a:latin typeface="Century Gothic"/>
-              </a:rPr>
-              <a:t>Digital Forensics</a:t>
-            </a:r>
-          </a:p>
-        </p:txBody>
-      </p:sp>
-      <p:sp>
-        <p:nvSpPr>
-          <p:cNvPr id="19" name="TextBox 18"/>
-          <p:cNvSpPr txBox="1"/>
-          <p:nvPr/>
-        </p:nvSpPr>
-        <p:spPr>
-          <a:xfrm>
-            <a:off x="4675632" y="4462272"/>
-            <a:ext cx="2810256" cy="658368"/>
-          </a:xfrm>
-          <a:prstGeom prst="rect">
-            <a:avLst/>
-          </a:prstGeom>
-          <a:noFill/>
-        </p:spPr>
-        <p:txBody>
-          <a:bodyPr wrap="square" anchor="t" lIns="0" rIns="0" tIns="0" bIns="0">
-            <a:spAutoFit/>
-          </a:bodyPr>
-          <a:lstStyle/>
-          <a:p>
-            <a:pPr algn="l">
-              <a:lnSpc>
-                <a:spcPct val="128000"/>
-              </a:lnSpc>
-            </a:pPr>
-            <a:r>
-              <a:rPr sz="1150" b="0" i="0">
-                <a:solidFill>
-                  <a:srgbClr val="1C1730"/>
-                </a:solidFill>
-                <a:latin typeface="Calibri"/>
-              </a:rPr>
-              <a:t>Investigators hash evidence to prove it wasn't altered after collection.</a:t>
-            </a:r>
-          </a:p>
-        </p:txBody>
-      </p:sp>
-      <p:sp>
-        <p:nvSpPr>
-          <p:cNvPr id="20" name="Rounded Rectangle 19"/>
-          <p:cNvSpPr/>
-          <p:nvPr/>
-        </p:nvSpPr>
-        <p:spPr>
-          <a:xfrm>
-            <a:off x="8016240" y="3749040"/>
-            <a:ext cx="3322320" cy="1508760"/>
-          </a:xfrm>
-          <a:prstGeom prst="roundRect">
-            <a:avLst>
-              <a:gd name="adj" fmla="val 9000"/>
-            </a:avLst>
-          </a:prstGeom>
-          <a:solidFill>
-            <a:srgbClr val="FFFFFF"/>
-          </a:solidFill>
-          <a:ln w="12700">
-            <a:solidFill>
-              <a:srgbClr val="DED9EA"/>
-            </a:solidFill>
-          </a:ln>
-          <a:effectLst/>
-        </p:spPr>
-        <p:style>
-          <a:lnRef idx="1">
-            <a:schemeClr val="accent1"/>
-          </a:lnRef>
-          <a:fillRef idx="3">
-            <a:schemeClr val="accent1"/>
-          </a:fillRef>
-          <a:effectRef idx="2">
-            <a:schemeClr val="accent1"/>
-          </a:effectRef>
-          <a:fontRef idx="minor">
-            <a:schemeClr val="lt1"/>
-          </a:fontRef>
-        </p:style>
-        <p:txBody>
-          <a:bodyPr rtlCol="0" anchor="ctr"/>
-          <a:lstStyle/>
-          <a:p>
-            <a:pPr algn="ctr"/>
-          </a:p>
-        </p:txBody>
-      </p:sp>
-      <p:sp>
-        <p:nvSpPr>
-          <p:cNvPr id="21" name="TextBox 20"/>
-          <p:cNvSpPr txBox="1"/>
-          <p:nvPr/>
-        </p:nvSpPr>
-        <p:spPr>
-          <a:xfrm>
-            <a:off x="8272272" y="4005072"/>
-            <a:ext cx="2810256" cy="457200"/>
-          </a:xfrm>
-          <a:prstGeom prst="rect">
-            <a:avLst/>
-          </a:prstGeom>
-          <a:noFill/>
-        </p:spPr>
-        <p:txBody>
-          <a:bodyPr wrap="square" anchor="t" lIns="0" rIns="0" tIns="0" bIns="0">
-            <a:spAutoFit/>
-          </a:bodyPr>
-          <a:lstStyle/>
-          <a:p>
-            <a:pPr algn="l">
-              <a:lnSpc>
-                <a:spcPct val="115000"/>
-              </a:lnSpc>
-            </a:pPr>
-            <a:r>
-              <a:rPr sz="1450" b="1" i="0">
-                <a:solidFill>
-                  <a:srgbClr val="C1432B"/>
-                </a:solidFill>
-                <a:latin typeface="Century Gothic"/>
-              </a:rPr>
-              <a:t>Certificate Transparency</a:t>
-            </a:r>
-          </a:p>
-        </p:txBody>
-      </p:sp>
-      <p:sp>
-        <p:nvSpPr>
-          <p:cNvPr id="22" name="TextBox 21"/>
-          <p:cNvSpPr txBox="1"/>
-          <p:nvPr/>
-        </p:nvSpPr>
-        <p:spPr>
-          <a:xfrm>
-            <a:off x="8272272" y="4462272"/>
-            <a:ext cx="2810256" cy="658368"/>
-          </a:xfrm>
-          <a:prstGeom prst="rect">
-            <a:avLst/>
-          </a:prstGeom>
-          <a:noFill/>
-        </p:spPr>
-        <p:txBody>
-          <a:bodyPr wrap="square" anchor="t" lIns="0" rIns="0" tIns="0" bIns="0">
-            <a:spAutoFit/>
-          </a:bodyPr>
-          <a:lstStyle/>
-          <a:p>
-            <a:pPr algn="l">
-              <a:lnSpc>
-                <a:spcPct val="128000"/>
-              </a:lnSpc>
-            </a:pPr>
-            <a:r>
-              <a:rPr sz="1150" b="0" i="0">
-                <a:solidFill>
-                  <a:srgbClr val="1C1730"/>
-                </a:solidFill>
-                <a:latin typeface="Calibri"/>
-              </a:rPr>
-              <a:t>Every SSL certificate is logged into a public, tamper-evident hash-chained record.</a:t>
-            </a:r>
-          </a:p>
-        </p:txBody>
-      </p:sp>
-      <p:sp>
-        <p:nvSpPr>
-          <p:cNvPr id="23" name="TextBox 22"/>
           <p:cNvSpPr txBox="1"/>
           <p:nvPr/>
         </p:nvSpPr>
@@ -4658,7 +3925,7 @@
                 </a:solidFill>
                 <a:latin typeface="Consolas"/>
               </a:rPr>
-              <a:t>10 / 15</a:t>
+              <a:t>10 / 18</a:t>
             </a:r>
           </a:p>
         </p:txBody>
@@ -4759,7 +4026,7 @@
                 </a:solidFill>
                 <a:latin typeface="Calibri"/>
               </a:rPr>
-              <a:t>FLAGSHIP CASE STUDY</a:t>
+              <a:t>WORKED EXAMPLE — PART 1</a:t>
             </a:r>
           </a:p>
         </p:txBody>
@@ -4772,7 +4039,7 @@
         </p:nvSpPr>
         <p:spPr>
           <a:xfrm>
-            <a:off x="822960" y="1097280"/>
+            <a:off x="822960" y="1051560"/>
             <a:ext cx="10332720" cy="1005840"/>
           </a:xfrm>
           <a:prstGeom prst="rect">
@@ -4792,13 +4059,13 @@
               </a:lnSpc>
             </a:pPr>
             <a:r>
-              <a:rPr sz="3000" b="1" i="0">
+              <a:rPr sz="2700" b="1" i="0">
                 <a:solidFill>
                   <a:srgbClr val="1C1730"/>
                 </a:solidFill>
                 <a:latin typeface="Century Gothic"/>
               </a:rPr>
-              <a:t>Why Plain SHA-256 Is Wrong For Passwords</a:t>
+              <a:t>Determinism, Proven On A Real Machine</a:t>
             </a:r>
           </a:p>
         </p:txBody>
@@ -4811,16 +4078,16 @@
         </p:nvSpPr>
         <p:spPr>
           <a:xfrm>
-            <a:off x="822960" y="2423160"/>
-            <a:ext cx="10515600" cy="3749039"/>
+            <a:off x="822960" y="1965960"/>
+            <a:ext cx="10515600" cy="3840480"/>
           </a:xfrm>
           <a:prstGeom prst="roundRect">
             <a:avLst>
-              <a:gd name="adj" fmla="val 4000"/>
+              <a:gd name="adj" fmla="val 4500"/>
             </a:avLst>
           </a:prstGeom>
           <a:solidFill>
-            <a:srgbClr val="C1432B"/>
+            <a:srgbClr val="141026"/>
           </a:solidFill>
           <a:ln>
             <a:noFill/>
@@ -4851,14 +4118,146 @@
       </p:sp>
       <p:sp>
         <p:nvSpPr>
-          <p:cNvPr id="6" name="TextBox 5"/>
-          <p:cNvSpPr txBox="1"/>
-          <p:nvPr/>
-        </p:nvSpPr>
-        <p:spPr>
-          <a:xfrm>
-            <a:off x="1280160" y="2743200"/>
-            <a:ext cx="9601200" cy="3200400"/>
+          <p:cNvPr id="6" name="Oval 5"/>
+          <p:cNvSpPr/>
+          <p:nvPr/>
+        </p:nvSpPr>
+        <p:spPr>
+          <a:xfrm>
+            <a:off x="1024128" y="2130552"/>
+            <a:ext cx="109728" cy="109728"/>
+          </a:xfrm>
+          <a:prstGeom prst="ellipse">
+            <a:avLst/>
+          </a:prstGeom>
+          <a:solidFill>
+            <a:srgbClr val="FF6459"/>
+          </a:solidFill>
+          <a:ln>
+            <a:noFill/>
+          </a:ln>
+          <a:effectLst/>
+        </p:spPr>
+        <p:style>
+          <a:lnRef idx="1">
+            <a:schemeClr val="accent1"/>
+          </a:lnRef>
+          <a:fillRef idx="3">
+            <a:schemeClr val="accent1"/>
+          </a:fillRef>
+          <a:effectRef idx="2">
+            <a:schemeClr val="accent1"/>
+          </a:effectRef>
+          <a:fontRef idx="minor">
+            <a:schemeClr val="lt1"/>
+          </a:fontRef>
+        </p:style>
+        <p:txBody>
+          <a:bodyPr rtlCol="0" anchor="ctr"/>
+          <a:lstStyle/>
+          <a:p>
+            <a:pPr algn="ctr"/>
+          </a:p>
+        </p:txBody>
+      </p:sp>
+      <p:sp>
+        <p:nvSpPr>
+          <p:cNvPr id="7" name="Oval 6"/>
+          <p:cNvSpPr/>
+          <p:nvPr/>
+        </p:nvSpPr>
+        <p:spPr>
+          <a:xfrm>
+            <a:off x="1225296" y="2130552"/>
+            <a:ext cx="109728" cy="109728"/>
+          </a:xfrm>
+          <a:prstGeom prst="ellipse">
+            <a:avLst/>
+          </a:prstGeom>
+          <a:solidFill>
+            <a:srgbClr val="FFC02E"/>
+          </a:solidFill>
+          <a:ln>
+            <a:noFill/>
+          </a:ln>
+          <a:effectLst/>
+        </p:spPr>
+        <p:style>
+          <a:lnRef idx="1">
+            <a:schemeClr val="accent1"/>
+          </a:lnRef>
+          <a:fillRef idx="3">
+            <a:schemeClr val="accent1"/>
+          </a:fillRef>
+          <a:effectRef idx="2">
+            <a:schemeClr val="accent1"/>
+          </a:effectRef>
+          <a:fontRef idx="minor">
+            <a:schemeClr val="lt1"/>
+          </a:fontRef>
+        </p:style>
+        <p:txBody>
+          <a:bodyPr rtlCol="0" anchor="ctr"/>
+          <a:lstStyle/>
+          <a:p>
+            <a:pPr algn="ctr"/>
+          </a:p>
+        </p:txBody>
+      </p:sp>
+      <p:sp>
+        <p:nvSpPr>
+          <p:cNvPr id="8" name="Oval 7"/>
+          <p:cNvSpPr/>
+          <p:nvPr/>
+        </p:nvSpPr>
+        <p:spPr>
+          <a:xfrm>
+            <a:off x="1426464" y="2130552"/>
+            <a:ext cx="109728" cy="109728"/>
+          </a:xfrm>
+          <a:prstGeom prst="ellipse">
+            <a:avLst/>
+          </a:prstGeom>
+          <a:solidFill>
+            <a:srgbClr val="28C93F"/>
+          </a:solidFill>
+          <a:ln>
+            <a:noFill/>
+          </a:ln>
+          <a:effectLst/>
+        </p:spPr>
+        <p:style>
+          <a:lnRef idx="1">
+            <a:schemeClr val="accent1"/>
+          </a:lnRef>
+          <a:fillRef idx="3">
+            <a:schemeClr val="accent1"/>
+          </a:fillRef>
+          <a:effectRef idx="2">
+            <a:schemeClr val="accent1"/>
+          </a:effectRef>
+          <a:fontRef idx="minor">
+            <a:schemeClr val="lt1"/>
+          </a:fontRef>
+        </p:style>
+        <p:txBody>
+          <a:bodyPr rtlCol="0" anchor="ctr"/>
+          <a:lstStyle/>
+          <a:p>
+            <a:pPr algn="ctr"/>
+          </a:p>
+        </p:txBody>
+      </p:sp>
+      <p:sp>
+        <p:nvSpPr>
+          <p:cNvPr id="9" name="TextBox 8"/>
+          <p:cNvSpPr txBox="1"/>
+          <p:nvPr/>
+        </p:nvSpPr>
+        <p:spPr>
+          <a:xfrm>
+            <a:off x="1078992" y="2350008"/>
+            <a:ext cx="10003536" cy="3273552"/>
           </a:xfrm>
           <a:prstGeom prst="rect">
             <a:avLst/>
@@ -4873,24 +4272,193 @@
           <a:p>
             <a:pPr algn="l">
               <a:lnSpc>
-                <a:spcPct val="155000"/>
-              </a:lnSpc>
-            </a:pPr>
-            <a:r>
-              <a:rPr sz="1600" b="0" i="0">
-                <a:solidFill>
-                  <a:srgbClr val="FFFFFF"/>
+                <a:spcPct val="135000"/>
+              </a:lnSpc>
+            </a:pPr>
+            <a:r>
+              <a:rPr sz="1350" b="1">
+                <a:solidFill>
+                  <a:srgbClr val="9C93C9"/>
+                </a:solidFill>
+                <a:latin typeface="Consolas"/>
+              </a:rPr>
+              <a:t>$ </a:t>
+            </a:r>
+            <a:r>
+              <a:rPr sz="1350" b="0">
+                <a:solidFill>
+                  <a:srgbClr val="EDE9F7"/>
+                </a:solidFill>
+                <a:latin typeface="Consolas"/>
+              </a:rPr>
+              <a:t>echo -n "hello" | shasum -a 256</a:t>
+            </a:r>
+          </a:p>
+          <a:p>
+            <a:pPr algn="l">
+              <a:lnSpc>
+                <a:spcPct val="135000"/>
+              </a:lnSpc>
+            </a:pPr>
+            <a:r>
+              <a:rPr sz="1350" b="0">
+                <a:solidFill>
+                  <a:srgbClr val="7FE0C4"/>
+                </a:solidFill>
+                <a:latin typeface="Consolas"/>
+              </a:rPr>
+              <a:t>2cf24dba5fb0a30e26e83b2ac5b9e29e1b161e5c1fa7425e73043362938b9824</a:t>
+            </a:r>
+          </a:p>
+          <a:p>
+            <a:pPr algn="l">
+              <a:lnSpc>
+                <a:spcPct val="135000"/>
+              </a:lnSpc>
+            </a:pPr>
+            <a:r>
+              <a:rPr sz="1350" b="0">
+                <a:solidFill>
+                  <a:srgbClr val="EDE9F7"/>
+                </a:solidFill>
+                <a:latin typeface="Consolas"/>
+              </a:rPr>
+              <a:t/>
+            </a:r>
+          </a:p>
+          <a:p>
+            <a:pPr algn="l">
+              <a:lnSpc>
+                <a:spcPct val="135000"/>
+              </a:lnSpc>
+            </a:pPr>
+            <a:r>
+              <a:rPr sz="1350" b="0">
+                <a:solidFill>
+                  <a:srgbClr val="8B84AD"/>
+                </a:solidFill>
+                <a:latin typeface="Consolas"/>
+              </a:rPr>
+              <a:t># run it again, on a totally separate invocation —</a:t>
+            </a:r>
+          </a:p>
+          <a:p>
+            <a:pPr algn="l">
+              <a:lnSpc>
+                <a:spcPct val="135000"/>
+              </a:lnSpc>
+            </a:pPr>
+            <a:r>
+              <a:rPr sz="1350" b="1">
+                <a:solidFill>
+                  <a:srgbClr val="9C93C9"/>
+                </a:solidFill>
+                <a:latin typeface="Consolas"/>
+              </a:rPr>
+              <a:t>$ </a:t>
+            </a:r>
+            <a:r>
+              <a:rPr sz="1350" b="0">
+                <a:solidFill>
+                  <a:srgbClr val="EDE9F7"/>
+                </a:solidFill>
+                <a:latin typeface="Consolas"/>
+              </a:rPr>
+              <a:t>echo -n "hello" | shasum -a 256</a:t>
+            </a:r>
+          </a:p>
+          <a:p>
+            <a:pPr algn="l">
+              <a:lnSpc>
+                <a:spcPct val="135000"/>
+              </a:lnSpc>
+            </a:pPr>
+            <a:r>
+              <a:rPr sz="1350" b="0">
+                <a:solidFill>
+                  <a:srgbClr val="7FE0C4"/>
+                </a:solidFill>
+                <a:latin typeface="Consolas"/>
+              </a:rPr>
+              <a:t>2cf24dba5fb0a30e26e83b2ac5b9e29e1b161e5c1fa7425e73043362938b9824</a:t>
+            </a:r>
+          </a:p>
+          <a:p>
+            <a:pPr algn="l">
+              <a:lnSpc>
+                <a:spcPct val="135000"/>
+              </a:lnSpc>
+            </a:pPr>
+            <a:r>
+              <a:rPr sz="1350" b="0">
+                <a:solidFill>
+                  <a:srgbClr val="EDE9F7"/>
+                </a:solidFill>
+                <a:latin typeface="Consolas"/>
+              </a:rPr>
+              <a:t/>
+            </a:r>
+          </a:p>
+          <a:p>
+            <a:pPr algn="l">
+              <a:lnSpc>
+                <a:spcPct val="135000"/>
+              </a:lnSpc>
+            </a:pPr>
+            <a:r>
+              <a:rPr sz="1350" b="0">
+                <a:solidFill>
+                  <a:srgbClr val="8B84AD"/>
+                </a:solidFill>
+                <a:latin typeface="Consolas"/>
+              </a:rPr>
+              <a:t># identical, character for character. no randomness.</a:t>
+            </a:r>
+          </a:p>
+        </p:txBody>
+      </p:sp>
+      <p:sp>
+        <p:nvSpPr>
+          <p:cNvPr id="10" name="TextBox 9"/>
+          <p:cNvSpPr txBox="1"/>
+          <p:nvPr/>
+        </p:nvSpPr>
+        <p:spPr>
+          <a:xfrm>
+            <a:off x="822960" y="6446520"/>
+            <a:ext cx="10058400" cy="320040"/>
+          </a:xfrm>
+          <a:prstGeom prst="rect">
+            <a:avLst/>
+          </a:prstGeom>
+          <a:noFill/>
+        </p:spPr>
+        <p:txBody>
+          <a:bodyPr wrap="square" anchor="t" lIns="0" rIns="0" tIns="0" bIns="0">
+            <a:spAutoFit/>
+          </a:bodyPr>
+          <a:lstStyle/>
+          <a:p>
+            <a:pPr algn="l">
+              <a:lnSpc>
+                <a:spcPct val="115000"/>
+              </a:lnSpc>
+            </a:pPr>
+            <a:r>
+              <a:rPr sz="1050" b="0" i="0">
+                <a:solidFill>
+                  <a:srgbClr val="5C576E"/>
                 </a:solidFill>
                 <a:latin typeface="Calibri"/>
               </a:rPr>
-              <a:t>SHA-256 is designed to be fast — which means an attacker with a leaked hash database can try billions of guesses per second. Purpose-built password-hashing algorithms like bcrypt and Argon2 are deliberately slow, and add random “salt” per password, specifically to make brute-forcing impractical. Using the right hash function for the job is a real engineering judgment call — not a minor detail.</a:t>
-            </a:r>
-          </a:p>
-        </p:txBody>
-      </p:sp>
-      <p:sp>
-        <p:nvSpPr>
-          <p:cNvPr id="7" name="TextBox 6"/>
+              <a:t>Try it yourself: shasum -a 256 (macOS) or sha256sum (Linux) — already on your machine.</a:t>
+            </a:r>
+          </a:p>
+        </p:txBody>
+      </p:sp>
+      <p:sp>
+        <p:nvSpPr>
+          <p:cNvPr id="11" name="TextBox 10"/>
           <p:cNvSpPr txBox="1"/>
           <p:nvPr/>
         </p:nvSpPr>
@@ -4922,7 +4490,7 @@
                 </a:solidFill>
                 <a:latin typeface="Consolas"/>
               </a:rPr>
-              <a:t>11 / 15</a:t>
+              <a:t>11 / 18</a:t>
             </a:r>
           </a:p>
         </p:txBody>
@@ -5023,7 +4591,7 @@
                 </a:solidFill>
                 <a:latin typeface="Calibri"/>
               </a:rPr>
-              <a:t>REAL-LIFE ANALOGY</a:t>
+              <a:t>WORKED EXAMPLE — PART 2</a:t>
             </a:r>
           </a:p>
         </p:txBody>
@@ -5036,7 +4604,7 @@
         </p:nvSpPr>
         <p:spPr>
           <a:xfrm>
-            <a:off x="822960" y="1097280"/>
+            <a:off x="822960" y="1051560"/>
             <a:ext cx="10332720" cy="1005840"/>
           </a:xfrm>
           <a:prstGeom prst="rect">
@@ -5056,33 +4624,35 @@
               </a:lnSpc>
             </a:pPr>
             <a:r>
-              <a:rPr sz="3000" b="1" i="0">
+              <a:rPr sz="2700" b="1" i="0">
                 <a:solidFill>
                   <a:srgbClr val="1C1730"/>
                 </a:solidFill>
                 <a:latin typeface="Century Gothic"/>
               </a:rPr>
-              <a:t>A Tamper-Evident Wax Seal</a:t>
-            </a:r>
-          </a:p>
-        </p:txBody>
-      </p:sp>
-      <p:sp>
-        <p:nvSpPr>
-          <p:cNvPr id="5" name="Rectangle 4"/>
+              <a:t>The Avalanche Effect, Proven With A Real Transaction-Like String</a:t>
+            </a:r>
+          </a:p>
+        </p:txBody>
+      </p:sp>
+      <p:sp>
+        <p:nvSpPr>
+          <p:cNvPr id="5" name="Rounded Rectangle 4"/>
           <p:cNvSpPr/>
           <p:nvPr/>
         </p:nvSpPr>
         <p:spPr>
           <a:xfrm>
-            <a:off x="822960" y="2286000"/>
-            <a:ext cx="91440" cy="3657600"/>
-          </a:xfrm>
-          <a:prstGeom prst="rect">
-            <a:avLst/>
+            <a:off x="822960" y="1965960"/>
+            <a:ext cx="10515600" cy="3840480"/>
+          </a:xfrm>
+          <a:prstGeom prst="roundRect">
+            <a:avLst>
+              <a:gd name="adj" fmla="val 4500"/>
+            </a:avLst>
           </a:prstGeom>
           <a:solidFill>
-            <a:srgbClr val="C1432B"/>
+            <a:srgbClr val="141026"/>
           </a:solidFill>
           <a:ln>
             <a:noFill/>
@@ -5113,14 +4683,146 @@
       </p:sp>
       <p:sp>
         <p:nvSpPr>
-          <p:cNvPr id="6" name="TextBox 5"/>
-          <p:cNvSpPr txBox="1"/>
-          <p:nvPr/>
-        </p:nvSpPr>
-        <p:spPr>
-          <a:xfrm>
-            <a:off x="1280160" y="2377440"/>
-            <a:ext cx="9784080" cy="3566160"/>
+          <p:cNvPr id="6" name="Oval 5"/>
+          <p:cNvSpPr/>
+          <p:nvPr/>
+        </p:nvSpPr>
+        <p:spPr>
+          <a:xfrm>
+            <a:off x="1024128" y="2130552"/>
+            <a:ext cx="109728" cy="109728"/>
+          </a:xfrm>
+          <a:prstGeom prst="ellipse">
+            <a:avLst/>
+          </a:prstGeom>
+          <a:solidFill>
+            <a:srgbClr val="FF6459"/>
+          </a:solidFill>
+          <a:ln>
+            <a:noFill/>
+          </a:ln>
+          <a:effectLst/>
+        </p:spPr>
+        <p:style>
+          <a:lnRef idx="1">
+            <a:schemeClr val="accent1"/>
+          </a:lnRef>
+          <a:fillRef idx="3">
+            <a:schemeClr val="accent1"/>
+          </a:fillRef>
+          <a:effectRef idx="2">
+            <a:schemeClr val="accent1"/>
+          </a:effectRef>
+          <a:fontRef idx="minor">
+            <a:schemeClr val="lt1"/>
+          </a:fontRef>
+        </p:style>
+        <p:txBody>
+          <a:bodyPr rtlCol="0" anchor="ctr"/>
+          <a:lstStyle/>
+          <a:p>
+            <a:pPr algn="ctr"/>
+          </a:p>
+        </p:txBody>
+      </p:sp>
+      <p:sp>
+        <p:nvSpPr>
+          <p:cNvPr id="7" name="Oval 6"/>
+          <p:cNvSpPr/>
+          <p:nvPr/>
+        </p:nvSpPr>
+        <p:spPr>
+          <a:xfrm>
+            <a:off x="1225296" y="2130552"/>
+            <a:ext cx="109728" cy="109728"/>
+          </a:xfrm>
+          <a:prstGeom prst="ellipse">
+            <a:avLst/>
+          </a:prstGeom>
+          <a:solidFill>
+            <a:srgbClr val="FFC02E"/>
+          </a:solidFill>
+          <a:ln>
+            <a:noFill/>
+          </a:ln>
+          <a:effectLst/>
+        </p:spPr>
+        <p:style>
+          <a:lnRef idx="1">
+            <a:schemeClr val="accent1"/>
+          </a:lnRef>
+          <a:fillRef idx="3">
+            <a:schemeClr val="accent1"/>
+          </a:fillRef>
+          <a:effectRef idx="2">
+            <a:schemeClr val="accent1"/>
+          </a:effectRef>
+          <a:fontRef idx="minor">
+            <a:schemeClr val="lt1"/>
+          </a:fontRef>
+        </p:style>
+        <p:txBody>
+          <a:bodyPr rtlCol="0" anchor="ctr"/>
+          <a:lstStyle/>
+          <a:p>
+            <a:pPr algn="ctr"/>
+          </a:p>
+        </p:txBody>
+      </p:sp>
+      <p:sp>
+        <p:nvSpPr>
+          <p:cNvPr id="8" name="Oval 7"/>
+          <p:cNvSpPr/>
+          <p:nvPr/>
+        </p:nvSpPr>
+        <p:spPr>
+          <a:xfrm>
+            <a:off x="1426464" y="2130552"/>
+            <a:ext cx="109728" cy="109728"/>
+          </a:xfrm>
+          <a:prstGeom prst="ellipse">
+            <a:avLst/>
+          </a:prstGeom>
+          <a:solidFill>
+            <a:srgbClr val="28C93F"/>
+          </a:solidFill>
+          <a:ln>
+            <a:noFill/>
+          </a:ln>
+          <a:effectLst/>
+        </p:spPr>
+        <p:style>
+          <a:lnRef idx="1">
+            <a:schemeClr val="accent1"/>
+          </a:lnRef>
+          <a:fillRef idx="3">
+            <a:schemeClr val="accent1"/>
+          </a:fillRef>
+          <a:effectRef idx="2">
+            <a:schemeClr val="accent1"/>
+          </a:effectRef>
+          <a:fontRef idx="minor">
+            <a:schemeClr val="lt1"/>
+          </a:fontRef>
+        </p:style>
+        <p:txBody>
+          <a:bodyPr rtlCol="0" anchor="ctr"/>
+          <a:lstStyle/>
+          <a:p>
+            <a:pPr algn="ctr"/>
+          </a:p>
+        </p:txBody>
+      </p:sp>
+      <p:sp>
+        <p:nvSpPr>
+          <p:cNvPr id="9" name="TextBox 8"/>
+          <p:cNvSpPr txBox="1"/>
+          <p:nvPr/>
+        </p:nvSpPr>
+        <p:spPr>
+          <a:xfrm>
+            <a:off x="1078992" y="2350008"/>
+            <a:ext cx="10003536" cy="3273552"/>
           </a:xfrm>
           <a:prstGeom prst="rect">
             <a:avLst/>
@@ -5135,24 +4837,177 @@
           <a:p>
             <a:pPr algn="l">
               <a:lnSpc>
-                <a:spcPct val="160000"/>
-              </a:lnSpc>
-            </a:pPr>
-            <a:r>
-              <a:rPr sz="1800" b="0" i="0">
-                <a:solidFill>
-                  <a:srgbClr val="1C1730"/>
+                <a:spcPct val="135000"/>
+              </a:lnSpc>
+            </a:pPr>
+            <a:r>
+              <a:rPr sz="1350" b="1">
+                <a:solidFill>
+                  <a:srgbClr val="9C93C9"/>
+                </a:solidFill>
+                <a:latin typeface="Consolas"/>
+              </a:rPr>
+              <a:t>$ </a:t>
+            </a:r>
+            <a:r>
+              <a:rPr sz="1350" b="0">
+                <a:solidFill>
+                  <a:srgbClr val="EDE9F7"/>
+                </a:solidFill>
+                <a:latin typeface="Consolas"/>
+              </a:rPr>
+              <a:t>echo -n "Send 1 ETH to Alice" | shasum -a 256</a:t>
+            </a:r>
+          </a:p>
+          <a:p>
+            <a:pPr algn="l">
+              <a:lnSpc>
+                <a:spcPct val="135000"/>
+              </a:lnSpc>
+            </a:pPr>
+            <a:r>
+              <a:rPr sz="1350" b="0">
+                <a:solidFill>
+                  <a:srgbClr val="7FE0C4"/>
+                </a:solidFill>
+                <a:latin typeface="Consolas"/>
+              </a:rPr>
+              <a:t>9bed087e0a716e203d57c1ba36493085f7a87628da1cb1fe18bf5b4631bd7e45</a:t>
+            </a:r>
+          </a:p>
+          <a:p>
+            <a:pPr algn="l">
+              <a:lnSpc>
+                <a:spcPct val="135000"/>
+              </a:lnSpc>
+            </a:pPr>
+            <a:r>
+              <a:rPr sz="1350" b="0">
+                <a:solidFill>
+                  <a:srgbClr val="EDE9F7"/>
+                </a:solidFill>
+                <a:latin typeface="Consolas"/>
+              </a:rPr>
+              <a:t/>
+            </a:r>
+          </a:p>
+          <a:p>
+            <a:pPr algn="l">
+              <a:lnSpc>
+                <a:spcPct val="135000"/>
+              </a:lnSpc>
+            </a:pPr>
+            <a:r>
+              <a:rPr sz="1350" b="1">
+                <a:solidFill>
+                  <a:srgbClr val="9C93C9"/>
+                </a:solidFill>
+                <a:latin typeface="Consolas"/>
+              </a:rPr>
+              <a:t>$ </a:t>
+            </a:r>
+            <a:r>
+              <a:rPr sz="1350" b="0">
+                <a:solidFill>
+                  <a:srgbClr val="EDE9F7"/>
+                </a:solidFill>
+                <a:latin typeface="Consolas"/>
+              </a:rPr>
+              <a:t>echo -n "Send 1 ETH to Alicf" | shasum -a 256</a:t>
+            </a:r>
+          </a:p>
+          <a:p>
+            <a:pPr algn="l">
+              <a:lnSpc>
+                <a:spcPct val="135000"/>
+              </a:lnSpc>
+            </a:pPr>
+            <a:r>
+              <a:rPr sz="1350" b="0">
+                <a:solidFill>
+                  <a:srgbClr val="FF8E7D"/>
+                </a:solidFill>
+                <a:latin typeface="Consolas"/>
+              </a:rPr>
+              <a:t>94f17d20a09db58f6a7fe2cf97f00b2ae2dc1a67802b6e74776b0b6785e4b1eb</a:t>
+            </a:r>
+          </a:p>
+          <a:p>
+            <a:pPr algn="l">
+              <a:lnSpc>
+                <a:spcPct val="135000"/>
+              </a:lnSpc>
+            </a:pPr>
+            <a:r>
+              <a:rPr sz="1350" b="0">
+                <a:solidFill>
+                  <a:srgbClr val="EDE9F7"/>
+                </a:solidFill>
+                <a:latin typeface="Consolas"/>
+              </a:rPr>
+              <a:t/>
+            </a:r>
+          </a:p>
+          <a:p>
+            <a:pPr algn="l">
+              <a:lnSpc>
+                <a:spcPct val="135000"/>
+              </a:lnSpc>
+            </a:pPr>
+            <a:r>
+              <a:rPr sz="1350" b="0">
+                <a:solidFill>
+                  <a:srgbClr val="8B84AD"/>
+                </a:solidFill>
+                <a:latin typeface="Consolas"/>
+              </a:rPr>
+              <a:t># one letter changed: e → f. total, unrelated mismatch.</a:t>
+            </a:r>
+          </a:p>
+        </p:txBody>
+      </p:sp>
+      <p:sp>
+        <p:nvSpPr>
+          <p:cNvPr id="10" name="TextBox 9"/>
+          <p:cNvSpPr txBox="1"/>
+          <p:nvPr/>
+        </p:nvSpPr>
+        <p:spPr>
+          <a:xfrm>
+            <a:off x="822960" y="6446520"/>
+            <a:ext cx="10058400" cy="320040"/>
+          </a:xfrm>
+          <a:prstGeom prst="rect">
+            <a:avLst/>
+          </a:prstGeom>
+          <a:noFill/>
+        </p:spPr>
+        <p:txBody>
+          <a:bodyPr wrap="square" anchor="t" lIns="0" rIns="0" tIns="0" bIns="0">
+            <a:spAutoFit/>
+          </a:bodyPr>
+          <a:lstStyle/>
+          <a:p>
+            <a:pPr algn="l">
+              <a:lnSpc>
+                <a:spcPct val="115000"/>
+              </a:lnSpc>
+            </a:pPr>
+            <a:r>
+              <a:rPr sz="1050" b="0" i="0">
+                <a:solidFill>
+                  <a:srgbClr val="5C576E"/>
                 </a:solidFill>
                 <a:latin typeface="Calibri"/>
               </a:rPr>
-              <a:t>Think of a hash like a wax seal on an old letter. The seal doesn't tell you what's written inside — you can't reverse it back into words (one-way). But if someone opens the letter, changes one word, and reseals it, the new seal looks completely different (avalanche effect). Anyone who remembers the original seal can instantly tell it was tampered with — without reading a single word.</a:t>
-            </a:r>
-          </a:p>
-        </p:txBody>
-      </p:sp>
-      <p:sp>
-        <p:nvSpPr>
-          <p:cNvPr id="7" name="TextBox 6"/>
+              <a:t>This is exactly why altering one digit of a real transaction is instantly detectable.</a:t>
+            </a:r>
+          </a:p>
+        </p:txBody>
+      </p:sp>
+      <p:sp>
+        <p:nvSpPr>
+          <p:cNvPr id="11" name="TextBox 10"/>
           <p:cNvSpPr txBox="1"/>
           <p:nvPr/>
         </p:nvSpPr>
@@ -5184,7 +5039,7 @@
                 </a:solidFill>
                 <a:latin typeface="Consolas"/>
               </a:rPr>
-              <a:t>12 / 15</a:t>
+              <a:t>12 / 18</a:t>
             </a:r>
           </a:p>
         </p:txBody>
@@ -5285,7 +5140,7 @@
                 </a:solidFill>
                 <a:latin typeface="Calibri"/>
               </a:rPr>
-              <a:t>COMMON MISCONCEPTIONS</a:t>
+              <a:t>REAL-WORLD USES</a:t>
             </a:r>
           </a:p>
         </p:txBody>
@@ -5318,13 +5173,13 @@
               </a:lnSpc>
             </a:pPr>
             <a:r>
-              <a:rPr sz="3000" b="1" i="0">
+              <a:rPr sz="3200" b="1" i="0">
                 <a:solidFill>
                   <a:srgbClr val="1C1730"/>
                 </a:solidFill>
                 <a:latin typeface="Century Gothic"/>
               </a:rPr>
-              <a:t>Where People Get Tripped Up</a:t>
+              <a:t>Not Just Blockchain</a:t>
             </a:r>
           </a:p>
         </p:txBody>
@@ -5337,19 +5192,21 @@
         </p:nvSpPr>
         <p:spPr>
           <a:xfrm>
-            <a:off x="822960" y="2057400"/>
-            <a:ext cx="10515600" cy="1874519"/>
+            <a:off x="822960" y="2011680"/>
+            <a:ext cx="3322320" cy="1508760"/>
           </a:xfrm>
           <a:prstGeom prst="roundRect">
             <a:avLst>
-              <a:gd name="adj" fmla="val 5000"/>
+              <a:gd name="adj" fmla="val 9000"/>
             </a:avLst>
           </a:prstGeom>
           <a:solidFill>
             <a:srgbClr val="FFFFFF"/>
           </a:solidFill>
-          <a:ln>
-            <a:noFill/>
+          <a:ln w="12700">
+            <a:solidFill>
+              <a:srgbClr val="DED9EA"/>
+            </a:solidFill>
           </a:ln>
           <a:effectLst/>
         </p:spPr>
@@ -5377,23 +5234,105 @@
       </p:sp>
       <p:sp>
         <p:nvSpPr>
-          <p:cNvPr id="6" name="Rectangle 5"/>
+          <p:cNvPr id="6" name="TextBox 5"/>
+          <p:cNvSpPr txBox="1"/>
+          <p:nvPr/>
+        </p:nvSpPr>
+        <p:spPr>
+          <a:xfrm>
+            <a:off x="1078992" y="2267712"/>
+            <a:ext cx="2810256" cy="457200"/>
+          </a:xfrm>
+          <a:prstGeom prst="rect">
+            <a:avLst/>
+          </a:prstGeom>
+          <a:noFill/>
+        </p:spPr>
+        <p:txBody>
+          <a:bodyPr wrap="square" anchor="t" lIns="0" rIns="0" tIns="0" bIns="0">
+            <a:spAutoFit/>
+          </a:bodyPr>
+          <a:lstStyle/>
+          <a:p>
+            <a:pPr algn="l">
+              <a:lnSpc>
+                <a:spcPct val="115000"/>
+              </a:lnSpc>
+            </a:pPr>
+            <a:r>
+              <a:rPr sz="1450" b="1" i="0">
+                <a:solidFill>
+                  <a:srgbClr val="C1432B"/>
+                </a:solidFill>
+                <a:latin typeface="Century Gothic"/>
+              </a:rPr>
+              <a:t>Software Checksums</a:t>
+            </a:r>
+          </a:p>
+        </p:txBody>
+      </p:sp>
+      <p:sp>
+        <p:nvSpPr>
+          <p:cNvPr id="7" name="TextBox 6"/>
+          <p:cNvSpPr txBox="1"/>
+          <p:nvPr/>
+        </p:nvSpPr>
+        <p:spPr>
+          <a:xfrm>
+            <a:off x="1078992" y="2724912"/>
+            <a:ext cx="2810256" cy="658368"/>
+          </a:xfrm>
+          <a:prstGeom prst="rect">
+            <a:avLst/>
+          </a:prstGeom>
+          <a:noFill/>
+        </p:spPr>
+        <p:txBody>
+          <a:bodyPr wrap="square" anchor="t" lIns="0" rIns="0" tIns="0" bIns="0">
+            <a:spAutoFit/>
+          </a:bodyPr>
+          <a:lstStyle/>
+          <a:p>
+            <a:pPr algn="l">
+              <a:lnSpc>
+                <a:spcPct val="128000"/>
+              </a:lnSpc>
+            </a:pPr>
+            <a:r>
+              <a:rPr sz="1150" b="0" i="0">
+                <a:solidFill>
+                  <a:srgbClr val="1C1730"/>
+                </a:solidFill>
+                <a:latin typeface="Calibri"/>
+              </a:rPr>
+              <a:t>Verify a download wasn't corrupted or tampered with in transit.</a:t>
+            </a:r>
+          </a:p>
+        </p:txBody>
+      </p:sp>
+      <p:sp>
+        <p:nvSpPr>
+          <p:cNvPr id="8" name="Rounded Rectangle 7"/>
           <p:cNvSpPr/>
           <p:nvPr/>
         </p:nvSpPr>
         <p:spPr>
           <a:xfrm>
-            <a:off x="822960" y="2057400"/>
-            <a:ext cx="82296" cy="1874519"/>
-          </a:xfrm>
-          <a:prstGeom prst="rect">
-            <a:avLst/>
+            <a:off x="4419600" y="2011680"/>
+            <a:ext cx="3322320" cy="1508760"/>
+          </a:xfrm>
+          <a:prstGeom prst="roundRect">
+            <a:avLst>
+              <a:gd name="adj" fmla="val 9000"/>
+            </a:avLst>
           </a:prstGeom>
           <a:solidFill>
-            <a:srgbClr val="C1432B"/>
+            <a:srgbClr val="FFFFFF"/>
           </a:solidFill>
-          <a:ln>
-            <a:noFill/>
+          <a:ln w="12700">
+            <a:solidFill>
+              <a:srgbClr val="DED9EA"/>
+            </a:solidFill>
           </a:ln>
           <a:effectLst/>
         </p:spPr>
@@ -5421,14 +5360,14 @@
       </p:sp>
       <p:sp>
         <p:nvSpPr>
-          <p:cNvPr id="7" name="TextBox 6"/>
-          <p:cNvSpPr txBox="1"/>
-          <p:nvPr/>
-        </p:nvSpPr>
-        <p:spPr>
-          <a:xfrm>
-            <a:off x="1188720" y="2258568"/>
-            <a:ext cx="9784080" cy="457200"/>
+          <p:cNvPr id="9" name="TextBox 8"/>
+          <p:cNvSpPr txBox="1"/>
+          <p:nvPr/>
+        </p:nvSpPr>
+        <p:spPr>
+          <a:xfrm>
+            <a:off x="4675632" y="2267712"/>
+            <a:ext cx="2810256" cy="457200"/>
           </a:xfrm>
           <a:prstGeom prst="rect">
             <a:avLst/>
@@ -5447,27 +5386,27 @@
               </a:lnSpc>
             </a:pPr>
             <a:r>
-              <a:rPr sz="1700" b="1" i="0">
+              <a:rPr sz="1450" b="1" i="0">
                 <a:solidFill>
                   <a:srgbClr val="C1432B"/>
                 </a:solidFill>
                 <a:latin typeface="Century Gothic"/>
               </a:rPr>
-              <a:t>“Hashing is a form of encryption.”</a:t>
-            </a:r>
-          </a:p>
-        </p:txBody>
-      </p:sp>
-      <p:sp>
-        <p:nvSpPr>
-          <p:cNvPr id="8" name="TextBox 7"/>
-          <p:cNvSpPr txBox="1"/>
-          <p:nvPr/>
-        </p:nvSpPr>
-        <p:spPr>
-          <a:xfrm>
-            <a:off x="1188720" y="2743200"/>
-            <a:ext cx="9784080" cy="1097280"/>
+              <a:t>Git Version Control</a:t>
+            </a:r>
+          </a:p>
+        </p:txBody>
+      </p:sp>
+      <p:sp>
+        <p:nvSpPr>
+          <p:cNvPr id="10" name="TextBox 9"/>
+          <p:cNvSpPr txBox="1"/>
+          <p:nvPr/>
+        </p:nvSpPr>
+        <p:spPr>
+          <a:xfrm>
+            <a:off x="4675632" y="2724912"/>
+            <a:ext cx="2810256" cy="658368"/>
           </a:xfrm>
           <a:prstGeom prst="rect">
             <a:avLst/>
@@ -5482,42 +5421,44 @@
           <a:p>
             <a:pPr algn="l">
               <a:lnSpc>
-                <a:spcPct val="135000"/>
-              </a:lnSpc>
-            </a:pPr>
-            <a:r>
-              <a:rPr sz="1300" b="0" i="0">
-                <a:solidFill>
-                  <a:srgbClr val="5C576E"/>
+                <a:spcPct val="128000"/>
+              </a:lnSpc>
+            </a:pPr>
+            <a:r>
+              <a:rPr sz="1150" b="0" i="0">
+                <a:solidFill>
+                  <a:srgbClr val="1C1730"/>
                 </a:solidFill>
                 <a:latin typeface="Calibri"/>
               </a:rPr>
-              <a:t>It isn't. Encryption is reversible on purpose — the right key decrypts it back. Hashing is deliberately one-way: there is no key that turns a hash back into its original input. “Decrypting a hash” is a contradiction in terms.</a:t>
-            </a:r>
-          </a:p>
-        </p:txBody>
-      </p:sp>
-      <p:sp>
-        <p:nvSpPr>
-          <p:cNvPr id="9" name="Rounded Rectangle 8"/>
+              <a:t>Every commit and file is identified by a hash — full deep-dive in Topic 03.</a:t>
+            </a:r>
+          </a:p>
+        </p:txBody>
+      </p:sp>
+      <p:sp>
+        <p:nvSpPr>
+          <p:cNvPr id="11" name="Rounded Rectangle 10"/>
           <p:cNvSpPr/>
           <p:nvPr/>
         </p:nvSpPr>
         <p:spPr>
           <a:xfrm>
-            <a:off x="822960" y="4160520"/>
-            <a:ext cx="10515600" cy="1874519"/>
+            <a:off x="8016240" y="2011680"/>
+            <a:ext cx="3322320" cy="1508760"/>
           </a:xfrm>
           <a:prstGeom prst="roundRect">
             <a:avLst>
-              <a:gd name="adj" fmla="val 5000"/>
+              <a:gd name="adj" fmla="val 9000"/>
             </a:avLst>
           </a:prstGeom>
           <a:solidFill>
             <a:srgbClr val="FFFFFF"/>
           </a:solidFill>
-          <a:ln>
-            <a:noFill/>
+          <a:ln w="12700">
+            <a:solidFill>
+              <a:srgbClr val="DED9EA"/>
+            </a:solidFill>
           </a:ln>
           <a:effectLst/>
         </p:spPr>
@@ -5545,23 +5486,105 @@
       </p:sp>
       <p:sp>
         <p:nvSpPr>
-          <p:cNvPr id="10" name="Rectangle 9"/>
+          <p:cNvPr id="12" name="TextBox 11"/>
+          <p:cNvSpPr txBox="1"/>
+          <p:nvPr/>
+        </p:nvSpPr>
+        <p:spPr>
+          <a:xfrm>
+            <a:off x="8272272" y="2267712"/>
+            <a:ext cx="2810256" cy="457200"/>
+          </a:xfrm>
+          <a:prstGeom prst="rect">
+            <a:avLst/>
+          </a:prstGeom>
+          <a:noFill/>
+        </p:spPr>
+        <p:txBody>
+          <a:bodyPr wrap="square" anchor="t" lIns="0" rIns="0" tIns="0" bIns="0">
+            <a:spAutoFit/>
+          </a:bodyPr>
+          <a:lstStyle/>
+          <a:p>
+            <a:pPr algn="l">
+              <a:lnSpc>
+                <a:spcPct val="115000"/>
+              </a:lnSpc>
+            </a:pPr>
+            <a:r>
+              <a:rPr sz="1450" b="1" i="0">
+                <a:solidFill>
+                  <a:srgbClr val="C1432B"/>
+                </a:solidFill>
+                <a:latin typeface="Century Gothic"/>
+              </a:rPr>
+              <a:t>Password Storage</a:t>
+            </a:r>
+          </a:p>
+        </p:txBody>
+      </p:sp>
+      <p:sp>
+        <p:nvSpPr>
+          <p:cNvPr id="13" name="TextBox 12"/>
+          <p:cNvSpPr txBox="1"/>
+          <p:nvPr/>
+        </p:nvSpPr>
+        <p:spPr>
+          <a:xfrm>
+            <a:off x="8272272" y="2724912"/>
+            <a:ext cx="2810256" cy="658368"/>
+          </a:xfrm>
+          <a:prstGeom prst="rect">
+            <a:avLst/>
+          </a:prstGeom>
+          <a:noFill/>
+        </p:spPr>
+        <p:txBody>
+          <a:bodyPr wrap="square" anchor="t" lIns="0" rIns="0" tIns="0" bIns="0">
+            <a:spAutoFit/>
+          </a:bodyPr>
+          <a:lstStyle/>
+          <a:p>
+            <a:pPr algn="l">
+              <a:lnSpc>
+                <a:spcPct val="128000"/>
+              </a:lnSpc>
+            </a:pPr>
+            <a:r>
+              <a:rPr sz="1150" b="0" i="0">
+                <a:solidFill>
+                  <a:srgbClr val="1C1730"/>
+                </a:solidFill>
+                <a:latin typeface="Calibri"/>
+              </a:rPr>
+              <a:t>Systems store a hash of your password, never the password itself.</a:t>
+            </a:r>
+          </a:p>
+        </p:txBody>
+      </p:sp>
+      <p:sp>
+        <p:nvSpPr>
+          <p:cNvPr id="14" name="Rounded Rectangle 13"/>
           <p:cNvSpPr/>
           <p:nvPr/>
         </p:nvSpPr>
         <p:spPr>
           <a:xfrm>
-            <a:off x="822960" y="4160520"/>
-            <a:ext cx="82296" cy="1874519"/>
-          </a:xfrm>
-          <a:prstGeom prst="rect">
-            <a:avLst/>
+            <a:off x="822960" y="3749040"/>
+            <a:ext cx="3322320" cy="1508760"/>
+          </a:xfrm>
+          <a:prstGeom prst="roundRect">
+            <a:avLst>
+              <a:gd name="adj" fmla="val 9000"/>
+            </a:avLst>
           </a:prstGeom>
           <a:solidFill>
-            <a:srgbClr val="C1432B"/>
+            <a:srgbClr val="FFFFFF"/>
           </a:solidFill>
-          <a:ln>
-            <a:noFill/>
+          <a:ln w="12700">
+            <a:solidFill>
+              <a:srgbClr val="DED9EA"/>
+            </a:solidFill>
           </a:ln>
           <a:effectLst/>
         </p:spPr>
@@ -5589,14 +5612,14 @@
       </p:sp>
       <p:sp>
         <p:nvSpPr>
-          <p:cNvPr id="11" name="TextBox 10"/>
-          <p:cNvSpPr txBox="1"/>
-          <p:nvPr/>
-        </p:nvSpPr>
-        <p:spPr>
-          <a:xfrm>
-            <a:off x="1188720" y="4361688"/>
-            <a:ext cx="9784080" cy="457200"/>
+          <p:cNvPr id="15" name="TextBox 14"/>
+          <p:cNvSpPr txBox="1"/>
+          <p:nvPr/>
+        </p:nvSpPr>
+        <p:spPr>
+          <a:xfrm>
+            <a:off x="1078992" y="4005072"/>
+            <a:ext cx="2810256" cy="457200"/>
           </a:xfrm>
           <a:prstGeom prst="rect">
             <a:avLst/>
@@ -5615,27 +5638,27 @@
               </a:lnSpc>
             </a:pPr>
             <a:r>
-              <a:rPr sz="1700" b="1" i="0">
+              <a:rPr sz="1450" b="1" i="0">
                 <a:solidFill>
                   <a:srgbClr val="C1432B"/>
                 </a:solidFill>
                 <a:latin typeface="Century Gothic"/>
               </a:rPr>
-              <a:t>“If a hash is public, that's always safe.”</a:t>
-            </a:r>
-          </a:p>
-        </p:txBody>
-      </p:sp>
-      <p:sp>
-        <p:nvSpPr>
-          <p:cNvPr id="12" name="TextBox 11"/>
-          <p:cNvSpPr txBox="1"/>
-          <p:nvPr/>
-        </p:nvSpPr>
-        <p:spPr>
-          <a:xfrm>
-            <a:off x="1188720" y="4846320"/>
-            <a:ext cx="9784080" cy="1097280"/>
+              <a:t>Cloud Deduplication</a:t>
+            </a:r>
+          </a:p>
+        </p:txBody>
+      </p:sp>
+      <p:sp>
+        <p:nvSpPr>
+          <p:cNvPr id="16" name="TextBox 15"/>
+          <p:cNvSpPr txBox="1"/>
+          <p:nvPr/>
+        </p:nvSpPr>
+        <p:spPr>
+          <a:xfrm>
+            <a:off x="1078992" y="4462272"/>
+            <a:ext cx="2810256" cy="658368"/>
           </a:xfrm>
           <a:prstGeom prst="rect">
             <a:avLst/>
@@ -5650,24 +5673,276 @@
           <a:p>
             <a:pPr algn="l">
               <a:lnSpc>
-                <a:spcPct val="135000"/>
-              </a:lnSpc>
-            </a:pPr>
-            <a:r>
-              <a:rPr sz="1300" b="0" i="0">
-                <a:solidFill>
-                  <a:srgbClr val="5C576E"/>
+                <a:spcPct val="128000"/>
+              </a:lnSpc>
+            </a:pPr>
+            <a:r>
+              <a:rPr sz="1150" b="0" i="0">
+                <a:solidFill>
+                  <a:srgbClr val="1C1730"/>
                 </a:solidFill>
                 <a:latin typeface="Calibri"/>
               </a:rPr>
-              <a:t>Only for high-entropy inputs. A 4-digit PIN's hash can be cracked instantly by hashing all 10,000 possibilities — exactly why passwords need random salt added before hashing.</a:t>
-            </a:r>
-          </a:p>
-        </p:txBody>
-      </p:sp>
-      <p:sp>
-        <p:nvSpPr>
-          <p:cNvPr id="13" name="TextBox 12"/>
+              <a:t>Identical files across users are recognized by matching hashes.</a:t>
+            </a:r>
+          </a:p>
+        </p:txBody>
+      </p:sp>
+      <p:sp>
+        <p:nvSpPr>
+          <p:cNvPr id="17" name="Rounded Rectangle 16"/>
+          <p:cNvSpPr/>
+          <p:nvPr/>
+        </p:nvSpPr>
+        <p:spPr>
+          <a:xfrm>
+            <a:off x="4419600" y="3749040"/>
+            <a:ext cx="3322320" cy="1508760"/>
+          </a:xfrm>
+          <a:prstGeom prst="roundRect">
+            <a:avLst>
+              <a:gd name="adj" fmla="val 9000"/>
+            </a:avLst>
+          </a:prstGeom>
+          <a:solidFill>
+            <a:srgbClr val="FFFFFF"/>
+          </a:solidFill>
+          <a:ln w="12700">
+            <a:solidFill>
+              <a:srgbClr val="DED9EA"/>
+            </a:solidFill>
+          </a:ln>
+          <a:effectLst/>
+        </p:spPr>
+        <p:style>
+          <a:lnRef idx="1">
+            <a:schemeClr val="accent1"/>
+          </a:lnRef>
+          <a:fillRef idx="3">
+            <a:schemeClr val="accent1"/>
+          </a:fillRef>
+          <a:effectRef idx="2">
+            <a:schemeClr val="accent1"/>
+          </a:effectRef>
+          <a:fontRef idx="minor">
+            <a:schemeClr val="lt1"/>
+          </a:fontRef>
+        </p:style>
+        <p:txBody>
+          <a:bodyPr rtlCol="0" anchor="ctr"/>
+          <a:lstStyle/>
+          <a:p>
+            <a:pPr algn="ctr"/>
+          </a:p>
+        </p:txBody>
+      </p:sp>
+      <p:sp>
+        <p:nvSpPr>
+          <p:cNvPr id="18" name="TextBox 17"/>
+          <p:cNvSpPr txBox="1"/>
+          <p:nvPr/>
+        </p:nvSpPr>
+        <p:spPr>
+          <a:xfrm>
+            <a:off x="4675632" y="4005072"/>
+            <a:ext cx="2810256" cy="457200"/>
+          </a:xfrm>
+          <a:prstGeom prst="rect">
+            <a:avLst/>
+          </a:prstGeom>
+          <a:noFill/>
+        </p:spPr>
+        <p:txBody>
+          <a:bodyPr wrap="square" anchor="t" lIns="0" rIns="0" tIns="0" bIns="0">
+            <a:spAutoFit/>
+          </a:bodyPr>
+          <a:lstStyle/>
+          <a:p>
+            <a:pPr algn="l">
+              <a:lnSpc>
+                <a:spcPct val="115000"/>
+              </a:lnSpc>
+            </a:pPr>
+            <a:r>
+              <a:rPr sz="1450" b="1" i="0">
+                <a:solidFill>
+                  <a:srgbClr val="C1432B"/>
+                </a:solidFill>
+                <a:latin typeface="Century Gothic"/>
+              </a:rPr>
+              <a:t>Digital Forensics</a:t>
+            </a:r>
+          </a:p>
+        </p:txBody>
+      </p:sp>
+      <p:sp>
+        <p:nvSpPr>
+          <p:cNvPr id="19" name="TextBox 18"/>
+          <p:cNvSpPr txBox="1"/>
+          <p:nvPr/>
+        </p:nvSpPr>
+        <p:spPr>
+          <a:xfrm>
+            <a:off x="4675632" y="4462272"/>
+            <a:ext cx="2810256" cy="658368"/>
+          </a:xfrm>
+          <a:prstGeom prst="rect">
+            <a:avLst/>
+          </a:prstGeom>
+          <a:noFill/>
+        </p:spPr>
+        <p:txBody>
+          <a:bodyPr wrap="square" anchor="t" lIns="0" rIns="0" tIns="0" bIns="0">
+            <a:spAutoFit/>
+          </a:bodyPr>
+          <a:lstStyle/>
+          <a:p>
+            <a:pPr algn="l">
+              <a:lnSpc>
+                <a:spcPct val="128000"/>
+              </a:lnSpc>
+            </a:pPr>
+            <a:r>
+              <a:rPr sz="1150" b="0" i="0">
+                <a:solidFill>
+                  <a:srgbClr val="1C1730"/>
+                </a:solidFill>
+                <a:latin typeface="Calibri"/>
+              </a:rPr>
+              <a:t>Investigators hash evidence to prove it wasn't altered after collection.</a:t>
+            </a:r>
+          </a:p>
+        </p:txBody>
+      </p:sp>
+      <p:sp>
+        <p:nvSpPr>
+          <p:cNvPr id="20" name="Rounded Rectangle 19"/>
+          <p:cNvSpPr/>
+          <p:nvPr/>
+        </p:nvSpPr>
+        <p:spPr>
+          <a:xfrm>
+            <a:off x="8016240" y="3749040"/>
+            <a:ext cx="3322320" cy="1508760"/>
+          </a:xfrm>
+          <a:prstGeom prst="roundRect">
+            <a:avLst>
+              <a:gd name="adj" fmla="val 9000"/>
+            </a:avLst>
+          </a:prstGeom>
+          <a:solidFill>
+            <a:srgbClr val="FFFFFF"/>
+          </a:solidFill>
+          <a:ln w="12700">
+            <a:solidFill>
+              <a:srgbClr val="DED9EA"/>
+            </a:solidFill>
+          </a:ln>
+          <a:effectLst/>
+        </p:spPr>
+        <p:style>
+          <a:lnRef idx="1">
+            <a:schemeClr val="accent1"/>
+          </a:lnRef>
+          <a:fillRef idx="3">
+            <a:schemeClr val="accent1"/>
+          </a:fillRef>
+          <a:effectRef idx="2">
+            <a:schemeClr val="accent1"/>
+          </a:effectRef>
+          <a:fontRef idx="minor">
+            <a:schemeClr val="lt1"/>
+          </a:fontRef>
+        </p:style>
+        <p:txBody>
+          <a:bodyPr rtlCol="0" anchor="ctr"/>
+          <a:lstStyle/>
+          <a:p>
+            <a:pPr algn="ctr"/>
+          </a:p>
+        </p:txBody>
+      </p:sp>
+      <p:sp>
+        <p:nvSpPr>
+          <p:cNvPr id="21" name="TextBox 20"/>
+          <p:cNvSpPr txBox="1"/>
+          <p:nvPr/>
+        </p:nvSpPr>
+        <p:spPr>
+          <a:xfrm>
+            <a:off x="8272272" y="4005072"/>
+            <a:ext cx="2810256" cy="457200"/>
+          </a:xfrm>
+          <a:prstGeom prst="rect">
+            <a:avLst/>
+          </a:prstGeom>
+          <a:noFill/>
+        </p:spPr>
+        <p:txBody>
+          <a:bodyPr wrap="square" anchor="t" lIns="0" rIns="0" tIns="0" bIns="0">
+            <a:spAutoFit/>
+          </a:bodyPr>
+          <a:lstStyle/>
+          <a:p>
+            <a:pPr algn="l">
+              <a:lnSpc>
+                <a:spcPct val="115000"/>
+              </a:lnSpc>
+            </a:pPr>
+            <a:r>
+              <a:rPr sz="1450" b="1" i="0">
+                <a:solidFill>
+                  <a:srgbClr val="C1432B"/>
+                </a:solidFill>
+                <a:latin typeface="Century Gothic"/>
+              </a:rPr>
+              <a:t>Certificate Transparency</a:t>
+            </a:r>
+          </a:p>
+        </p:txBody>
+      </p:sp>
+      <p:sp>
+        <p:nvSpPr>
+          <p:cNvPr id="22" name="TextBox 21"/>
+          <p:cNvSpPr txBox="1"/>
+          <p:nvPr/>
+        </p:nvSpPr>
+        <p:spPr>
+          <a:xfrm>
+            <a:off x="8272272" y="4462272"/>
+            <a:ext cx="2810256" cy="658368"/>
+          </a:xfrm>
+          <a:prstGeom prst="rect">
+            <a:avLst/>
+          </a:prstGeom>
+          <a:noFill/>
+        </p:spPr>
+        <p:txBody>
+          <a:bodyPr wrap="square" anchor="t" lIns="0" rIns="0" tIns="0" bIns="0">
+            <a:spAutoFit/>
+          </a:bodyPr>
+          <a:lstStyle/>
+          <a:p>
+            <a:pPr algn="l">
+              <a:lnSpc>
+                <a:spcPct val="128000"/>
+              </a:lnSpc>
+            </a:pPr>
+            <a:r>
+              <a:rPr sz="1150" b="0" i="0">
+                <a:solidFill>
+                  <a:srgbClr val="1C1730"/>
+                </a:solidFill>
+                <a:latin typeface="Calibri"/>
+              </a:rPr>
+              <a:t>Every SSL certificate is logged into a public, tamper-evident hash-chained record.</a:t>
+            </a:r>
+          </a:p>
+        </p:txBody>
+      </p:sp>
+      <p:sp>
+        <p:nvSpPr>
+          <p:cNvPr id="23" name="TextBox 22"/>
           <p:cNvSpPr txBox="1"/>
           <p:nvPr/>
         </p:nvSpPr>
@@ -5699,7 +5974,7 @@
                 </a:solidFill>
                 <a:latin typeface="Consolas"/>
               </a:rPr>
-              <a:t>13 / 15</a:t>
+              <a:t>13 / 18</a:t>
             </a:r>
           </a:p>
         </p:txBody>
@@ -5800,7 +6075,7 @@
                 </a:solidFill>
                 <a:latin typeface="Calibri"/>
               </a:rPr>
-              <a:t>HANDS-ON PRACTICE</a:t>
+              <a:t>FLAGSHIP CASE STUDY</a:t>
             </a:r>
           </a:p>
         </p:txBody>
@@ -5813,8 +6088,8 @@
         </p:nvSpPr>
         <p:spPr>
           <a:xfrm>
-            <a:off x="822960" y="1051560"/>
-            <a:ext cx="9601200" cy="1005840"/>
+            <a:off x="822960" y="1097280"/>
+            <a:ext cx="10332720" cy="1005840"/>
           </a:xfrm>
           <a:prstGeom prst="rect">
             <a:avLst/>
@@ -5833,30 +6108,32 @@
               </a:lnSpc>
             </a:pPr>
             <a:r>
-              <a:rPr sz="3200" b="1" i="0">
+              <a:rPr sz="3000" b="1" i="0">
                 <a:solidFill>
                   <a:srgbClr val="1C1730"/>
                 </a:solidFill>
                 <a:latin typeface="Century Gothic"/>
               </a:rPr>
-              <a:t>Do This Now</a:t>
-            </a:r>
-          </a:p>
-        </p:txBody>
-      </p:sp>
-      <p:sp>
-        <p:nvSpPr>
-          <p:cNvPr id="5" name="Oval 4"/>
+              <a:t>Why Plain SHA-256 Is Wrong For Passwords</a:t>
+            </a:r>
+          </a:p>
+        </p:txBody>
+      </p:sp>
+      <p:sp>
+        <p:nvSpPr>
+          <p:cNvPr id="5" name="Rounded Rectangle 4"/>
           <p:cNvSpPr/>
           <p:nvPr/>
         </p:nvSpPr>
         <p:spPr>
           <a:xfrm>
-            <a:off x="822960" y="2148840"/>
-            <a:ext cx="502920" cy="502920"/>
-          </a:xfrm>
-          <a:prstGeom prst="ellipse">
-            <a:avLst/>
+            <a:off x="822960" y="2423160"/>
+            <a:ext cx="10515600" cy="3749039"/>
+          </a:xfrm>
+          <a:prstGeom prst="roundRect">
+            <a:avLst>
+              <a:gd name="adj" fmla="val 4000"/>
+            </a:avLst>
           </a:prstGeom>
           <a:solidFill>
             <a:srgbClr val="C1432B"/>
@@ -5881,340 +6158,55 @@
           </a:fontRef>
         </p:style>
         <p:txBody>
-          <a:bodyPr rtlCol="0" anchor="ctr" wrap="none"/>
+          <a:bodyPr rtlCol="0" anchor="ctr"/>
           <a:lstStyle/>
           <a:p>
             <a:pPr algn="ctr"/>
-            <a:r>
-              <a:rPr sz="1500" b="1">
+          </a:p>
+        </p:txBody>
+      </p:sp>
+      <p:sp>
+        <p:nvSpPr>
+          <p:cNvPr id="6" name="TextBox 5"/>
+          <p:cNvSpPr txBox="1"/>
+          <p:nvPr/>
+        </p:nvSpPr>
+        <p:spPr>
+          <a:xfrm>
+            <a:off x="1280160" y="2743200"/>
+            <a:ext cx="9601200" cy="3200400"/>
+          </a:xfrm>
+          <a:prstGeom prst="rect">
+            <a:avLst/>
+          </a:prstGeom>
+          <a:noFill/>
+        </p:spPr>
+        <p:txBody>
+          <a:bodyPr wrap="square" anchor="t" lIns="0" rIns="0" tIns="0" bIns="0">
+            <a:spAutoFit/>
+          </a:bodyPr>
+          <a:lstStyle/>
+          <a:p>
+            <a:pPr algn="l">
+              <a:lnSpc>
+                <a:spcPct val="155000"/>
+              </a:lnSpc>
+            </a:pPr>
+            <a:r>
+              <a:rPr sz="1600" b="0" i="0">
                 <a:solidFill>
                   <a:srgbClr val="FFFFFF"/>
                 </a:solidFill>
-                <a:latin typeface="Century Gothic"/>
-              </a:rPr>
-              <a:t>1</a:t>
-            </a:r>
-          </a:p>
-        </p:txBody>
-      </p:sp>
-      <p:sp>
-        <p:nvSpPr>
-          <p:cNvPr id="6" name="TextBox 5"/>
-          <p:cNvSpPr txBox="1"/>
-          <p:nvPr/>
-        </p:nvSpPr>
-        <p:spPr>
-          <a:xfrm>
-            <a:off x="1600200" y="2203704"/>
-            <a:ext cx="9509760" cy="822960"/>
-          </a:xfrm>
-          <a:prstGeom prst="rect">
-            <a:avLst/>
-          </a:prstGeom>
-          <a:noFill/>
-        </p:spPr>
-        <p:txBody>
-          <a:bodyPr wrap="square" anchor="t" lIns="0" rIns="0" tIns="0" bIns="0">
-            <a:spAutoFit/>
-          </a:bodyPr>
-          <a:lstStyle/>
-          <a:p>
-            <a:pPr algn="l">
-              <a:lnSpc>
-                <a:spcPct val="130000"/>
-              </a:lnSpc>
-            </a:pPr>
-            <a:r>
-              <a:rPr sz="1500" b="0" i="0">
-                <a:solidFill>
-                  <a:srgbClr val="1C1730"/>
-                </a:solidFill>
                 <a:latin typeface="Calibri"/>
               </a:rPr>
-              <a:t>Hash your own name twice in a terminal — confirm the output is identical both times.</a:t>
-            </a:r>
-          </a:p>
-        </p:txBody>
-      </p:sp>
-      <p:sp>
-        <p:nvSpPr>
-          <p:cNvPr id="7" name="Oval 6"/>
-          <p:cNvSpPr/>
-          <p:nvPr/>
-        </p:nvSpPr>
-        <p:spPr>
-          <a:xfrm>
-            <a:off x="822960" y="3108960"/>
-            <a:ext cx="502920" cy="502920"/>
-          </a:xfrm>
-          <a:prstGeom prst="ellipse">
-            <a:avLst/>
-          </a:prstGeom>
-          <a:solidFill>
-            <a:srgbClr val="C1432B"/>
-          </a:solidFill>
-          <a:ln>
-            <a:noFill/>
-          </a:ln>
-          <a:effectLst/>
-        </p:spPr>
-        <p:style>
-          <a:lnRef idx="1">
-            <a:schemeClr val="accent1"/>
-          </a:lnRef>
-          <a:fillRef idx="3">
-            <a:schemeClr val="accent1"/>
-          </a:fillRef>
-          <a:effectRef idx="2">
-            <a:schemeClr val="accent1"/>
-          </a:effectRef>
-          <a:fontRef idx="minor">
-            <a:schemeClr val="lt1"/>
-          </a:fontRef>
-        </p:style>
-        <p:txBody>
-          <a:bodyPr rtlCol="0" anchor="ctr" wrap="none"/>
-          <a:lstStyle/>
-          <a:p>
-            <a:pPr algn="ctr"/>
-            <a:r>
-              <a:rPr sz="1500" b="1">
-                <a:solidFill>
-                  <a:srgbClr val="FFFFFF"/>
-                </a:solidFill>
-                <a:latin typeface="Century Gothic"/>
-              </a:rPr>
-              <a:t>2</a:t>
-            </a:r>
-          </a:p>
-        </p:txBody>
-      </p:sp>
-      <p:sp>
-        <p:nvSpPr>
-          <p:cNvPr id="8" name="TextBox 7"/>
-          <p:cNvSpPr txBox="1"/>
-          <p:nvPr/>
-        </p:nvSpPr>
-        <p:spPr>
-          <a:xfrm>
-            <a:off x="1600200" y="3163824"/>
-            <a:ext cx="9509760" cy="822960"/>
-          </a:xfrm>
-          <a:prstGeom prst="rect">
-            <a:avLst/>
-          </a:prstGeom>
-          <a:noFill/>
-        </p:spPr>
-        <p:txBody>
-          <a:bodyPr wrap="square" anchor="t" lIns="0" rIns="0" tIns="0" bIns="0">
-            <a:spAutoFit/>
-          </a:bodyPr>
-          <a:lstStyle/>
-          <a:p>
-            <a:pPr algn="l">
-              <a:lnSpc>
-                <a:spcPct val="130000"/>
-              </a:lnSpc>
-            </a:pPr>
-            <a:r>
-              <a:rPr sz="1500" b="0" i="0">
-                <a:solidFill>
-                  <a:srgbClr val="1C1730"/>
-                </a:solidFill>
-                <a:latin typeface="Calibri"/>
-              </a:rPr>
-              <a:t>Change one character and re-hash — confirm the entire output changes, not just part of it.</a:t>
-            </a:r>
-          </a:p>
-        </p:txBody>
-      </p:sp>
-      <p:sp>
-        <p:nvSpPr>
-          <p:cNvPr id="9" name="Oval 8"/>
-          <p:cNvSpPr/>
-          <p:nvPr/>
-        </p:nvSpPr>
-        <p:spPr>
-          <a:xfrm>
-            <a:off x="822960" y="4069080"/>
-            <a:ext cx="502920" cy="502920"/>
-          </a:xfrm>
-          <a:prstGeom prst="ellipse">
-            <a:avLst/>
-          </a:prstGeom>
-          <a:solidFill>
-            <a:srgbClr val="C1432B"/>
-          </a:solidFill>
-          <a:ln>
-            <a:noFill/>
-          </a:ln>
-          <a:effectLst/>
-        </p:spPr>
-        <p:style>
-          <a:lnRef idx="1">
-            <a:schemeClr val="accent1"/>
-          </a:lnRef>
-          <a:fillRef idx="3">
-            <a:schemeClr val="accent1"/>
-          </a:fillRef>
-          <a:effectRef idx="2">
-            <a:schemeClr val="accent1"/>
-          </a:effectRef>
-          <a:fontRef idx="minor">
-            <a:schemeClr val="lt1"/>
-          </a:fontRef>
-        </p:style>
-        <p:txBody>
-          <a:bodyPr rtlCol="0" anchor="ctr" wrap="none"/>
-          <a:lstStyle/>
-          <a:p>
-            <a:pPr algn="ctr"/>
-            <a:r>
-              <a:rPr sz="1500" b="1">
-                <a:solidFill>
-                  <a:srgbClr val="FFFFFF"/>
-                </a:solidFill>
-                <a:latin typeface="Century Gothic"/>
-              </a:rPr>
-              <a:t>3</a:t>
-            </a:r>
-          </a:p>
-        </p:txBody>
-      </p:sp>
-      <p:sp>
-        <p:nvSpPr>
-          <p:cNvPr id="10" name="TextBox 9"/>
-          <p:cNvSpPr txBox="1"/>
-          <p:nvPr/>
-        </p:nvSpPr>
-        <p:spPr>
-          <a:xfrm>
-            <a:off x="1600200" y="4123944"/>
-            <a:ext cx="9509760" cy="822960"/>
-          </a:xfrm>
-          <a:prstGeom prst="rect">
-            <a:avLst/>
-          </a:prstGeom>
-          <a:noFill/>
-        </p:spPr>
-        <p:txBody>
-          <a:bodyPr wrap="square" anchor="t" lIns="0" rIns="0" tIns="0" bIns="0">
-            <a:spAutoFit/>
-          </a:bodyPr>
-          <a:lstStyle/>
-          <a:p>
-            <a:pPr algn="l">
-              <a:lnSpc>
-                <a:spcPct val="130000"/>
-              </a:lnSpc>
-            </a:pPr>
-            <a:r>
-              <a:rPr sz="1500" b="0" i="0">
-                <a:solidFill>
-                  <a:srgbClr val="1C1730"/>
-                </a:solidFill>
-                <a:latin typeface="Calibri"/>
-              </a:rPr>
-              <a:t>Try the live Anders Brownworth hash demo — watch the hash update character-by-character as you type.</a:t>
-            </a:r>
-          </a:p>
-        </p:txBody>
-      </p:sp>
-      <p:sp>
-        <p:nvSpPr>
-          <p:cNvPr id="11" name="Oval 10"/>
-          <p:cNvSpPr/>
-          <p:nvPr/>
-        </p:nvSpPr>
-        <p:spPr>
-          <a:xfrm>
-            <a:off x="822960" y="5029200"/>
-            <a:ext cx="502920" cy="502920"/>
-          </a:xfrm>
-          <a:prstGeom prst="ellipse">
-            <a:avLst/>
-          </a:prstGeom>
-          <a:solidFill>
-            <a:srgbClr val="C1432B"/>
-          </a:solidFill>
-          <a:ln>
-            <a:noFill/>
-          </a:ln>
-          <a:effectLst/>
-        </p:spPr>
-        <p:style>
-          <a:lnRef idx="1">
-            <a:schemeClr val="accent1"/>
-          </a:lnRef>
-          <a:fillRef idx="3">
-            <a:schemeClr val="accent1"/>
-          </a:fillRef>
-          <a:effectRef idx="2">
-            <a:schemeClr val="accent1"/>
-          </a:effectRef>
-          <a:fontRef idx="minor">
-            <a:schemeClr val="lt1"/>
-          </a:fontRef>
-        </p:style>
-        <p:txBody>
-          <a:bodyPr rtlCol="0" anchor="ctr" wrap="none"/>
-          <a:lstStyle/>
-          <a:p>
-            <a:pPr algn="ctr"/>
-            <a:r>
-              <a:rPr sz="1500" b="1">
-                <a:solidFill>
-                  <a:srgbClr val="FFFFFF"/>
-                </a:solidFill>
-                <a:latin typeface="Century Gothic"/>
-              </a:rPr>
-              <a:t>4</a:t>
-            </a:r>
-          </a:p>
-        </p:txBody>
-      </p:sp>
-      <p:sp>
-        <p:nvSpPr>
-          <p:cNvPr id="12" name="TextBox 11"/>
-          <p:cNvSpPr txBox="1"/>
-          <p:nvPr/>
-        </p:nvSpPr>
-        <p:spPr>
-          <a:xfrm>
-            <a:off x="1600200" y="5084064"/>
-            <a:ext cx="9509760" cy="822960"/>
-          </a:xfrm>
-          <a:prstGeom prst="rect">
-            <a:avLst/>
-          </a:prstGeom>
-          <a:noFill/>
-        </p:spPr>
-        <p:txBody>
-          <a:bodyPr wrap="square" anchor="t" lIns="0" rIns="0" tIns="0" bIns="0">
-            <a:spAutoFit/>
-          </a:bodyPr>
-          <a:lstStyle/>
-          <a:p>
-            <a:pPr algn="l">
-              <a:lnSpc>
-                <a:spcPct val="130000"/>
-              </a:lnSpc>
-            </a:pPr>
-            <a:r>
-              <a:rPr sz="1500" b="0" i="0">
-                <a:solidFill>
-                  <a:srgbClr val="1C1730"/>
-                </a:solidFill>
-                <a:latin typeface="Calibri"/>
-              </a:rPr>
-              <a:t>Hash "Hello World" vs "hello World" in CyberChef and compare the two outputs side by side.</a:t>
-            </a:r>
-          </a:p>
-        </p:txBody>
-      </p:sp>
-      <p:sp>
-        <p:nvSpPr>
-          <p:cNvPr id="13" name="TextBox 12"/>
+              <a:t>SHA-256 is designed to be fast — which means an attacker with a leaked hash database can try billions of guesses per second. Purpose-built password-hashing algorithms like bcrypt and Argon2 are deliberately slow, and add random “salt” per password, specifically to make brute-forcing impractical. Using the right hash function for the job is a real engineering judgment call — not a minor detail.</a:t>
+            </a:r>
+          </a:p>
+        </p:txBody>
+      </p:sp>
+      <p:sp>
+        <p:nvSpPr>
+          <p:cNvPr id="7" name="TextBox 6"/>
           <p:cNvSpPr txBox="1"/>
           <p:nvPr/>
         </p:nvSpPr>
@@ -6246,7 +6238,7 @@
                 </a:solidFill>
                 <a:latin typeface="Consolas"/>
               </a:rPr>
-              <a:t>14 / 15</a:t>
+              <a:t>14 / 18</a:t>
             </a:r>
           </a:p>
         </p:txBody>
@@ -6284,6 +6276,1330 @@
             <a:avLst/>
           </a:prstGeom>
           <a:solidFill>
+            <a:srgbClr val="F8F6F2"/>
+          </a:solidFill>
+          <a:ln>
+            <a:noFill/>
+          </a:ln>
+          <a:effectLst/>
+        </p:spPr>
+        <p:style>
+          <a:lnRef idx="1">
+            <a:schemeClr val="accent1"/>
+          </a:lnRef>
+          <a:fillRef idx="3">
+            <a:schemeClr val="accent1"/>
+          </a:fillRef>
+          <a:effectRef idx="2">
+            <a:schemeClr val="accent1"/>
+          </a:effectRef>
+          <a:fontRef idx="minor">
+            <a:schemeClr val="lt1"/>
+          </a:fontRef>
+        </p:style>
+        <p:txBody>
+          <a:bodyPr rtlCol="0" anchor="ctr"/>
+          <a:lstStyle/>
+          <a:p>
+            <a:pPr algn="ctr"/>
+          </a:p>
+        </p:txBody>
+      </p:sp>
+      <p:sp>
+        <p:nvSpPr>
+          <p:cNvPr id="3" name="TextBox 2"/>
+          <p:cNvSpPr txBox="1"/>
+          <p:nvPr/>
+        </p:nvSpPr>
+        <p:spPr>
+          <a:xfrm>
+            <a:off x="822960" y="640080"/>
+            <a:ext cx="10058400" cy="365760"/>
+          </a:xfrm>
+          <a:prstGeom prst="rect">
+            <a:avLst/>
+          </a:prstGeom>
+          <a:noFill/>
+        </p:spPr>
+        <p:txBody>
+          <a:bodyPr wrap="square" anchor="t" lIns="0" rIns="0" tIns="0" bIns="0">
+            <a:spAutoFit/>
+          </a:bodyPr>
+          <a:lstStyle/>
+          <a:p>
+            <a:pPr algn="l">
+              <a:lnSpc>
+                <a:spcPct val="115000"/>
+              </a:lnSpc>
+            </a:pPr>
+            <a:r>
+              <a:rPr sz="1300" b="1" i="0">
+                <a:solidFill>
+                  <a:srgbClr val="C1432B"/>
+                </a:solidFill>
+                <a:latin typeface="Calibri"/>
+              </a:rPr>
+              <a:t>REAL-LIFE ANALOGY</a:t>
+            </a:r>
+          </a:p>
+        </p:txBody>
+      </p:sp>
+      <p:sp>
+        <p:nvSpPr>
+          <p:cNvPr id="4" name="TextBox 3"/>
+          <p:cNvSpPr txBox="1"/>
+          <p:nvPr/>
+        </p:nvSpPr>
+        <p:spPr>
+          <a:xfrm>
+            <a:off x="822960" y="1097280"/>
+            <a:ext cx="10332720" cy="1005840"/>
+          </a:xfrm>
+          <a:prstGeom prst="rect">
+            <a:avLst/>
+          </a:prstGeom>
+          <a:noFill/>
+        </p:spPr>
+        <p:txBody>
+          <a:bodyPr wrap="square" anchor="t" lIns="0" rIns="0" tIns="0" bIns="0">
+            <a:spAutoFit/>
+          </a:bodyPr>
+          <a:lstStyle/>
+          <a:p>
+            <a:pPr algn="l">
+              <a:lnSpc>
+                <a:spcPct val="105000"/>
+              </a:lnSpc>
+            </a:pPr>
+            <a:r>
+              <a:rPr sz="3000" b="1" i="0">
+                <a:solidFill>
+                  <a:srgbClr val="1C1730"/>
+                </a:solidFill>
+                <a:latin typeface="Century Gothic"/>
+              </a:rPr>
+              <a:t>A Tamper-Evident Wax Seal</a:t>
+            </a:r>
+          </a:p>
+        </p:txBody>
+      </p:sp>
+      <p:sp>
+        <p:nvSpPr>
+          <p:cNvPr id="5" name="Rectangle 4"/>
+          <p:cNvSpPr/>
+          <p:nvPr/>
+        </p:nvSpPr>
+        <p:spPr>
+          <a:xfrm>
+            <a:off x="822960" y="2286000"/>
+            <a:ext cx="91440" cy="3657600"/>
+          </a:xfrm>
+          <a:prstGeom prst="rect">
+            <a:avLst/>
+          </a:prstGeom>
+          <a:solidFill>
+            <a:srgbClr val="C1432B"/>
+          </a:solidFill>
+          <a:ln>
+            <a:noFill/>
+          </a:ln>
+          <a:effectLst/>
+        </p:spPr>
+        <p:style>
+          <a:lnRef idx="1">
+            <a:schemeClr val="accent1"/>
+          </a:lnRef>
+          <a:fillRef idx="3">
+            <a:schemeClr val="accent1"/>
+          </a:fillRef>
+          <a:effectRef idx="2">
+            <a:schemeClr val="accent1"/>
+          </a:effectRef>
+          <a:fontRef idx="minor">
+            <a:schemeClr val="lt1"/>
+          </a:fontRef>
+        </p:style>
+        <p:txBody>
+          <a:bodyPr rtlCol="0" anchor="ctr"/>
+          <a:lstStyle/>
+          <a:p>
+            <a:pPr algn="ctr"/>
+          </a:p>
+        </p:txBody>
+      </p:sp>
+      <p:sp>
+        <p:nvSpPr>
+          <p:cNvPr id="6" name="TextBox 5"/>
+          <p:cNvSpPr txBox="1"/>
+          <p:nvPr/>
+        </p:nvSpPr>
+        <p:spPr>
+          <a:xfrm>
+            <a:off x="1280160" y="2377440"/>
+            <a:ext cx="9784080" cy="3566160"/>
+          </a:xfrm>
+          <a:prstGeom prst="rect">
+            <a:avLst/>
+          </a:prstGeom>
+          <a:noFill/>
+        </p:spPr>
+        <p:txBody>
+          <a:bodyPr wrap="square" anchor="t" lIns="0" rIns="0" tIns="0" bIns="0">
+            <a:spAutoFit/>
+          </a:bodyPr>
+          <a:lstStyle/>
+          <a:p>
+            <a:pPr algn="l">
+              <a:lnSpc>
+                <a:spcPct val="160000"/>
+              </a:lnSpc>
+            </a:pPr>
+            <a:r>
+              <a:rPr sz="1800" b="0" i="0">
+                <a:solidFill>
+                  <a:srgbClr val="1C1730"/>
+                </a:solidFill>
+                <a:latin typeface="Calibri"/>
+              </a:rPr>
+              <a:t>Think of a hash like a wax seal on an old letter. The seal doesn't tell you what's written inside — you can't reverse it back into words (one-way). But if someone opens the letter, changes one word, and reseals it, the new seal looks completely different (avalanche effect). Anyone who remembers the original seal can instantly tell it was tampered with — without reading a single word.</a:t>
+            </a:r>
+          </a:p>
+        </p:txBody>
+      </p:sp>
+      <p:sp>
+        <p:nvSpPr>
+          <p:cNvPr id="7" name="TextBox 6"/>
+          <p:cNvSpPr txBox="1"/>
+          <p:nvPr/>
+        </p:nvSpPr>
+        <p:spPr>
+          <a:xfrm>
+            <a:off x="9966960" y="502920"/>
+            <a:ext cx="1371600" cy="320040"/>
+          </a:xfrm>
+          <a:prstGeom prst="rect">
+            <a:avLst/>
+          </a:prstGeom>
+          <a:noFill/>
+        </p:spPr>
+        <p:txBody>
+          <a:bodyPr wrap="square" anchor="t" lIns="0" rIns="0" tIns="0" bIns="0">
+            <a:spAutoFit/>
+          </a:bodyPr>
+          <a:lstStyle/>
+          <a:p>
+            <a:pPr algn="r">
+              <a:lnSpc>
+                <a:spcPct val="115000"/>
+              </a:lnSpc>
+            </a:pPr>
+            <a:r>
+              <a:rPr sz="1100" b="1" i="0">
+                <a:solidFill>
+                  <a:srgbClr val="5C576E"/>
+                </a:solidFill>
+                <a:latin typeface="Consolas"/>
+              </a:rPr>
+              <a:t>15 / 18</a:t>
+            </a:r>
+          </a:p>
+        </p:txBody>
+      </p:sp>
+    </p:spTree>
+  </p:cSld>
+  <p:clrMapOvr>
+    <a:masterClrMapping/>
+  </p:clrMapOvr>
+</p:sld>
+</file>
+
+<file path=ppt/slides/slide16.xml><?xml version="1.0" encoding="utf-8"?>
+<p:sld xmlns:a="http://schemas.openxmlformats.org/drawingml/2006/main" xmlns:p="http://schemas.openxmlformats.org/presentationml/2006/main" xmlns:r="http://schemas.openxmlformats.org/officeDocument/2006/relationships">
+  <p:cSld>
+    <p:spTree>
+      <p:nvGrpSpPr>
+        <p:cNvPr id="1" name=""/>
+        <p:cNvGrpSpPr/>
+        <p:nvPr/>
+      </p:nvGrpSpPr>
+      <p:grpSpPr/>
+      <p:sp>
+        <p:nvSpPr>
+          <p:cNvPr id="2" name="Rectangle 1"/>
+          <p:cNvSpPr/>
+          <p:nvPr/>
+        </p:nvSpPr>
+        <p:spPr>
+          <a:xfrm>
+            <a:off x="0" y="0"/>
+            <a:ext cx="12191695" cy="6858000"/>
+          </a:xfrm>
+          <a:prstGeom prst="rect">
+            <a:avLst/>
+          </a:prstGeom>
+          <a:solidFill>
+            <a:srgbClr val="F8F6F2"/>
+          </a:solidFill>
+          <a:ln>
+            <a:noFill/>
+          </a:ln>
+          <a:effectLst/>
+        </p:spPr>
+        <p:style>
+          <a:lnRef idx="1">
+            <a:schemeClr val="accent1"/>
+          </a:lnRef>
+          <a:fillRef idx="3">
+            <a:schemeClr val="accent1"/>
+          </a:fillRef>
+          <a:effectRef idx="2">
+            <a:schemeClr val="accent1"/>
+          </a:effectRef>
+          <a:fontRef idx="minor">
+            <a:schemeClr val="lt1"/>
+          </a:fontRef>
+        </p:style>
+        <p:txBody>
+          <a:bodyPr rtlCol="0" anchor="ctr"/>
+          <a:lstStyle/>
+          <a:p>
+            <a:pPr algn="ctr"/>
+          </a:p>
+        </p:txBody>
+      </p:sp>
+      <p:sp>
+        <p:nvSpPr>
+          <p:cNvPr id="3" name="TextBox 2"/>
+          <p:cNvSpPr txBox="1"/>
+          <p:nvPr/>
+        </p:nvSpPr>
+        <p:spPr>
+          <a:xfrm>
+            <a:off x="822960" y="640080"/>
+            <a:ext cx="10058400" cy="365760"/>
+          </a:xfrm>
+          <a:prstGeom prst="rect">
+            <a:avLst/>
+          </a:prstGeom>
+          <a:noFill/>
+        </p:spPr>
+        <p:txBody>
+          <a:bodyPr wrap="square" anchor="t" lIns="0" rIns="0" tIns="0" bIns="0">
+            <a:spAutoFit/>
+          </a:bodyPr>
+          <a:lstStyle/>
+          <a:p>
+            <a:pPr algn="l">
+              <a:lnSpc>
+                <a:spcPct val="115000"/>
+              </a:lnSpc>
+            </a:pPr>
+            <a:r>
+              <a:rPr sz="1300" b="1" i="0">
+                <a:solidFill>
+                  <a:srgbClr val="C1432B"/>
+                </a:solidFill>
+                <a:latin typeface="Calibri"/>
+              </a:rPr>
+              <a:t>COMMON MISCONCEPTIONS</a:t>
+            </a:r>
+          </a:p>
+        </p:txBody>
+      </p:sp>
+      <p:sp>
+        <p:nvSpPr>
+          <p:cNvPr id="4" name="TextBox 3"/>
+          <p:cNvSpPr txBox="1"/>
+          <p:nvPr/>
+        </p:nvSpPr>
+        <p:spPr>
+          <a:xfrm>
+            <a:off x="822960" y="1051560"/>
+            <a:ext cx="9601200" cy="1005840"/>
+          </a:xfrm>
+          <a:prstGeom prst="rect">
+            <a:avLst/>
+          </a:prstGeom>
+          <a:noFill/>
+        </p:spPr>
+        <p:txBody>
+          <a:bodyPr wrap="square" anchor="t" lIns="0" rIns="0" tIns="0" bIns="0">
+            <a:spAutoFit/>
+          </a:bodyPr>
+          <a:lstStyle/>
+          <a:p>
+            <a:pPr algn="l">
+              <a:lnSpc>
+                <a:spcPct val="105000"/>
+              </a:lnSpc>
+            </a:pPr>
+            <a:r>
+              <a:rPr sz="3000" b="1" i="0">
+                <a:solidFill>
+                  <a:srgbClr val="1C1730"/>
+                </a:solidFill>
+                <a:latin typeface="Century Gothic"/>
+              </a:rPr>
+              <a:t>Where People Get Tripped Up</a:t>
+            </a:r>
+          </a:p>
+        </p:txBody>
+      </p:sp>
+      <p:sp>
+        <p:nvSpPr>
+          <p:cNvPr id="5" name="Rounded Rectangle 4"/>
+          <p:cNvSpPr/>
+          <p:nvPr/>
+        </p:nvSpPr>
+        <p:spPr>
+          <a:xfrm>
+            <a:off x="822960" y="2057400"/>
+            <a:ext cx="10515600" cy="1874519"/>
+          </a:xfrm>
+          <a:prstGeom prst="roundRect">
+            <a:avLst>
+              <a:gd name="adj" fmla="val 5000"/>
+            </a:avLst>
+          </a:prstGeom>
+          <a:solidFill>
+            <a:srgbClr val="FFFFFF"/>
+          </a:solidFill>
+          <a:ln>
+            <a:noFill/>
+          </a:ln>
+          <a:effectLst/>
+        </p:spPr>
+        <p:style>
+          <a:lnRef idx="1">
+            <a:schemeClr val="accent1"/>
+          </a:lnRef>
+          <a:fillRef idx="3">
+            <a:schemeClr val="accent1"/>
+          </a:fillRef>
+          <a:effectRef idx="2">
+            <a:schemeClr val="accent1"/>
+          </a:effectRef>
+          <a:fontRef idx="minor">
+            <a:schemeClr val="lt1"/>
+          </a:fontRef>
+        </p:style>
+        <p:txBody>
+          <a:bodyPr rtlCol="0" anchor="ctr"/>
+          <a:lstStyle/>
+          <a:p>
+            <a:pPr algn="ctr"/>
+          </a:p>
+        </p:txBody>
+      </p:sp>
+      <p:sp>
+        <p:nvSpPr>
+          <p:cNvPr id="6" name="Rectangle 5"/>
+          <p:cNvSpPr/>
+          <p:nvPr/>
+        </p:nvSpPr>
+        <p:spPr>
+          <a:xfrm>
+            <a:off x="822960" y="2057400"/>
+            <a:ext cx="82296" cy="1874519"/>
+          </a:xfrm>
+          <a:prstGeom prst="rect">
+            <a:avLst/>
+          </a:prstGeom>
+          <a:solidFill>
+            <a:srgbClr val="C1432B"/>
+          </a:solidFill>
+          <a:ln>
+            <a:noFill/>
+          </a:ln>
+          <a:effectLst/>
+        </p:spPr>
+        <p:style>
+          <a:lnRef idx="1">
+            <a:schemeClr val="accent1"/>
+          </a:lnRef>
+          <a:fillRef idx="3">
+            <a:schemeClr val="accent1"/>
+          </a:fillRef>
+          <a:effectRef idx="2">
+            <a:schemeClr val="accent1"/>
+          </a:effectRef>
+          <a:fontRef idx="minor">
+            <a:schemeClr val="lt1"/>
+          </a:fontRef>
+        </p:style>
+        <p:txBody>
+          <a:bodyPr rtlCol="0" anchor="ctr"/>
+          <a:lstStyle/>
+          <a:p>
+            <a:pPr algn="ctr"/>
+          </a:p>
+        </p:txBody>
+      </p:sp>
+      <p:sp>
+        <p:nvSpPr>
+          <p:cNvPr id="7" name="TextBox 6"/>
+          <p:cNvSpPr txBox="1"/>
+          <p:nvPr/>
+        </p:nvSpPr>
+        <p:spPr>
+          <a:xfrm>
+            <a:off x="1188720" y="2258568"/>
+            <a:ext cx="9784080" cy="457200"/>
+          </a:xfrm>
+          <a:prstGeom prst="rect">
+            <a:avLst/>
+          </a:prstGeom>
+          <a:noFill/>
+        </p:spPr>
+        <p:txBody>
+          <a:bodyPr wrap="square" anchor="t" lIns="0" rIns="0" tIns="0" bIns="0">
+            <a:spAutoFit/>
+          </a:bodyPr>
+          <a:lstStyle/>
+          <a:p>
+            <a:pPr algn="l">
+              <a:lnSpc>
+                <a:spcPct val="115000"/>
+              </a:lnSpc>
+            </a:pPr>
+            <a:r>
+              <a:rPr sz="1700" b="1" i="0">
+                <a:solidFill>
+                  <a:srgbClr val="C1432B"/>
+                </a:solidFill>
+                <a:latin typeface="Century Gothic"/>
+              </a:rPr>
+              <a:t>“Hashing is a form of encryption.”</a:t>
+            </a:r>
+          </a:p>
+        </p:txBody>
+      </p:sp>
+      <p:sp>
+        <p:nvSpPr>
+          <p:cNvPr id="8" name="TextBox 7"/>
+          <p:cNvSpPr txBox="1"/>
+          <p:nvPr/>
+        </p:nvSpPr>
+        <p:spPr>
+          <a:xfrm>
+            <a:off x="1188720" y="2743200"/>
+            <a:ext cx="9784080" cy="1097280"/>
+          </a:xfrm>
+          <a:prstGeom prst="rect">
+            <a:avLst/>
+          </a:prstGeom>
+          <a:noFill/>
+        </p:spPr>
+        <p:txBody>
+          <a:bodyPr wrap="square" anchor="t" lIns="0" rIns="0" tIns="0" bIns="0">
+            <a:spAutoFit/>
+          </a:bodyPr>
+          <a:lstStyle/>
+          <a:p>
+            <a:pPr algn="l">
+              <a:lnSpc>
+                <a:spcPct val="135000"/>
+              </a:lnSpc>
+            </a:pPr>
+            <a:r>
+              <a:rPr sz="1300" b="0" i="0">
+                <a:solidFill>
+                  <a:srgbClr val="5C576E"/>
+                </a:solidFill>
+                <a:latin typeface="Calibri"/>
+              </a:rPr>
+              <a:t>It isn't. Encryption is reversible on purpose — the right key decrypts it back. Hashing is deliberately one-way: there is no key that turns a hash back into its original input. “Decrypting a hash” is a contradiction in terms.</a:t>
+            </a:r>
+          </a:p>
+        </p:txBody>
+      </p:sp>
+      <p:sp>
+        <p:nvSpPr>
+          <p:cNvPr id="9" name="Rounded Rectangle 8"/>
+          <p:cNvSpPr/>
+          <p:nvPr/>
+        </p:nvSpPr>
+        <p:spPr>
+          <a:xfrm>
+            <a:off x="822960" y="4160520"/>
+            <a:ext cx="10515600" cy="1874519"/>
+          </a:xfrm>
+          <a:prstGeom prst="roundRect">
+            <a:avLst>
+              <a:gd name="adj" fmla="val 5000"/>
+            </a:avLst>
+          </a:prstGeom>
+          <a:solidFill>
+            <a:srgbClr val="FFFFFF"/>
+          </a:solidFill>
+          <a:ln>
+            <a:noFill/>
+          </a:ln>
+          <a:effectLst/>
+        </p:spPr>
+        <p:style>
+          <a:lnRef idx="1">
+            <a:schemeClr val="accent1"/>
+          </a:lnRef>
+          <a:fillRef idx="3">
+            <a:schemeClr val="accent1"/>
+          </a:fillRef>
+          <a:effectRef idx="2">
+            <a:schemeClr val="accent1"/>
+          </a:effectRef>
+          <a:fontRef idx="minor">
+            <a:schemeClr val="lt1"/>
+          </a:fontRef>
+        </p:style>
+        <p:txBody>
+          <a:bodyPr rtlCol="0" anchor="ctr"/>
+          <a:lstStyle/>
+          <a:p>
+            <a:pPr algn="ctr"/>
+          </a:p>
+        </p:txBody>
+      </p:sp>
+      <p:sp>
+        <p:nvSpPr>
+          <p:cNvPr id="10" name="Rectangle 9"/>
+          <p:cNvSpPr/>
+          <p:nvPr/>
+        </p:nvSpPr>
+        <p:spPr>
+          <a:xfrm>
+            <a:off x="822960" y="4160520"/>
+            <a:ext cx="82296" cy="1874519"/>
+          </a:xfrm>
+          <a:prstGeom prst="rect">
+            <a:avLst/>
+          </a:prstGeom>
+          <a:solidFill>
+            <a:srgbClr val="C1432B"/>
+          </a:solidFill>
+          <a:ln>
+            <a:noFill/>
+          </a:ln>
+          <a:effectLst/>
+        </p:spPr>
+        <p:style>
+          <a:lnRef idx="1">
+            <a:schemeClr val="accent1"/>
+          </a:lnRef>
+          <a:fillRef idx="3">
+            <a:schemeClr val="accent1"/>
+          </a:fillRef>
+          <a:effectRef idx="2">
+            <a:schemeClr val="accent1"/>
+          </a:effectRef>
+          <a:fontRef idx="minor">
+            <a:schemeClr val="lt1"/>
+          </a:fontRef>
+        </p:style>
+        <p:txBody>
+          <a:bodyPr rtlCol="0" anchor="ctr"/>
+          <a:lstStyle/>
+          <a:p>
+            <a:pPr algn="ctr"/>
+          </a:p>
+        </p:txBody>
+      </p:sp>
+      <p:sp>
+        <p:nvSpPr>
+          <p:cNvPr id="11" name="TextBox 10"/>
+          <p:cNvSpPr txBox="1"/>
+          <p:nvPr/>
+        </p:nvSpPr>
+        <p:spPr>
+          <a:xfrm>
+            <a:off x="1188720" y="4361688"/>
+            <a:ext cx="9784080" cy="457200"/>
+          </a:xfrm>
+          <a:prstGeom prst="rect">
+            <a:avLst/>
+          </a:prstGeom>
+          <a:noFill/>
+        </p:spPr>
+        <p:txBody>
+          <a:bodyPr wrap="square" anchor="t" lIns="0" rIns="0" tIns="0" bIns="0">
+            <a:spAutoFit/>
+          </a:bodyPr>
+          <a:lstStyle/>
+          <a:p>
+            <a:pPr algn="l">
+              <a:lnSpc>
+                <a:spcPct val="115000"/>
+              </a:lnSpc>
+            </a:pPr>
+            <a:r>
+              <a:rPr sz="1700" b="1" i="0">
+                <a:solidFill>
+                  <a:srgbClr val="C1432B"/>
+                </a:solidFill>
+                <a:latin typeface="Century Gothic"/>
+              </a:rPr>
+              <a:t>“If a hash is public, that's always safe.”</a:t>
+            </a:r>
+          </a:p>
+        </p:txBody>
+      </p:sp>
+      <p:sp>
+        <p:nvSpPr>
+          <p:cNvPr id="12" name="TextBox 11"/>
+          <p:cNvSpPr txBox="1"/>
+          <p:nvPr/>
+        </p:nvSpPr>
+        <p:spPr>
+          <a:xfrm>
+            <a:off x="1188720" y="4846320"/>
+            <a:ext cx="9784080" cy="1097280"/>
+          </a:xfrm>
+          <a:prstGeom prst="rect">
+            <a:avLst/>
+          </a:prstGeom>
+          <a:noFill/>
+        </p:spPr>
+        <p:txBody>
+          <a:bodyPr wrap="square" anchor="t" lIns="0" rIns="0" tIns="0" bIns="0">
+            <a:spAutoFit/>
+          </a:bodyPr>
+          <a:lstStyle/>
+          <a:p>
+            <a:pPr algn="l">
+              <a:lnSpc>
+                <a:spcPct val="135000"/>
+              </a:lnSpc>
+            </a:pPr>
+            <a:r>
+              <a:rPr sz="1300" b="0" i="0">
+                <a:solidFill>
+                  <a:srgbClr val="5C576E"/>
+                </a:solidFill>
+                <a:latin typeface="Calibri"/>
+              </a:rPr>
+              <a:t>Only for high-entropy inputs. A 4-digit PIN's hash can be cracked instantly by hashing all 10,000 possibilities — exactly why passwords need random salt added before hashing.</a:t>
+            </a:r>
+          </a:p>
+        </p:txBody>
+      </p:sp>
+      <p:sp>
+        <p:nvSpPr>
+          <p:cNvPr id="13" name="TextBox 12"/>
+          <p:cNvSpPr txBox="1"/>
+          <p:nvPr/>
+        </p:nvSpPr>
+        <p:spPr>
+          <a:xfrm>
+            <a:off x="9966960" y="502920"/>
+            <a:ext cx="1371600" cy="320040"/>
+          </a:xfrm>
+          <a:prstGeom prst="rect">
+            <a:avLst/>
+          </a:prstGeom>
+          <a:noFill/>
+        </p:spPr>
+        <p:txBody>
+          <a:bodyPr wrap="square" anchor="t" lIns="0" rIns="0" tIns="0" bIns="0">
+            <a:spAutoFit/>
+          </a:bodyPr>
+          <a:lstStyle/>
+          <a:p>
+            <a:pPr algn="r">
+              <a:lnSpc>
+                <a:spcPct val="115000"/>
+              </a:lnSpc>
+            </a:pPr>
+            <a:r>
+              <a:rPr sz="1100" b="1" i="0">
+                <a:solidFill>
+                  <a:srgbClr val="5C576E"/>
+                </a:solidFill>
+                <a:latin typeface="Consolas"/>
+              </a:rPr>
+              <a:t>16 / 18</a:t>
+            </a:r>
+          </a:p>
+        </p:txBody>
+      </p:sp>
+    </p:spTree>
+  </p:cSld>
+  <p:clrMapOvr>
+    <a:masterClrMapping/>
+  </p:clrMapOvr>
+</p:sld>
+</file>
+
+<file path=ppt/slides/slide17.xml><?xml version="1.0" encoding="utf-8"?>
+<p:sld xmlns:a="http://schemas.openxmlformats.org/drawingml/2006/main" xmlns:p="http://schemas.openxmlformats.org/presentationml/2006/main" xmlns:r="http://schemas.openxmlformats.org/officeDocument/2006/relationships">
+  <p:cSld>
+    <p:spTree>
+      <p:nvGrpSpPr>
+        <p:cNvPr id="1" name=""/>
+        <p:cNvGrpSpPr/>
+        <p:nvPr/>
+      </p:nvGrpSpPr>
+      <p:grpSpPr/>
+      <p:sp>
+        <p:nvSpPr>
+          <p:cNvPr id="2" name="Rectangle 1"/>
+          <p:cNvSpPr/>
+          <p:nvPr/>
+        </p:nvSpPr>
+        <p:spPr>
+          <a:xfrm>
+            <a:off x="0" y="0"/>
+            <a:ext cx="12191695" cy="6858000"/>
+          </a:xfrm>
+          <a:prstGeom prst="rect">
+            <a:avLst/>
+          </a:prstGeom>
+          <a:solidFill>
+            <a:srgbClr val="F8F6F2"/>
+          </a:solidFill>
+          <a:ln>
+            <a:noFill/>
+          </a:ln>
+          <a:effectLst/>
+        </p:spPr>
+        <p:style>
+          <a:lnRef idx="1">
+            <a:schemeClr val="accent1"/>
+          </a:lnRef>
+          <a:fillRef idx="3">
+            <a:schemeClr val="accent1"/>
+          </a:fillRef>
+          <a:effectRef idx="2">
+            <a:schemeClr val="accent1"/>
+          </a:effectRef>
+          <a:fontRef idx="minor">
+            <a:schemeClr val="lt1"/>
+          </a:fontRef>
+        </p:style>
+        <p:txBody>
+          <a:bodyPr rtlCol="0" anchor="ctr"/>
+          <a:lstStyle/>
+          <a:p>
+            <a:pPr algn="ctr"/>
+          </a:p>
+        </p:txBody>
+      </p:sp>
+      <p:sp>
+        <p:nvSpPr>
+          <p:cNvPr id="3" name="TextBox 2"/>
+          <p:cNvSpPr txBox="1"/>
+          <p:nvPr/>
+        </p:nvSpPr>
+        <p:spPr>
+          <a:xfrm>
+            <a:off x="822960" y="640080"/>
+            <a:ext cx="10058400" cy="365760"/>
+          </a:xfrm>
+          <a:prstGeom prst="rect">
+            <a:avLst/>
+          </a:prstGeom>
+          <a:noFill/>
+        </p:spPr>
+        <p:txBody>
+          <a:bodyPr wrap="square" anchor="t" lIns="0" rIns="0" tIns="0" bIns="0">
+            <a:spAutoFit/>
+          </a:bodyPr>
+          <a:lstStyle/>
+          <a:p>
+            <a:pPr algn="l">
+              <a:lnSpc>
+                <a:spcPct val="115000"/>
+              </a:lnSpc>
+            </a:pPr>
+            <a:r>
+              <a:rPr sz="1300" b="1" i="0">
+                <a:solidFill>
+                  <a:srgbClr val="C1432B"/>
+                </a:solidFill>
+                <a:latin typeface="Calibri"/>
+              </a:rPr>
+              <a:t>HANDS-ON PRACTICE</a:t>
+            </a:r>
+          </a:p>
+        </p:txBody>
+      </p:sp>
+      <p:sp>
+        <p:nvSpPr>
+          <p:cNvPr id="4" name="TextBox 3"/>
+          <p:cNvSpPr txBox="1"/>
+          <p:nvPr/>
+        </p:nvSpPr>
+        <p:spPr>
+          <a:xfrm>
+            <a:off x="822960" y="1051560"/>
+            <a:ext cx="9601200" cy="1005840"/>
+          </a:xfrm>
+          <a:prstGeom prst="rect">
+            <a:avLst/>
+          </a:prstGeom>
+          <a:noFill/>
+        </p:spPr>
+        <p:txBody>
+          <a:bodyPr wrap="square" anchor="t" lIns="0" rIns="0" tIns="0" bIns="0">
+            <a:spAutoFit/>
+          </a:bodyPr>
+          <a:lstStyle/>
+          <a:p>
+            <a:pPr algn="l">
+              <a:lnSpc>
+                <a:spcPct val="105000"/>
+              </a:lnSpc>
+            </a:pPr>
+            <a:r>
+              <a:rPr sz="3200" b="1" i="0">
+                <a:solidFill>
+                  <a:srgbClr val="1C1730"/>
+                </a:solidFill>
+                <a:latin typeface="Century Gothic"/>
+              </a:rPr>
+              <a:t>Do This Now</a:t>
+            </a:r>
+          </a:p>
+        </p:txBody>
+      </p:sp>
+      <p:sp>
+        <p:nvSpPr>
+          <p:cNvPr id="5" name="Oval 4"/>
+          <p:cNvSpPr/>
+          <p:nvPr/>
+        </p:nvSpPr>
+        <p:spPr>
+          <a:xfrm>
+            <a:off x="822960" y="2148840"/>
+            <a:ext cx="502920" cy="502920"/>
+          </a:xfrm>
+          <a:prstGeom prst="ellipse">
+            <a:avLst/>
+          </a:prstGeom>
+          <a:solidFill>
+            <a:srgbClr val="C1432B"/>
+          </a:solidFill>
+          <a:ln>
+            <a:noFill/>
+          </a:ln>
+          <a:effectLst/>
+        </p:spPr>
+        <p:style>
+          <a:lnRef idx="1">
+            <a:schemeClr val="accent1"/>
+          </a:lnRef>
+          <a:fillRef idx="3">
+            <a:schemeClr val="accent1"/>
+          </a:fillRef>
+          <a:effectRef idx="2">
+            <a:schemeClr val="accent1"/>
+          </a:effectRef>
+          <a:fontRef idx="minor">
+            <a:schemeClr val="lt1"/>
+          </a:fontRef>
+        </p:style>
+        <p:txBody>
+          <a:bodyPr rtlCol="0" anchor="ctr" wrap="none"/>
+          <a:lstStyle/>
+          <a:p>
+            <a:pPr algn="ctr"/>
+            <a:r>
+              <a:rPr sz="1500" b="1">
+                <a:solidFill>
+                  <a:srgbClr val="FFFFFF"/>
+                </a:solidFill>
+                <a:latin typeface="Century Gothic"/>
+              </a:rPr>
+              <a:t>1</a:t>
+            </a:r>
+          </a:p>
+        </p:txBody>
+      </p:sp>
+      <p:sp>
+        <p:nvSpPr>
+          <p:cNvPr id="6" name="TextBox 5"/>
+          <p:cNvSpPr txBox="1"/>
+          <p:nvPr/>
+        </p:nvSpPr>
+        <p:spPr>
+          <a:xfrm>
+            <a:off x="1600200" y="2203704"/>
+            <a:ext cx="9509760" cy="822960"/>
+          </a:xfrm>
+          <a:prstGeom prst="rect">
+            <a:avLst/>
+          </a:prstGeom>
+          <a:noFill/>
+        </p:spPr>
+        <p:txBody>
+          <a:bodyPr wrap="square" anchor="t" lIns="0" rIns="0" tIns="0" bIns="0">
+            <a:spAutoFit/>
+          </a:bodyPr>
+          <a:lstStyle/>
+          <a:p>
+            <a:pPr algn="l">
+              <a:lnSpc>
+                <a:spcPct val="130000"/>
+              </a:lnSpc>
+            </a:pPr>
+            <a:r>
+              <a:rPr sz="1500" b="0" i="0">
+                <a:solidFill>
+                  <a:srgbClr val="1C1730"/>
+                </a:solidFill>
+                <a:latin typeface="Calibri"/>
+              </a:rPr>
+              <a:t>Hash your own name twice in a terminal — confirm the output is identical both times.</a:t>
+            </a:r>
+          </a:p>
+        </p:txBody>
+      </p:sp>
+      <p:sp>
+        <p:nvSpPr>
+          <p:cNvPr id="7" name="Oval 6"/>
+          <p:cNvSpPr/>
+          <p:nvPr/>
+        </p:nvSpPr>
+        <p:spPr>
+          <a:xfrm>
+            <a:off x="822960" y="3108960"/>
+            <a:ext cx="502920" cy="502920"/>
+          </a:xfrm>
+          <a:prstGeom prst="ellipse">
+            <a:avLst/>
+          </a:prstGeom>
+          <a:solidFill>
+            <a:srgbClr val="C1432B"/>
+          </a:solidFill>
+          <a:ln>
+            <a:noFill/>
+          </a:ln>
+          <a:effectLst/>
+        </p:spPr>
+        <p:style>
+          <a:lnRef idx="1">
+            <a:schemeClr val="accent1"/>
+          </a:lnRef>
+          <a:fillRef idx="3">
+            <a:schemeClr val="accent1"/>
+          </a:fillRef>
+          <a:effectRef idx="2">
+            <a:schemeClr val="accent1"/>
+          </a:effectRef>
+          <a:fontRef idx="minor">
+            <a:schemeClr val="lt1"/>
+          </a:fontRef>
+        </p:style>
+        <p:txBody>
+          <a:bodyPr rtlCol="0" anchor="ctr" wrap="none"/>
+          <a:lstStyle/>
+          <a:p>
+            <a:pPr algn="ctr"/>
+            <a:r>
+              <a:rPr sz="1500" b="1">
+                <a:solidFill>
+                  <a:srgbClr val="FFFFFF"/>
+                </a:solidFill>
+                <a:latin typeface="Century Gothic"/>
+              </a:rPr>
+              <a:t>2</a:t>
+            </a:r>
+          </a:p>
+        </p:txBody>
+      </p:sp>
+      <p:sp>
+        <p:nvSpPr>
+          <p:cNvPr id="8" name="TextBox 7"/>
+          <p:cNvSpPr txBox="1"/>
+          <p:nvPr/>
+        </p:nvSpPr>
+        <p:spPr>
+          <a:xfrm>
+            <a:off x="1600200" y="3163824"/>
+            <a:ext cx="9509760" cy="822960"/>
+          </a:xfrm>
+          <a:prstGeom prst="rect">
+            <a:avLst/>
+          </a:prstGeom>
+          <a:noFill/>
+        </p:spPr>
+        <p:txBody>
+          <a:bodyPr wrap="square" anchor="t" lIns="0" rIns="0" tIns="0" bIns="0">
+            <a:spAutoFit/>
+          </a:bodyPr>
+          <a:lstStyle/>
+          <a:p>
+            <a:pPr algn="l">
+              <a:lnSpc>
+                <a:spcPct val="130000"/>
+              </a:lnSpc>
+            </a:pPr>
+            <a:r>
+              <a:rPr sz="1500" b="0" i="0">
+                <a:solidFill>
+                  <a:srgbClr val="1C1730"/>
+                </a:solidFill>
+                <a:latin typeface="Calibri"/>
+              </a:rPr>
+              <a:t>Change one character and re-hash — confirm the entire output changes, not just part of it.</a:t>
+            </a:r>
+          </a:p>
+        </p:txBody>
+      </p:sp>
+      <p:sp>
+        <p:nvSpPr>
+          <p:cNvPr id="9" name="Oval 8"/>
+          <p:cNvSpPr/>
+          <p:nvPr/>
+        </p:nvSpPr>
+        <p:spPr>
+          <a:xfrm>
+            <a:off x="822960" y="4069080"/>
+            <a:ext cx="502920" cy="502920"/>
+          </a:xfrm>
+          <a:prstGeom prst="ellipse">
+            <a:avLst/>
+          </a:prstGeom>
+          <a:solidFill>
+            <a:srgbClr val="C1432B"/>
+          </a:solidFill>
+          <a:ln>
+            <a:noFill/>
+          </a:ln>
+          <a:effectLst/>
+        </p:spPr>
+        <p:style>
+          <a:lnRef idx="1">
+            <a:schemeClr val="accent1"/>
+          </a:lnRef>
+          <a:fillRef idx="3">
+            <a:schemeClr val="accent1"/>
+          </a:fillRef>
+          <a:effectRef idx="2">
+            <a:schemeClr val="accent1"/>
+          </a:effectRef>
+          <a:fontRef idx="minor">
+            <a:schemeClr val="lt1"/>
+          </a:fontRef>
+        </p:style>
+        <p:txBody>
+          <a:bodyPr rtlCol="0" anchor="ctr" wrap="none"/>
+          <a:lstStyle/>
+          <a:p>
+            <a:pPr algn="ctr"/>
+            <a:r>
+              <a:rPr sz="1500" b="1">
+                <a:solidFill>
+                  <a:srgbClr val="FFFFFF"/>
+                </a:solidFill>
+                <a:latin typeface="Century Gothic"/>
+              </a:rPr>
+              <a:t>3</a:t>
+            </a:r>
+          </a:p>
+        </p:txBody>
+      </p:sp>
+      <p:sp>
+        <p:nvSpPr>
+          <p:cNvPr id="10" name="TextBox 9"/>
+          <p:cNvSpPr txBox="1"/>
+          <p:nvPr/>
+        </p:nvSpPr>
+        <p:spPr>
+          <a:xfrm>
+            <a:off x="1600200" y="4123944"/>
+            <a:ext cx="9509760" cy="822960"/>
+          </a:xfrm>
+          <a:prstGeom prst="rect">
+            <a:avLst/>
+          </a:prstGeom>
+          <a:noFill/>
+        </p:spPr>
+        <p:txBody>
+          <a:bodyPr wrap="square" anchor="t" lIns="0" rIns="0" tIns="0" bIns="0">
+            <a:spAutoFit/>
+          </a:bodyPr>
+          <a:lstStyle/>
+          <a:p>
+            <a:pPr algn="l">
+              <a:lnSpc>
+                <a:spcPct val="130000"/>
+              </a:lnSpc>
+            </a:pPr>
+            <a:r>
+              <a:rPr sz="1500" b="0" i="0">
+                <a:solidFill>
+                  <a:srgbClr val="1C1730"/>
+                </a:solidFill>
+                <a:latin typeface="Calibri"/>
+              </a:rPr>
+              <a:t>Try the live Anders Brownworth hash demo — watch the hash update character-by-character as you type.</a:t>
+            </a:r>
+          </a:p>
+        </p:txBody>
+      </p:sp>
+      <p:sp>
+        <p:nvSpPr>
+          <p:cNvPr id="11" name="Oval 10"/>
+          <p:cNvSpPr/>
+          <p:nvPr/>
+        </p:nvSpPr>
+        <p:spPr>
+          <a:xfrm>
+            <a:off x="822960" y="5029200"/>
+            <a:ext cx="502920" cy="502920"/>
+          </a:xfrm>
+          <a:prstGeom prst="ellipse">
+            <a:avLst/>
+          </a:prstGeom>
+          <a:solidFill>
+            <a:srgbClr val="C1432B"/>
+          </a:solidFill>
+          <a:ln>
+            <a:noFill/>
+          </a:ln>
+          <a:effectLst/>
+        </p:spPr>
+        <p:style>
+          <a:lnRef idx="1">
+            <a:schemeClr val="accent1"/>
+          </a:lnRef>
+          <a:fillRef idx="3">
+            <a:schemeClr val="accent1"/>
+          </a:fillRef>
+          <a:effectRef idx="2">
+            <a:schemeClr val="accent1"/>
+          </a:effectRef>
+          <a:fontRef idx="minor">
+            <a:schemeClr val="lt1"/>
+          </a:fontRef>
+        </p:style>
+        <p:txBody>
+          <a:bodyPr rtlCol="0" anchor="ctr" wrap="none"/>
+          <a:lstStyle/>
+          <a:p>
+            <a:pPr algn="ctr"/>
+            <a:r>
+              <a:rPr sz="1500" b="1">
+                <a:solidFill>
+                  <a:srgbClr val="FFFFFF"/>
+                </a:solidFill>
+                <a:latin typeface="Century Gothic"/>
+              </a:rPr>
+              <a:t>4</a:t>
+            </a:r>
+          </a:p>
+        </p:txBody>
+      </p:sp>
+      <p:sp>
+        <p:nvSpPr>
+          <p:cNvPr id="12" name="TextBox 11"/>
+          <p:cNvSpPr txBox="1"/>
+          <p:nvPr/>
+        </p:nvSpPr>
+        <p:spPr>
+          <a:xfrm>
+            <a:off x="1600200" y="5084064"/>
+            <a:ext cx="9509760" cy="822960"/>
+          </a:xfrm>
+          <a:prstGeom prst="rect">
+            <a:avLst/>
+          </a:prstGeom>
+          <a:noFill/>
+        </p:spPr>
+        <p:txBody>
+          <a:bodyPr wrap="square" anchor="t" lIns="0" rIns="0" tIns="0" bIns="0">
+            <a:spAutoFit/>
+          </a:bodyPr>
+          <a:lstStyle/>
+          <a:p>
+            <a:pPr algn="l">
+              <a:lnSpc>
+                <a:spcPct val="130000"/>
+              </a:lnSpc>
+            </a:pPr>
+            <a:r>
+              <a:rPr sz="1500" b="0" i="0">
+                <a:solidFill>
+                  <a:srgbClr val="1C1730"/>
+                </a:solidFill>
+                <a:latin typeface="Calibri"/>
+              </a:rPr>
+              <a:t>Hash "Hello World" vs "hello World" in CyberChef and compare the two outputs side by side.</a:t>
+            </a:r>
+          </a:p>
+        </p:txBody>
+      </p:sp>
+      <p:sp>
+        <p:nvSpPr>
+          <p:cNvPr id="13" name="TextBox 12"/>
+          <p:cNvSpPr txBox="1"/>
+          <p:nvPr/>
+        </p:nvSpPr>
+        <p:spPr>
+          <a:xfrm>
+            <a:off x="9966960" y="502920"/>
+            <a:ext cx="1371600" cy="320040"/>
+          </a:xfrm>
+          <a:prstGeom prst="rect">
+            <a:avLst/>
+          </a:prstGeom>
+          <a:noFill/>
+        </p:spPr>
+        <p:txBody>
+          <a:bodyPr wrap="square" anchor="t" lIns="0" rIns="0" tIns="0" bIns="0">
+            <a:spAutoFit/>
+          </a:bodyPr>
+          <a:lstStyle/>
+          <a:p>
+            <a:pPr algn="r">
+              <a:lnSpc>
+                <a:spcPct val="115000"/>
+              </a:lnSpc>
+            </a:pPr>
+            <a:r>
+              <a:rPr sz="1100" b="1" i="0">
+                <a:solidFill>
+                  <a:srgbClr val="5C576E"/>
+                </a:solidFill>
+                <a:latin typeface="Consolas"/>
+              </a:rPr>
+              <a:t>17 / 18</a:t>
+            </a:r>
+          </a:p>
+        </p:txBody>
+      </p:sp>
+    </p:spTree>
+  </p:cSld>
+  <p:clrMapOvr>
+    <a:masterClrMapping/>
+  </p:clrMapOvr>
+</p:sld>
+</file>
+
+<file path=ppt/slides/slide18.xml><?xml version="1.0" encoding="utf-8"?>
+<p:sld xmlns:a="http://schemas.openxmlformats.org/drawingml/2006/main" xmlns:p="http://schemas.openxmlformats.org/presentationml/2006/main" xmlns:r="http://schemas.openxmlformats.org/officeDocument/2006/relationships">
+  <p:cSld>
+    <p:spTree>
+      <p:nvGrpSpPr>
+        <p:cNvPr id="1" name=""/>
+        <p:cNvGrpSpPr/>
+        <p:nvPr/>
+      </p:nvGrpSpPr>
+      <p:grpSpPr/>
+      <p:sp>
+        <p:nvSpPr>
+          <p:cNvPr id="2" name="Rectangle 1"/>
+          <p:cNvSpPr/>
+          <p:nvPr/>
+        </p:nvSpPr>
+        <p:spPr>
+          <a:xfrm>
+            <a:off x="0" y="0"/>
+            <a:ext cx="12191695" cy="6858000"/>
+          </a:xfrm>
+          <a:prstGeom prst="rect">
+            <a:avLst/>
+          </a:prstGeom>
+          <a:solidFill>
             <a:srgbClr val="1C1730"/>
           </a:solidFill>
           <a:ln>
@@ -6869,7 +8185,7 @@
                 </a:solidFill>
                 <a:latin typeface="Consolas"/>
               </a:rPr>
-              <a:t>15 / 15</a:t>
+              <a:t>18 / 18</a:t>
             </a:r>
           </a:p>
         </p:txBody>
@@ -6966,11 +8282,11 @@
             <a:r>
               <a:rPr sz="1300" b="1" i="0">
                 <a:solidFill>
-                  <a:srgbClr val="C1432B"/>
+                  <a:srgbClr val="5C576E"/>
                 </a:solidFill>
                 <a:latin typeface="Calibri"/>
               </a:rPr>
-              <a:t>TOPIC 01 — HASHING</a:t>
+              <a:t>HOW THIS COURSE IS STRUCTURED</a:t>
             </a:r>
           </a:p>
         </p:txBody>
@@ -7009,21 +8325,69 @@
                 </a:solidFill>
                 <a:latin typeface="Century Gothic"/>
               </a:rPr>
-              <a:t>Why This Matters</a:t>
-            </a:r>
-          </a:p>
-        </p:txBody>
-      </p:sp>
-      <p:sp>
-        <p:nvSpPr>
-          <p:cNvPr id="5" name="TextBox 4"/>
-          <p:cNvSpPr txBox="1"/>
-          <p:nvPr/>
-        </p:nvSpPr>
-        <p:spPr>
-          <a:xfrm>
-            <a:off x="822960" y="1965960"/>
-            <a:ext cx="9875520" cy="1463040"/>
+              <a:t>Two Halves, Four Weeks Each</a:t>
+            </a:r>
+          </a:p>
+        </p:txBody>
+      </p:sp>
+      <p:sp>
+        <p:nvSpPr>
+          <p:cNvPr id="5" name="Rounded Rectangle 4"/>
+          <p:cNvSpPr/>
+          <p:nvPr/>
+        </p:nvSpPr>
+        <p:spPr>
+          <a:xfrm>
+            <a:off x="822960" y="2103120"/>
+            <a:ext cx="5120640" cy="2743200"/>
+          </a:xfrm>
+          <a:prstGeom prst="roundRect">
+            <a:avLst>
+              <a:gd name="adj" fmla="val 9000"/>
+            </a:avLst>
+          </a:prstGeom>
+          <a:solidFill>
+            <a:srgbClr val="FFFFFF"/>
+          </a:solidFill>
+          <a:ln w="12700">
+            <a:solidFill>
+              <a:srgbClr val="DED9EA"/>
+            </a:solidFill>
+          </a:ln>
+          <a:effectLst/>
+        </p:spPr>
+        <p:style>
+          <a:lnRef idx="1">
+            <a:schemeClr val="accent1"/>
+          </a:lnRef>
+          <a:fillRef idx="3">
+            <a:schemeClr val="accent1"/>
+          </a:fillRef>
+          <a:effectRef idx="2">
+            <a:schemeClr val="accent1"/>
+          </a:effectRef>
+          <a:fontRef idx="minor">
+            <a:schemeClr val="lt1"/>
+          </a:fontRef>
+        </p:style>
+        <p:txBody>
+          <a:bodyPr rtlCol="0" anchor="ctr"/>
+          <a:lstStyle/>
+          <a:p>
+            <a:pPr algn="ctr"/>
+          </a:p>
+        </p:txBody>
+      </p:sp>
+      <p:sp>
+        <p:nvSpPr>
+          <p:cNvPr id="6" name="TextBox 5"/>
+          <p:cNvSpPr txBox="1"/>
+          <p:nvPr/>
+        </p:nvSpPr>
+        <p:spPr>
+          <a:xfrm>
+            <a:off x="1078992" y="2359152"/>
+            <a:ext cx="4608576" cy="457200"/>
           </a:xfrm>
           <a:prstGeom prst="rect">
             <a:avLst/>
@@ -7038,73 +8402,201 @@
           <a:p>
             <a:pPr algn="l">
               <a:lnSpc>
-                <a:spcPct val="140000"/>
-              </a:lnSpc>
-            </a:pPr>
-            <a:r>
-              <a:rPr sz="1600" b="0" i="0">
+                <a:spcPct val="115000"/>
+              </a:lnSpc>
+            </a:pPr>
+            <a:r>
+              <a:rPr sz="1800" b="1" i="0">
+                <a:solidFill>
+                  <a:srgbClr val="1C1730"/>
+                </a:solidFill>
+                <a:latin typeface="Century Gothic"/>
+              </a:rPr>
+              <a:t>Half 1 · Weeks 1–4</a:t>
+            </a:r>
+          </a:p>
+        </p:txBody>
+      </p:sp>
+      <p:sp>
+        <p:nvSpPr>
+          <p:cNvPr id="7" name="TextBox 6"/>
+          <p:cNvSpPr txBox="1"/>
+          <p:nvPr/>
+        </p:nvSpPr>
+        <p:spPr>
+          <a:xfrm>
+            <a:off x="1078992" y="2816352"/>
+            <a:ext cx="4608576" cy="1892808"/>
+          </a:xfrm>
+          <a:prstGeom prst="rect">
+            <a:avLst/>
+          </a:prstGeom>
+          <a:noFill/>
+        </p:spPr>
+        <p:txBody>
+          <a:bodyPr wrap="square" anchor="t" lIns="0" rIns="0" tIns="0" bIns="0">
+            <a:spAutoFit/>
+          </a:bodyPr>
+          <a:lstStyle/>
+          <a:p>
+            <a:pPr algn="l">
+              <a:lnSpc>
+                <a:spcPct val="128000"/>
+              </a:lnSpc>
+            </a:pPr>
+            <a:r>
+              <a:rPr sz="1350" b="0" i="0">
+                <a:solidFill>
+                  <a:srgbClr val="1C1730"/>
+                </a:solidFill>
+                <a:latin typeface="Calibri"/>
+              </a:rPr>
+              <a:t>Basics &amp; Core Concepts. Everything you need to walk into a hackathon and build something real — wallets, contracts, tokens, a working dApp.</a:t>
+            </a:r>
+          </a:p>
+        </p:txBody>
+      </p:sp>
+      <p:sp>
+        <p:nvSpPr>
+          <p:cNvPr id="8" name="Rounded Rectangle 7"/>
+          <p:cNvSpPr/>
+          <p:nvPr/>
+        </p:nvSpPr>
+        <p:spPr>
+          <a:xfrm>
+            <a:off x="6217920" y="2103120"/>
+            <a:ext cx="5120640" cy="2743200"/>
+          </a:xfrm>
+          <a:prstGeom prst="roundRect">
+            <a:avLst>
+              <a:gd name="adj" fmla="val 9000"/>
+            </a:avLst>
+          </a:prstGeom>
+          <a:solidFill>
+            <a:srgbClr val="FFFFFF"/>
+          </a:solidFill>
+          <a:ln w="12700">
+            <a:solidFill>
+              <a:srgbClr val="DED9EA"/>
+            </a:solidFill>
+          </a:ln>
+          <a:effectLst/>
+        </p:spPr>
+        <p:style>
+          <a:lnRef idx="1">
+            <a:schemeClr val="accent1"/>
+          </a:lnRef>
+          <a:fillRef idx="3">
+            <a:schemeClr val="accent1"/>
+          </a:fillRef>
+          <a:effectRef idx="2">
+            <a:schemeClr val="accent1"/>
+          </a:effectRef>
+          <a:fontRef idx="minor">
+            <a:schemeClr val="lt1"/>
+          </a:fontRef>
+        </p:style>
+        <p:txBody>
+          <a:bodyPr rtlCol="0" anchor="ctr"/>
+          <a:lstStyle/>
+          <a:p>
+            <a:pPr algn="ctr"/>
+          </a:p>
+        </p:txBody>
+      </p:sp>
+      <p:sp>
+        <p:nvSpPr>
+          <p:cNvPr id="9" name="TextBox 8"/>
+          <p:cNvSpPr txBox="1"/>
+          <p:nvPr/>
+        </p:nvSpPr>
+        <p:spPr>
+          <a:xfrm>
+            <a:off x="6473952" y="2359152"/>
+            <a:ext cx="4608576" cy="457200"/>
+          </a:xfrm>
+          <a:prstGeom prst="rect">
+            <a:avLst/>
+          </a:prstGeom>
+          <a:noFill/>
+        </p:spPr>
+        <p:txBody>
+          <a:bodyPr wrap="square" anchor="t" lIns="0" rIns="0" tIns="0" bIns="0">
+            <a:spAutoFit/>
+          </a:bodyPr>
+          <a:lstStyle/>
+          <a:p>
+            <a:pPr algn="l">
+              <a:lnSpc>
+                <a:spcPct val="115000"/>
+              </a:lnSpc>
+            </a:pPr>
+            <a:r>
+              <a:rPr sz="1800" b="1" i="0">
                 <a:solidFill>
                   <a:srgbClr val="5C576E"/>
                 </a:solidFill>
+                <a:latin typeface="Century Gothic"/>
+              </a:rPr>
+              <a:t>Half 2 · Weeks 5–8</a:t>
+            </a:r>
+          </a:p>
+        </p:txBody>
+      </p:sp>
+      <p:sp>
+        <p:nvSpPr>
+          <p:cNvPr id="10" name="TextBox 9"/>
+          <p:cNvSpPr txBox="1"/>
+          <p:nvPr/>
+        </p:nvSpPr>
+        <p:spPr>
+          <a:xfrm>
+            <a:off x="6473952" y="2816352"/>
+            <a:ext cx="4608576" cy="1892808"/>
+          </a:xfrm>
+          <a:prstGeom prst="rect">
+            <a:avLst/>
+          </a:prstGeom>
+          <a:noFill/>
+        </p:spPr>
+        <p:txBody>
+          <a:bodyPr wrap="square" anchor="t" lIns="0" rIns="0" tIns="0" bIns="0">
+            <a:spAutoFit/>
+          </a:bodyPr>
+          <a:lstStyle/>
+          <a:p>
+            <a:pPr algn="l">
+              <a:lnSpc>
+                <a:spcPct val="128000"/>
+              </a:lnSpc>
+            </a:pPr>
+            <a:r>
+              <a:rPr sz="1350" b="0" i="0">
+                <a:solidFill>
+                  <a:srgbClr val="5C576E"/>
+                </a:solidFill>
                 <a:latin typeface="Calibri"/>
               </a:rPr>
-              <a:t>Before any other concept in this course makes sense, you need hashing — it's the primitive every other piece (signatures, blocks, chains) is built on top of. Everything from here on assumes you understand what a hash actually is and isn't.</a:t>
-            </a:r>
-          </a:p>
-        </p:txBody>
-      </p:sp>
-      <p:sp>
-        <p:nvSpPr>
-          <p:cNvPr id="6" name="TextBox 5"/>
-          <p:cNvSpPr txBox="1"/>
-          <p:nvPr/>
-        </p:nvSpPr>
-        <p:spPr>
-          <a:xfrm>
-            <a:off x="822960" y="3657600"/>
-            <a:ext cx="9875520" cy="365760"/>
-          </a:xfrm>
-          <a:prstGeom prst="rect">
-            <a:avLst/>
-          </a:prstGeom>
-          <a:noFill/>
-        </p:spPr>
-        <p:txBody>
-          <a:bodyPr wrap="square" anchor="t" lIns="0" rIns="0" tIns="0" bIns="0">
-            <a:spAutoFit/>
-          </a:bodyPr>
-          <a:lstStyle/>
-          <a:p>
-            <a:pPr algn="l">
-              <a:lnSpc>
-                <a:spcPct val="115000"/>
-              </a:lnSpc>
-            </a:pPr>
-            <a:r>
-              <a:rPr sz="1200" b="1" i="0">
-                <a:solidFill>
-                  <a:srgbClr val="C1432B"/>
-                </a:solidFill>
-                <a:latin typeface="Calibri"/>
-              </a:rPr>
-              <a:t>WHAT THIS SECTION COVERS</a:t>
-            </a:r>
-          </a:p>
-        </p:txBody>
-      </p:sp>
-      <p:sp>
-        <p:nvSpPr>
-          <p:cNvPr id="7" name="Rectangle 6"/>
+              <a:t>Advanced Topics. Security, upgradeable contracts, Layer 2s, and the wider ecosystem — what separates a prototype from production.</a:t>
+            </a:r>
+          </a:p>
+        </p:txBody>
+      </p:sp>
+      <p:sp>
+        <p:nvSpPr>
+          <p:cNvPr id="11" name="Rounded Rectangle 10"/>
           <p:cNvSpPr/>
           <p:nvPr/>
         </p:nvSpPr>
         <p:spPr>
           <a:xfrm>
-            <a:off x="822960" y="4197096"/>
-            <a:ext cx="82296" cy="82296"/>
-          </a:xfrm>
-          <a:prstGeom prst="rect">
-            <a:avLst/>
+            <a:off x="822960" y="5074920"/>
+            <a:ext cx="3291840" cy="502920"/>
+          </a:xfrm>
+          <a:prstGeom prst="roundRect">
+            <a:avLst>
+              <a:gd name="adj" fmla="val 50000"/>
+            </a:avLst>
           </a:prstGeom>
           <a:solidFill>
             <a:srgbClr val="C1432B"/>
@@ -7138,14 +8630,14 @@
       </p:sp>
       <p:sp>
         <p:nvSpPr>
-          <p:cNvPr id="8" name="TextBox 7"/>
-          <p:cNvSpPr txBox="1"/>
-          <p:nvPr/>
-        </p:nvSpPr>
-        <p:spPr>
-          <a:xfrm>
-            <a:off x="1051560" y="4114800"/>
-            <a:ext cx="4709160" cy="365760"/>
+          <p:cNvPr id="12" name="TextBox 11"/>
+          <p:cNvSpPr txBox="1"/>
+          <p:nvPr/>
+        </p:nvSpPr>
+        <p:spPr>
+          <a:xfrm>
+            <a:off x="1097280" y="5193792"/>
+            <a:ext cx="2926080" cy="320040"/>
           </a:xfrm>
           <a:prstGeom prst="rect">
             <a:avLst/>
@@ -7164,684 +8656,20 @@
               </a:lnSpc>
             </a:pPr>
             <a:r>
-              <a:rPr sz="1350" b="0" i="0">
-                <a:solidFill>
-                  <a:srgbClr val="1C1730"/>
+              <a:rPr sz="1250" b="1" i="0">
+                <a:solidFill>
+                  <a:srgbClr val="FFFFFF"/>
                 </a:solidFill>
                 <a:latin typeface="Calibri"/>
               </a:rPr>
-              <a:t>Core concept</a:t>
-            </a:r>
-          </a:p>
-        </p:txBody>
-      </p:sp>
-      <p:sp>
-        <p:nvSpPr>
-          <p:cNvPr id="9" name="Rectangle 8"/>
-          <p:cNvSpPr/>
-          <p:nvPr/>
-        </p:nvSpPr>
-        <p:spPr>
-          <a:xfrm>
-            <a:off x="6035040" y="4197096"/>
-            <a:ext cx="82296" cy="82296"/>
-          </a:xfrm>
-          <a:prstGeom prst="rect">
-            <a:avLst/>
-          </a:prstGeom>
-          <a:solidFill>
-            <a:srgbClr val="C1432B"/>
-          </a:solidFill>
-          <a:ln>
-            <a:noFill/>
-          </a:ln>
-          <a:effectLst/>
-        </p:spPr>
-        <p:style>
-          <a:lnRef idx="1">
-            <a:schemeClr val="accent1"/>
-          </a:lnRef>
-          <a:fillRef idx="3">
-            <a:schemeClr val="accent1"/>
-          </a:fillRef>
-          <a:effectRef idx="2">
-            <a:schemeClr val="accent1"/>
-          </a:effectRef>
-          <a:fontRef idx="minor">
-            <a:schemeClr val="lt1"/>
-          </a:fontRef>
-        </p:style>
-        <p:txBody>
-          <a:bodyPr rtlCol="0" anchor="ctr"/>
-          <a:lstStyle/>
-          <a:p>
-            <a:pPr algn="ctr"/>
-          </a:p>
-        </p:txBody>
-      </p:sp>
-      <p:sp>
-        <p:nvSpPr>
-          <p:cNvPr id="10" name="TextBox 9"/>
-          <p:cNvSpPr txBox="1"/>
-          <p:nvPr/>
-        </p:nvSpPr>
-        <p:spPr>
-          <a:xfrm>
-            <a:off x="6263640" y="4114800"/>
-            <a:ext cx="4709160" cy="365760"/>
-          </a:xfrm>
-          <a:prstGeom prst="rect">
-            <a:avLst/>
-          </a:prstGeom>
-          <a:noFill/>
-        </p:spPr>
-        <p:txBody>
-          <a:bodyPr wrap="square" anchor="t" lIns="0" rIns="0" tIns="0" bIns="0">
-            <a:spAutoFit/>
-          </a:bodyPr>
-          <a:lstStyle/>
-          <a:p>
-            <a:pPr algn="l">
-              <a:lnSpc>
-                <a:spcPct val="115000"/>
-              </a:lnSpc>
-            </a:pPr>
-            <a:r>
-              <a:rPr sz="1350" b="0" i="0">
-                <a:solidFill>
-                  <a:srgbClr val="1C1730"/>
-                </a:solidFill>
-                <a:latin typeface="Calibri"/>
-              </a:rPr>
-              <a:t>Four key ideas, one at a time</a:t>
-            </a:r>
-          </a:p>
-        </p:txBody>
-      </p:sp>
-      <p:sp>
-        <p:nvSpPr>
-          <p:cNvPr id="11" name="Rectangle 10"/>
-          <p:cNvSpPr/>
-          <p:nvPr/>
-        </p:nvSpPr>
-        <p:spPr>
-          <a:xfrm>
-            <a:off x="822960" y="4654296"/>
-            <a:ext cx="82296" cy="82296"/>
-          </a:xfrm>
-          <a:prstGeom prst="rect">
-            <a:avLst/>
-          </a:prstGeom>
-          <a:solidFill>
-            <a:srgbClr val="C1432B"/>
-          </a:solidFill>
-          <a:ln>
-            <a:noFill/>
-          </a:ln>
-          <a:effectLst/>
-        </p:spPr>
-        <p:style>
-          <a:lnRef idx="1">
-            <a:schemeClr val="accent1"/>
-          </a:lnRef>
-          <a:fillRef idx="3">
-            <a:schemeClr val="accent1"/>
-          </a:fillRef>
-          <a:effectRef idx="2">
-            <a:schemeClr val="accent1"/>
-          </a:effectRef>
-          <a:fontRef idx="minor">
-            <a:schemeClr val="lt1"/>
-          </a:fontRef>
-        </p:style>
-        <p:txBody>
-          <a:bodyPr rtlCol="0" anchor="ctr"/>
-          <a:lstStyle/>
-          <a:p>
-            <a:pPr algn="ctr"/>
-          </a:p>
-        </p:txBody>
-      </p:sp>
-      <p:sp>
-        <p:nvSpPr>
-          <p:cNvPr id="12" name="TextBox 11"/>
-          <p:cNvSpPr txBox="1"/>
-          <p:nvPr/>
-        </p:nvSpPr>
-        <p:spPr>
-          <a:xfrm>
-            <a:off x="1051560" y="4572000"/>
-            <a:ext cx="4709160" cy="365760"/>
-          </a:xfrm>
-          <a:prstGeom prst="rect">
-            <a:avLst/>
-          </a:prstGeom>
-          <a:noFill/>
-        </p:spPr>
-        <p:txBody>
-          <a:bodyPr wrap="square" anchor="t" lIns="0" rIns="0" tIns="0" bIns="0">
-            <a:spAutoFit/>
-          </a:bodyPr>
-          <a:lstStyle/>
-          <a:p>
-            <a:pPr algn="l">
-              <a:lnSpc>
-                <a:spcPct val="115000"/>
-              </a:lnSpc>
-            </a:pPr>
-            <a:r>
-              <a:rPr sz="1350" b="0" i="0">
-                <a:solidFill>
-                  <a:srgbClr val="1C1730"/>
-                </a:solidFill>
-                <a:latin typeface="Calibri"/>
-              </a:rPr>
-              <a:t>A real, reproducible worked example</a:t>
-            </a:r>
-          </a:p>
-        </p:txBody>
-      </p:sp>
-      <p:sp>
-        <p:nvSpPr>
-          <p:cNvPr id="13" name="Rectangle 12"/>
-          <p:cNvSpPr/>
-          <p:nvPr/>
-        </p:nvSpPr>
-        <p:spPr>
-          <a:xfrm>
-            <a:off x="6035040" y="4654296"/>
-            <a:ext cx="82296" cy="82296"/>
-          </a:xfrm>
-          <a:prstGeom prst="rect">
-            <a:avLst/>
-          </a:prstGeom>
-          <a:solidFill>
-            <a:srgbClr val="C1432B"/>
-          </a:solidFill>
-          <a:ln>
-            <a:noFill/>
-          </a:ln>
-          <a:effectLst/>
-        </p:spPr>
-        <p:style>
-          <a:lnRef idx="1">
-            <a:schemeClr val="accent1"/>
-          </a:lnRef>
-          <a:fillRef idx="3">
-            <a:schemeClr val="accent1"/>
-          </a:fillRef>
-          <a:effectRef idx="2">
-            <a:schemeClr val="accent1"/>
-          </a:effectRef>
-          <a:fontRef idx="minor">
-            <a:schemeClr val="lt1"/>
-          </a:fontRef>
-        </p:style>
-        <p:txBody>
-          <a:bodyPr rtlCol="0" anchor="ctr"/>
-          <a:lstStyle/>
-          <a:p>
-            <a:pPr algn="ctr"/>
-          </a:p>
-        </p:txBody>
-      </p:sp>
-      <p:sp>
-        <p:nvSpPr>
-          <p:cNvPr id="14" name="TextBox 13"/>
-          <p:cNvSpPr txBox="1"/>
-          <p:nvPr/>
-        </p:nvSpPr>
-        <p:spPr>
-          <a:xfrm>
-            <a:off x="6263640" y="4572000"/>
-            <a:ext cx="4709160" cy="365760"/>
-          </a:xfrm>
-          <a:prstGeom prst="rect">
-            <a:avLst/>
-          </a:prstGeom>
-          <a:noFill/>
-        </p:spPr>
-        <p:txBody>
-          <a:bodyPr wrap="square" anchor="t" lIns="0" rIns="0" tIns="0" bIns="0">
-            <a:spAutoFit/>
-          </a:bodyPr>
-          <a:lstStyle/>
-          <a:p>
-            <a:pPr algn="l">
-              <a:lnSpc>
-                <a:spcPct val="115000"/>
-              </a:lnSpc>
-            </a:pPr>
-            <a:r>
-              <a:rPr sz="1350" b="0" i="0">
-                <a:solidFill>
-                  <a:srgbClr val="1C1730"/>
-                </a:solidFill>
-                <a:latin typeface="Calibri"/>
-              </a:rPr>
-              <a:t>Real-world uses beyond blockchain</a:t>
-            </a:r>
-          </a:p>
-        </p:txBody>
-      </p:sp>
-      <p:sp>
-        <p:nvSpPr>
-          <p:cNvPr id="15" name="Rectangle 14"/>
-          <p:cNvSpPr/>
-          <p:nvPr/>
-        </p:nvSpPr>
-        <p:spPr>
-          <a:xfrm>
-            <a:off x="822960" y="5111496"/>
-            <a:ext cx="82296" cy="82296"/>
-          </a:xfrm>
-          <a:prstGeom prst="rect">
-            <a:avLst/>
-          </a:prstGeom>
-          <a:solidFill>
-            <a:srgbClr val="C1432B"/>
-          </a:solidFill>
-          <a:ln>
-            <a:noFill/>
-          </a:ln>
-          <a:effectLst/>
-        </p:spPr>
-        <p:style>
-          <a:lnRef idx="1">
-            <a:schemeClr val="accent1"/>
-          </a:lnRef>
-          <a:fillRef idx="3">
-            <a:schemeClr val="accent1"/>
-          </a:fillRef>
-          <a:effectRef idx="2">
-            <a:schemeClr val="accent1"/>
-          </a:effectRef>
-          <a:fontRef idx="minor">
-            <a:schemeClr val="lt1"/>
-          </a:fontRef>
-        </p:style>
-        <p:txBody>
-          <a:bodyPr rtlCol="0" anchor="ctr"/>
-          <a:lstStyle/>
-          <a:p>
-            <a:pPr algn="ctr"/>
-          </a:p>
-        </p:txBody>
-      </p:sp>
-      <p:sp>
-        <p:nvSpPr>
-          <p:cNvPr id="16" name="TextBox 15"/>
-          <p:cNvSpPr txBox="1"/>
-          <p:nvPr/>
-        </p:nvSpPr>
-        <p:spPr>
-          <a:xfrm>
-            <a:off x="1051560" y="5029200"/>
-            <a:ext cx="4709160" cy="365760"/>
-          </a:xfrm>
-          <a:prstGeom prst="rect">
-            <a:avLst/>
-          </a:prstGeom>
-          <a:noFill/>
-        </p:spPr>
-        <p:txBody>
-          <a:bodyPr wrap="square" anchor="t" lIns="0" rIns="0" tIns="0" bIns="0">
-            <a:spAutoFit/>
-          </a:bodyPr>
-          <a:lstStyle/>
-          <a:p>
-            <a:pPr algn="l">
-              <a:lnSpc>
-                <a:spcPct val="115000"/>
-              </a:lnSpc>
-            </a:pPr>
-            <a:r>
-              <a:rPr sz="1350" b="0" i="0">
-                <a:solidFill>
-                  <a:srgbClr val="1C1730"/>
-                </a:solidFill>
-                <a:latin typeface="Calibri"/>
-              </a:rPr>
-              <a:t>A flagship case study</a:t>
-            </a:r>
-          </a:p>
-        </p:txBody>
-      </p:sp>
-      <p:sp>
-        <p:nvSpPr>
-          <p:cNvPr id="17" name="Rectangle 16"/>
-          <p:cNvSpPr/>
-          <p:nvPr/>
-        </p:nvSpPr>
-        <p:spPr>
-          <a:xfrm>
-            <a:off x="6035040" y="5111496"/>
-            <a:ext cx="82296" cy="82296"/>
-          </a:xfrm>
-          <a:prstGeom prst="rect">
-            <a:avLst/>
-          </a:prstGeom>
-          <a:solidFill>
-            <a:srgbClr val="C1432B"/>
-          </a:solidFill>
-          <a:ln>
-            <a:noFill/>
-          </a:ln>
-          <a:effectLst/>
-        </p:spPr>
-        <p:style>
-          <a:lnRef idx="1">
-            <a:schemeClr val="accent1"/>
-          </a:lnRef>
-          <a:fillRef idx="3">
-            <a:schemeClr val="accent1"/>
-          </a:fillRef>
-          <a:effectRef idx="2">
-            <a:schemeClr val="accent1"/>
-          </a:effectRef>
-          <a:fontRef idx="minor">
-            <a:schemeClr val="lt1"/>
-          </a:fontRef>
-        </p:style>
-        <p:txBody>
-          <a:bodyPr rtlCol="0" anchor="ctr"/>
-          <a:lstStyle/>
-          <a:p>
-            <a:pPr algn="ctr"/>
-          </a:p>
-        </p:txBody>
-      </p:sp>
-      <p:sp>
-        <p:nvSpPr>
-          <p:cNvPr id="18" name="TextBox 17"/>
-          <p:cNvSpPr txBox="1"/>
-          <p:nvPr/>
-        </p:nvSpPr>
-        <p:spPr>
-          <a:xfrm>
-            <a:off x="6263640" y="5029200"/>
-            <a:ext cx="4709160" cy="365760"/>
-          </a:xfrm>
-          <a:prstGeom prst="rect">
-            <a:avLst/>
-          </a:prstGeom>
-          <a:noFill/>
-        </p:spPr>
-        <p:txBody>
-          <a:bodyPr wrap="square" anchor="t" lIns="0" rIns="0" tIns="0" bIns="0">
-            <a:spAutoFit/>
-          </a:bodyPr>
-          <a:lstStyle/>
-          <a:p>
-            <a:pPr algn="l">
-              <a:lnSpc>
-                <a:spcPct val="115000"/>
-              </a:lnSpc>
-            </a:pPr>
-            <a:r>
-              <a:rPr sz="1350" b="0" i="0">
-                <a:solidFill>
-                  <a:srgbClr val="1C1730"/>
-                </a:solidFill>
-                <a:latin typeface="Calibri"/>
-              </a:rPr>
-              <a:t>A real-life analogy</a:t>
-            </a:r>
-          </a:p>
-        </p:txBody>
-      </p:sp>
-      <p:sp>
-        <p:nvSpPr>
-          <p:cNvPr id="19" name="Rectangle 18"/>
-          <p:cNvSpPr/>
-          <p:nvPr/>
-        </p:nvSpPr>
-        <p:spPr>
-          <a:xfrm>
-            <a:off x="822960" y="5568696"/>
-            <a:ext cx="82296" cy="82296"/>
-          </a:xfrm>
-          <a:prstGeom prst="rect">
-            <a:avLst/>
-          </a:prstGeom>
-          <a:solidFill>
-            <a:srgbClr val="C1432B"/>
-          </a:solidFill>
-          <a:ln>
-            <a:noFill/>
-          </a:ln>
-          <a:effectLst/>
-        </p:spPr>
-        <p:style>
-          <a:lnRef idx="1">
-            <a:schemeClr val="accent1"/>
-          </a:lnRef>
-          <a:fillRef idx="3">
-            <a:schemeClr val="accent1"/>
-          </a:fillRef>
-          <a:effectRef idx="2">
-            <a:schemeClr val="accent1"/>
-          </a:effectRef>
-          <a:fontRef idx="minor">
-            <a:schemeClr val="lt1"/>
-          </a:fontRef>
-        </p:style>
-        <p:txBody>
-          <a:bodyPr rtlCol="0" anchor="ctr"/>
-          <a:lstStyle/>
-          <a:p>
-            <a:pPr algn="ctr"/>
-          </a:p>
-        </p:txBody>
-      </p:sp>
-      <p:sp>
-        <p:nvSpPr>
-          <p:cNvPr id="20" name="TextBox 19"/>
-          <p:cNvSpPr txBox="1"/>
-          <p:nvPr/>
-        </p:nvSpPr>
-        <p:spPr>
-          <a:xfrm>
-            <a:off x="1051560" y="5486400"/>
-            <a:ext cx="4709160" cy="365760"/>
-          </a:xfrm>
-          <a:prstGeom prst="rect">
-            <a:avLst/>
-          </a:prstGeom>
-          <a:noFill/>
-        </p:spPr>
-        <p:txBody>
-          <a:bodyPr wrap="square" anchor="t" lIns="0" rIns="0" tIns="0" bIns="0">
-            <a:spAutoFit/>
-          </a:bodyPr>
-          <a:lstStyle/>
-          <a:p>
-            <a:pPr algn="l">
-              <a:lnSpc>
-                <a:spcPct val="115000"/>
-              </a:lnSpc>
-            </a:pPr>
-            <a:r>
-              <a:rPr sz="1350" b="0" i="0">
-                <a:solidFill>
-                  <a:srgbClr val="1C1730"/>
-                </a:solidFill>
-                <a:latin typeface="Calibri"/>
-              </a:rPr>
-              <a:t>Common misconceptions</a:t>
-            </a:r>
-          </a:p>
-        </p:txBody>
-      </p:sp>
-      <p:sp>
-        <p:nvSpPr>
-          <p:cNvPr id="21" name="Rectangle 20"/>
-          <p:cNvSpPr/>
-          <p:nvPr/>
-        </p:nvSpPr>
-        <p:spPr>
-          <a:xfrm>
-            <a:off x="6035040" y="5568696"/>
-            <a:ext cx="82296" cy="82296"/>
-          </a:xfrm>
-          <a:prstGeom prst="rect">
-            <a:avLst/>
-          </a:prstGeom>
-          <a:solidFill>
-            <a:srgbClr val="C1432B"/>
-          </a:solidFill>
-          <a:ln>
-            <a:noFill/>
-          </a:ln>
-          <a:effectLst/>
-        </p:spPr>
-        <p:style>
-          <a:lnRef idx="1">
-            <a:schemeClr val="accent1"/>
-          </a:lnRef>
-          <a:fillRef idx="3">
-            <a:schemeClr val="accent1"/>
-          </a:fillRef>
-          <a:effectRef idx="2">
-            <a:schemeClr val="accent1"/>
-          </a:effectRef>
-          <a:fontRef idx="minor">
-            <a:schemeClr val="lt1"/>
-          </a:fontRef>
-        </p:style>
-        <p:txBody>
-          <a:bodyPr rtlCol="0" anchor="ctr"/>
-          <a:lstStyle/>
-          <a:p>
-            <a:pPr algn="ctr"/>
-          </a:p>
-        </p:txBody>
-      </p:sp>
-      <p:sp>
-        <p:nvSpPr>
-          <p:cNvPr id="22" name="TextBox 21"/>
-          <p:cNvSpPr txBox="1"/>
-          <p:nvPr/>
-        </p:nvSpPr>
-        <p:spPr>
-          <a:xfrm>
-            <a:off x="6263640" y="5486400"/>
-            <a:ext cx="4709160" cy="365760"/>
-          </a:xfrm>
-          <a:prstGeom prst="rect">
-            <a:avLst/>
-          </a:prstGeom>
-          <a:noFill/>
-        </p:spPr>
-        <p:txBody>
-          <a:bodyPr wrap="square" anchor="t" lIns="0" rIns="0" tIns="0" bIns="0">
-            <a:spAutoFit/>
-          </a:bodyPr>
-          <a:lstStyle/>
-          <a:p>
-            <a:pPr algn="l">
-              <a:lnSpc>
-                <a:spcPct val="115000"/>
-              </a:lnSpc>
-            </a:pPr>
-            <a:r>
-              <a:rPr sz="1350" b="0" i="0">
-                <a:solidFill>
-                  <a:srgbClr val="1C1730"/>
-                </a:solidFill>
-                <a:latin typeface="Calibri"/>
-              </a:rPr>
-              <a:t>Hands-on practice</a:t>
-            </a:r>
-          </a:p>
-        </p:txBody>
-      </p:sp>
-      <p:sp>
-        <p:nvSpPr>
-          <p:cNvPr id="23" name="Rectangle 22"/>
-          <p:cNvSpPr/>
-          <p:nvPr/>
-        </p:nvSpPr>
-        <p:spPr>
-          <a:xfrm>
-            <a:off x="822960" y="6025896"/>
-            <a:ext cx="82296" cy="82296"/>
-          </a:xfrm>
-          <a:prstGeom prst="rect">
-            <a:avLst/>
-          </a:prstGeom>
-          <a:solidFill>
-            <a:srgbClr val="C1432B"/>
-          </a:solidFill>
-          <a:ln>
-            <a:noFill/>
-          </a:ln>
-          <a:effectLst/>
-        </p:spPr>
-        <p:style>
-          <a:lnRef idx="1">
-            <a:schemeClr val="accent1"/>
-          </a:lnRef>
-          <a:fillRef idx="3">
-            <a:schemeClr val="accent1"/>
-          </a:fillRef>
-          <a:effectRef idx="2">
-            <a:schemeClr val="accent1"/>
-          </a:effectRef>
-          <a:fontRef idx="minor">
-            <a:schemeClr val="lt1"/>
-          </a:fontRef>
-        </p:style>
-        <p:txBody>
-          <a:bodyPr rtlCol="0" anchor="ctr"/>
-          <a:lstStyle/>
-          <a:p>
-            <a:pPr algn="ctr"/>
-          </a:p>
-        </p:txBody>
-      </p:sp>
-      <p:sp>
-        <p:nvSpPr>
-          <p:cNvPr id="24" name="TextBox 23"/>
-          <p:cNvSpPr txBox="1"/>
-          <p:nvPr/>
-        </p:nvSpPr>
-        <p:spPr>
-          <a:xfrm>
-            <a:off x="1051560" y="5943600"/>
-            <a:ext cx="4709160" cy="365760"/>
-          </a:xfrm>
-          <a:prstGeom prst="rect">
-            <a:avLst/>
-          </a:prstGeom>
-          <a:noFill/>
-        </p:spPr>
-        <p:txBody>
-          <a:bodyPr wrap="square" anchor="t" lIns="0" rIns="0" tIns="0" bIns="0">
-            <a:spAutoFit/>
-          </a:bodyPr>
-          <a:lstStyle/>
-          <a:p>
-            <a:pPr algn="l">
-              <a:lnSpc>
-                <a:spcPct val="115000"/>
-              </a:lnSpc>
-            </a:pPr>
-            <a:r>
-              <a:rPr sz="1350" b="0" i="0">
-                <a:solidFill>
-                  <a:srgbClr val="1C1730"/>
-                </a:solidFill>
-                <a:latin typeface="Calibri"/>
-              </a:rPr>
-              <a:t>Take-home assignment</a:t>
-            </a:r>
-          </a:p>
-        </p:txBody>
-      </p:sp>
-      <p:sp>
-        <p:nvSpPr>
-          <p:cNvPr id="25" name="TextBox 24"/>
+              <a:t>◉  YOU ARE HERE — WEEK 01</a:t>
+            </a:r>
+          </a:p>
+        </p:txBody>
+      </p:sp>
+      <p:sp>
+        <p:nvSpPr>
+          <p:cNvPr id="13" name="TextBox 12"/>
           <p:cNvSpPr txBox="1"/>
           <p:nvPr/>
         </p:nvSpPr>
@@ -7873,7 +8701,7 @@
                 </a:solidFill>
                 <a:latin typeface="Consolas"/>
               </a:rPr>
-              <a:t>02 / 15</a:t>
+              <a:t>02 / 18</a:t>
             </a:r>
           </a:p>
         </p:txBody>
@@ -7911,7 +8739,7 @@
             <a:avLst/>
           </a:prstGeom>
           <a:solidFill>
-            <a:srgbClr val="F8F6F2"/>
+            <a:srgbClr val="1C1730"/>
           </a:solidFill>
           <a:ln>
             <a:noFill/>
@@ -7948,7 +8776,7 @@
         </p:nvSpPr>
         <p:spPr>
           <a:xfrm>
-            <a:off x="822960" y="640080"/>
+            <a:off x="822960" y="731520"/>
             <a:ext cx="10058400" cy="365760"/>
           </a:xfrm>
           <a:prstGeom prst="rect">
@@ -7970,11 +8798,11 @@
             <a:r>
               <a:rPr sz="1300" b="1" i="0">
                 <a:solidFill>
-                  <a:srgbClr val="C1432B"/>
+                  <a:srgbClr val="FFC53D"/>
                 </a:solidFill>
                 <a:latin typeface="Calibri"/>
               </a:rPr>
-              <a:t>TOPIC 01 — HASHING</a:t>
+              <a:t>GROUND RULES</a:t>
             </a:r>
           </a:p>
         </p:txBody>
@@ -7987,7 +8815,7 @@
         </p:nvSpPr>
         <p:spPr>
           <a:xfrm>
-            <a:off x="822960" y="1097280"/>
+            <a:off x="822960" y="1188720"/>
             <a:ext cx="9601200" cy="1005840"/>
           </a:xfrm>
           <a:prstGeom prst="rect">
@@ -8009,102 +8837,90 @@
             <a:r>
               <a:rPr sz="3400" b="1" i="0">
                 <a:solidFill>
-                  <a:srgbClr val="1C1730"/>
+                  <a:srgbClr val="FFFFFF"/>
                 </a:solidFill>
                 <a:latin typeface="Century Gothic"/>
               </a:rPr>
-              <a:t>The Core Concept</a:t>
-            </a:r>
-          </a:p>
-        </p:txBody>
-      </p:sp>
-      <p:sp>
-        <p:nvSpPr>
-          <p:cNvPr id="5" name="Rounded Rectangle 4"/>
-          <p:cNvSpPr/>
+              <a:t>Before You Begin</a:t>
+            </a:r>
+          </a:p>
+        </p:txBody>
+      </p:sp>
+      <p:sp>
+        <p:nvSpPr>
+          <p:cNvPr id="5" name="TextBox 4"/>
+          <p:cNvSpPr txBox="1"/>
           <p:nvPr/>
         </p:nvSpPr>
         <p:spPr>
           <a:xfrm>
             <a:off x="822960" y="2286000"/>
-            <a:ext cx="10515600" cy="3291840"/>
-          </a:xfrm>
-          <a:prstGeom prst="roundRect">
-            <a:avLst>
-              <a:gd name="adj" fmla="val 4000"/>
-            </a:avLst>
-          </a:prstGeom>
-          <a:solidFill>
-            <a:srgbClr val="FFFFFF"/>
-          </a:solidFill>
-          <a:ln>
-            <a:noFill/>
-          </a:ln>
-          <a:effectLst/>
-        </p:spPr>
-        <p:style>
-          <a:lnRef idx="1">
-            <a:schemeClr val="accent1"/>
-          </a:lnRef>
-          <a:fillRef idx="3">
-            <a:schemeClr val="accent1"/>
-          </a:fillRef>
-          <a:effectRef idx="2">
-            <a:schemeClr val="accent1"/>
-          </a:effectRef>
-          <a:fontRef idx="minor">
-            <a:schemeClr val="lt1"/>
-          </a:fontRef>
-        </p:style>
-        <p:txBody>
-          <a:bodyPr rtlCol="0" anchor="ctr"/>
-          <a:lstStyle/>
-          <a:p>
-            <a:pPr algn="ctr"/>
-          </a:p>
-        </p:txBody>
-      </p:sp>
-      <p:sp>
-        <p:nvSpPr>
-          <p:cNvPr id="6" name="Rectangle 5"/>
-          <p:cNvSpPr/>
-          <p:nvPr/>
-        </p:nvSpPr>
-        <p:spPr>
-          <a:xfrm>
-            <a:off x="822960" y="2286000"/>
-            <a:ext cx="91440" cy="3291840"/>
-          </a:xfrm>
-          <a:prstGeom prst="rect">
-            <a:avLst/>
-          </a:prstGeom>
-          <a:solidFill>
-            <a:srgbClr val="C1432B"/>
-          </a:solidFill>
-          <a:ln>
-            <a:noFill/>
-          </a:ln>
-          <a:effectLst/>
-        </p:spPr>
-        <p:style>
-          <a:lnRef idx="1">
-            <a:schemeClr val="accent1"/>
-          </a:lnRef>
-          <a:fillRef idx="3">
-            <a:schemeClr val="accent1"/>
-          </a:fillRef>
-          <a:effectRef idx="2">
-            <a:schemeClr val="accent1"/>
-          </a:effectRef>
-          <a:fontRef idx="minor">
-            <a:schemeClr val="lt1"/>
-          </a:fontRef>
-        </p:style>
-        <p:txBody>
-          <a:bodyPr rtlCol="0" anchor="ctr"/>
-          <a:lstStyle/>
-          <a:p>
-            <a:pPr algn="ctr"/>
+            <a:ext cx="548640" cy="457200"/>
+          </a:xfrm>
+          <a:prstGeom prst="rect">
+            <a:avLst/>
+          </a:prstGeom>
+          <a:noFill/>
+        </p:spPr>
+        <p:txBody>
+          <a:bodyPr wrap="square" anchor="t" lIns="0" rIns="0" tIns="0" bIns="0">
+            <a:spAutoFit/>
+          </a:bodyPr>
+          <a:lstStyle/>
+          <a:p>
+            <a:pPr algn="l">
+              <a:lnSpc>
+                <a:spcPct val="115000"/>
+              </a:lnSpc>
+            </a:pPr>
+            <a:r>
+              <a:rPr sz="1800" b="1" i="0">
+                <a:solidFill>
+                  <a:srgbClr val="FFC53D"/>
+                </a:solidFill>
+                <a:latin typeface="Century Gothic"/>
+              </a:rPr>
+              <a:t>01</a:t>
+            </a:r>
+          </a:p>
+        </p:txBody>
+      </p:sp>
+      <p:sp>
+        <p:nvSpPr>
+          <p:cNvPr id="6" name="TextBox 5"/>
+          <p:cNvSpPr txBox="1"/>
+          <p:nvPr/>
+        </p:nvSpPr>
+        <p:spPr>
+          <a:xfrm>
+            <a:off x="1463040" y="2313432"/>
+            <a:ext cx="9326880" cy="548640"/>
+          </a:xfrm>
+          <a:prstGeom prst="rect">
+            <a:avLst/>
+          </a:prstGeom>
+          <a:noFill/>
+        </p:spPr>
+        <p:txBody>
+          <a:bodyPr wrap="square" anchor="t" lIns="0" rIns="0" tIns="0" bIns="0">
+            <a:spAutoFit/>
+          </a:bodyPr>
+          <a:lstStyle/>
+          <a:p>
+            <a:pPr algn="l">
+              <a:lnSpc>
+                <a:spcPct val="130000"/>
+              </a:lnSpc>
+            </a:pPr>
+            <a:r>
+              <a:rPr sz="1450" b="0" i="0">
+                <a:solidFill>
+                  <a:srgbClr val="E9E6F2"/>
+                </a:solidFill>
+                <a:latin typeface="Calibri"/>
+              </a:rPr>
+              <a:t>Understand before you copy — if you can't explain a line of code, don't ship it.</a:t>
+            </a:r>
           </a:p>
         </p:txBody>
       </p:sp>
@@ -8116,8 +8932,8 @@
         </p:nvSpPr>
         <p:spPr>
           <a:xfrm>
-            <a:off x="1280160" y="2697480"/>
-            <a:ext cx="9601200" cy="2560320"/>
+            <a:off x="822960" y="2999232"/>
+            <a:ext cx="548640" cy="457200"/>
           </a:xfrm>
           <a:prstGeom prst="rect">
             <a:avLst/>
@@ -8132,24 +8948,297 @@
           <a:p>
             <a:pPr algn="l">
               <a:lnSpc>
-                <a:spcPct val="155000"/>
-              </a:lnSpc>
-            </a:pPr>
-            <a:r>
-              <a:rPr sz="2000" b="0" i="0">
-                <a:solidFill>
-                  <a:srgbClr val="1C1730"/>
+                <a:spcPct val="115000"/>
+              </a:lnSpc>
+            </a:pPr>
+            <a:r>
+              <a:rPr sz="1800" b="1" i="0">
+                <a:solidFill>
+                  <a:srgbClr val="FFC53D"/>
+                </a:solidFill>
+                <a:latin typeface="Century Gothic"/>
+              </a:rPr>
+              <a:t>02</a:t>
+            </a:r>
+          </a:p>
+        </p:txBody>
+      </p:sp>
+      <p:sp>
+        <p:nvSpPr>
+          <p:cNvPr id="8" name="TextBox 7"/>
+          <p:cNvSpPr txBox="1"/>
+          <p:nvPr/>
+        </p:nvSpPr>
+        <p:spPr>
+          <a:xfrm>
+            <a:off x="1463040" y="3026664"/>
+            <a:ext cx="9326880" cy="548640"/>
+          </a:xfrm>
+          <a:prstGeom prst="rect">
+            <a:avLst/>
+          </a:prstGeom>
+          <a:noFill/>
+        </p:spPr>
+        <p:txBody>
+          <a:bodyPr wrap="square" anchor="t" lIns="0" rIns="0" tIns="0" bIns="0">
+            <a:spAutoFit/>
+          </a:bodyPr>
+          <a:lstStyle/>
+          <a:p>
+            <a:pPr algn="l">
+              <a:lnSpc>
+                <a:spcPct val="130000"/>
+              </a:lnSpc>
+            </a:pPr>
+            <a:r>
+              <a:rPr sz="1450" b="0" i="0">
+                <a:solidFill>
+                  <a:srgbClr val="E9E6F2"/>
                 </a:solidFill>
                 <a:latin typeface="Calibri"/>
               </a:rPr>
-              <a:t>A hash function takes any input — a letter, a word, a gigabyte of data — and turns it into a fixed-length string of characters called a hash. For blockchain, that function is SHA-256 (Bitcoin) or Keccak-256 (Ethereum). Same input, same output, every time — but there's no way back.</a:t>
-            </a:r>
-          </a:p>
-        </p:txBody>
-      </p:sp>
-      <p:sp>
-        <p:nvSpPr>
-          <p:cNvPr id="8" name="TextBox 7"/>
+              <a:t>Testnet first, always — never deploy something you haven't tested locally and on a testnet.</a:t>
+            </a:r>
+          </a:p>
+        </p:txBody>
+      </p:sp>
+      <p:sp>
+        <p:nvSpPr>
+          <p:cNvPr id="9" name="TextBox 8"/>
+          <p:cNvSpPr txBox="1"/>
+          <p:nvPr/>
+        </p:nvSpPr>
+        <p:spPr>
+          <a:xfrm>
+            <a:off x="822960" y="3712464"/>
+            <a:ext cx="548640" cy="457200"/>
+          </a:xfrm>
+          <a:prstGeom prst="rect">
+            <a:avLst/>
+          </a:prstGeom>
+          <a:noFill/>
+        </p:spPr>
+        <p:txBody>
+          <a:bodyPr wrap="square" anchor="t" lIns="0" rIns="0" tIns="0" bIns="0">
+            <a:spAutoFit/>
+          </a:bodyPr>
+          <a:lstStyle/>
+          <a:p>
+            <a:pPr algn="l">
+              <a:lnSpc>
+                <a:spcPct val="115000"/>
+              </a:lnSpc>
+            </a:pPr>
+            <a:r>
+              <a:rPr sz="1800" b="1" i="0">
+                <a:solidFill>
+                  <a:srgbClr val="FFC53D"/>
+                </a:solidFill>
+                <a:latin typeface="Century Gothic"/>
+              </a:rPr>
+              <a:t>03</a:t>
+            </a:r>
+          </a:p>
+        </p:txBody>
+      </p:sp>
+      <p:sp>
+        <p:nvSpPr>
+          <p:cNvPr id="10" name="TextBox 9"/>
+          <p:cNvSpPr txBox="1"/>
+          <p:nvPr/>
+        </p:nvSpPr>
+        <p:spPr>
+          <a:xfrm>
+            <a:off x="1463040" y="3739896"/>
+            <a:ext cx="9326880" cy="548640"/>
+          </a:xfrm>
+          <a:prstGeom prst="rect">
+            <a:avLst/>
+          </a:prstGeom>
+          <a:noFill/>
+        </p:spPr>
+        <p:txBody>
+          <a:bodyPr wrap="square" anchor="t" lIns="0" rIns="0" tIns="0" bIns="0">
+            <a:spAutoFit/>
+          </a:bodyPr>
+          <a:lstStyle/>
+          <a:p>
+            <a:pPr algn="l">
+              <a:lnSpc>
+                <a:spcPct val="130000"/>
+              </a:lnSpc>
+            </a:pPr>
+            <a:r>
+              <a:rPr sz="1450" b="0" i="0">
+                <a:solidFill>
+                  <a:srgbClr val="E9E6F2"/>
+                </a:solidFill>
+                <a:latin typeface="Calibri"/>
+              </a:rPr>
+              <a:t>No frontend before your contract works from the command line.</a:t>
+            </a:r>
+          </a:p>
+        </p:txBody>
+      </p:sp>
+      <p:sp>
+        <p:nvSpPr>
+          <p:cNvPr id="11" name="TextBox 10"/>
+          <p:cNvSpPr txBox="1"/>
+          <p:nvPr/>
+        </p:nvSpPr>
+        <p:spPr>
+          <a:xfrm>
+            <a:off x="822960" y="4425696"/>
+            <a:ext cx="548640" cy="457200"/>
+          </a:xfrm>
+          <a:prstGeom prst="rect">
+            <a:avLst/>
+          </a:prstGeom>
+          <a:noFill/>
+        </p:spPr>
+        <p:txBody>
+          <a:bodyPr wrap="square" anchor="t" lIns="0" rIns="0" tIns="0" bIns="0">
+            <a:spAutoFit/>
+          </a:bodyPr>
+          <a:lstStyle/>
+          <a:p>
+            <a:pPr algn="l">
+              <a:lnSpc>
+                <a:spcPct val="115000"/>
+              </a:lnSpc>
+            </a:pPr>
+            <a:r>
+              <a:rPr sz="1800" b="1" i="0">
+                <a:solidFill>
+                  <a:srgbClr val="FFC53D"/>
+                </a:solidFill>
+                <a:latin typeface="Century Gothic"/>
+              </a:rPr>
+              <a:t>04</a:t>
+            </a:r>
+          </a:p>
+        </p:txBody>
+      </p:sp>
+      <p:sp>
+        <p:nvSpPr>
+          <p:cNvPr id="12" name="TextBox 11"/>
+          <p:cNvSpPr txBox="1"/>
+          <p:nvPr/>
+        </p:nvSpPr>
+        <p:spPr>
+          <a:xfrm>
+            <a:off x="1463040" y="4453128"/>
+            <a:ext cx="9326880" cy="548640"/>
+          </a:xfrm>
+          <a:prstGeom prst="rect">
+            <a:avLst/>
+          </a:prstGeom>
+          <a:noFill/>
+        </p:spPr>
+        <p:txBody>
+          <a:bodyPr wrap="square" anchor="t" lIns="0" rIns="0" tIns="0" bIns="0">
+            <a:spAutoFit/>
+          </a:bodyPr>
+          <a:lstStyle/>
+          <a:p>
+            <a:pPr algn="l">
+              <a:lnSpc>
+                <a:spcPct val="130000"/>
+              </a:lnSpc>
+            </a:pPr>
+            <a:r>
+              <a:rPr sz="1450" b="0" i="0">
+                <a:solidFill>
+                  <a:srgbClr val="E9E6F2"/>
+                </a:solidFill>
+                <a:latin typeface="Calibri"/>
+              </a:rPr>
+              <a:t>Every contract gets at least a basic test — an untested contract is unfinished.</a:t>
+            </a:r>
+          </a:p>
+        </p:txBody>
+      </p:sp>
+      <p:sp>
+        <p:nvSpPr>
+          <p:cNvPr id="13" name="TextBox 12"/>
+          <p:cNvSpPr txBox="1"/>
+          <p:nvPr/>
+        </p:nvSpPr>
+        <p:spPr>
+          <a:xfrm>
+            <a:off x="822960" y="5138928"/>
+            <a:ext cx="548640" cy="457200"/>
+          </a:xfrm>
+          <a:prstGeom prst="rect">
+            <a:avLst/>
+          </a:prstGeom>
+          <a:noFill/>
+        </p:spPr>
+        <p:txBody>
+          <a:bodyPr wrap="square" anchor="t" lIns="0" rIns="0" tIns="0" bIns="0">
+            <a:spAutoFit/>
+          </a:bodyPr>
+          <a:lstStyle/>
+          <a:p>
+            <a:pPr algn="l">
+              <a:lnSpc>
+                <a:spcPct val="115000"/>
+              </a:lnSpc>
+            </a:pPr>
+            <a:r>
+              <a:rPr sz="1800" b="1" i="0">
+                <a:solidFill>
+                  <a:srgbClr val="FFC53D"/>
+                </a:solidFill>
+                <a:latin typeface="Century Gothic"/>
+              </a:rPr>
+              <a:t>05</a:t>
+            </a:r>
+          </a:p>
+        </p:txBody>
+      </p:sp>
+      <p:sp>
+        <p:nvSpPr>
+          <p:cNvPr id="14" name="TextBox 13"/>
+          <p:cNvSpPr txBox="1"/>
+          <p:nvPr/>
+        </p:nvSpPr>
+        <p:spPr>
+          <a:xfrm>
+            <a:off x="1463040" y="5166360"/>
+            <a:ext cx="9326880" cy="548640"/>
+          </a:xfrm>
+          <a:prstGeom prst="rect">
+            <a:avLst/>
+          </a:prstGeom>
+          <a:noFill/>
+        </p:spPr>
+        <p:txBody>
+          <a:bodyPr wrap="square" anchor="t" lIns="0" rIns="0" tIns="0" bIns="0">
+            <a:spAutoFit/>
+          </a:bodyPr>
+          <a:lstStyle/>
+          <a:p>
+            <a:pPr algn="l">
+              <a:lnSpc>
+                <a:spcPct val="130000"/>
+              </a:lnSpc>
+            </a:pPr>
+            <a:r>
+              <a:rPr sz="1450" b="0" i="0">
+                <a:solidFill>
+                  <a:srgbClr val="E9E6F2"/>
+                </a:solidFill>
+                <a:latin typeface="Calibri"/>
+              </a:rPr>
+              <a:t>Treat every external call as a potential attack.</a:t>
+            </a:r>
+          </a:p>
+        </p:txBody>
+      </p:sp>
+      <p:sp>
+        <p:nvSpPr>
+          <p:cNvPr id="15" name="TextBox 14"/>
           <p:cNvSpPr txBox="1"/>
           <p:nvPr/>
         </p:nvSpPr>
@@ -8181,7 +9270,7 @@
                 </a:solidFill>
                 <a:latin typeface="Consolas"/>
               </a:rPr>
-              <a:t>03 / 15</a:t>
+              <a:t>03 / 18</a:t>
             </a:r>
           </a:p>
         </p:txBody>
@@ -8219,7 +9308,7 @@
             <a:avLst/>
           </a:prstGeom>
           <a:solidFill>
-            <a:srgbClr val="F8F6F2"/>
+            <a:srgbClr val="1C1730"/>
           </a:solidFill>
           <a:ln>
             <a:noFill/>
@@ -8248,180 +9337,48 @@
           </a:p>
         </p:txBody>
       </p:sp>
-      <p:sp>
-        <p:nvSpPr>
-          <p:cNvPr id="3" name="TextBox 2"/>
-          <p:cNvSpPr txBox="1"/>
-          <p:nvPr/>
-        </p:nvSpPr>
-        <p:spPr>
-          <a:xfrm>
-            <a:off x="822960" y="640080"/>
-            <a:ext cx="10058400" cy="365760"/>
-          </a:xfrm>
-          <a:prstGeom prst="rect">
-            <a:avLst/>
-          </a:prstGeom>
-          <a:noFill/>
-        </p:spPr>
-        <p:txBody>
-          <a:bodyPr wrap="square" anchor="t" lIns="0" rIns="0" tIns="0" bIns="0">
-            <a:spAutoFit/>
-          </a:bodyPr>
-          <a:lstStyle/>
-          <a:p>
-            <a:pPr algn="l">
-              <a:lnSpc>
-                <a:spcPct val="115000"/>
-              </a:lnSpc>
-            </a:pPr>
-            <a:r>
-              <a:rPr sz="1300" b="1" i="0">
-                <a:solidFill>
-                  <a:srgbClr val="C1432B"/>
-                </a:solidFill>
-                <a:latin typeface="Calibri"/>
-              </a:rPr>
-              <a:t>TOPIC 01 — HASHING</a:t>
-            </a:r>
-          </a:p>
-        </p:txBody>
-      </p:sp>
-      <p:sp>
-        <p:nvSpPr>
-          <p:cNvPr id="4" name="TextBox 3"/>
-          <p:cNvSpPr txBox="1"/>
-          <p:nvPr/>
-        </p:nvSpPr>
-        <p:spPr>
-          <a:xfrm>
-            <a:off x="8503920" y="640080"/>
-            <a:ext cx="2834640" cy="365760"/>
-          </a:xfrm>
-          <a:prstGeom prst="rect">
-            <a:avLst/>
-          </a:prstGeom>
-          <a:noFill/>
-        </p:spPr>
-        <p:txBody>
-          <a:bodyPr wrap="square" anchor="t" lIns="0" rIns="0" tIns="0" bIns="0">
-            <a:spAutoFit/>
-          </a:bodyPr>
-          <a:lstStyle/>
-          <a:p>
-            <a:pPr algn="r">
-              <a:lnSpc>
-                <a:spcPct val="115000"/>
-              </a:lnSpc>
-            </a:pPr>
-            <a:r>
-              <a:rPr sz="1200" b="1" i="0">
-                <a:solidFill>
-                  <a:srgbClr val="5C576E"/>
-                </a:solidFill>
-                <a:latin typeface="Calibri"/>
-              </a:rPr>
-              <a:t>KEY IDEA 1 / 4</a:t>
-            </a:r>
-          </a:p>
-        </p:txBody>
-      </p:sp>
-      <p:sp>
-        <p:nvSpPr>
-          <p:cNvPr id="5" name="TextBox 4"/>
-          <p:cNvSpPr txBox="1"/>
-          <p:nvPr/>
-        </p:nvSpPr>
-        <p:spPr>
-          <a:xfrm>
-            <a:off x="822960" y="1097280"/>
-            <a:ext cx="9601200" cy="1005840"/>
-          </a:xfrm>
-          <a:prstGeom prst="rect">
-            <a:avLst/>
-          </a:prstGeom>
-          <a:noFill/>
-        </p:spPr>
-        <p:txBody>
-          <a:bodyPr wrap="square" anchor="t" lIns="0" rIns="0" tIns="0" bIns="0">
-            <a:spAutoFit/>
-          </a:bodyPr>
-          <a:lstStyle/>
-          <a:p>
-            <a:pPr algn="l">
-              <a:lnSpc>
-                <a:spcPct val="105000"/>
-              </a:lnSpc>
-            </a:pPr>
-            <a:r>
-              <a:rPr sz="3200" b="1" i="0">
-                <a:solidFill>
-                  <a:srgbClr val="1C1730"/>
-                </a:solidFill>
-                <a:latin typeface="Century Gothic"/>
-              </a:rPr>
-              <a:t>Deterministic</a:t>
-            </a:r>
-          </a:p>
-        </p:txBody>
-      </p:sp>
-      <p:sp>
-        <p:nvSpPr>
-          <p:cNvPr id="6" name="TextBox 5"/>
-          <p:cNvSpPr txBox="1"/>
-          <p:nvPr/>
-        </p:nvSpPr>
-        <p:spPr>
-          <a:xfrm>
-            <a:off x="822960" y="2148840"/>
-            <a:ext cx="9875520" cy="2011680"/>
-          </a:xfrm>
-          <a:prstGeom prst="rect">
-            <a:avLst/>
-          </a:prstGeom>
-          <a:noFill/>
-        </p:spPr>
-        <p:txBody>
-          <a:bodyPr wrap="square" anchor="t" lIns="0" rIns="0" tIns="0" bIns="0">
-            <a:spAutoFit/>
-          </a:bodyPr>
-          <a:lstStyle/>
-          <a:p>
-            <a:pPr algn="l">
-              <a:lnSpc>
-                <a:spcPct val="150000"/>
-              </a:lnSpc>
-            </a:pPr>
-            <a:r>
-              <a:rPr sz="1650" b="0" i="0">
-                <a:solidFill>
-                  <a:srgbClr val="1C1730"/>
-                </a:solidFill>
-                <a:latin typeface="Calibri"/>
-              </a:rPr>
-              <a:t>The same input always produces the exact same output. Hash the word “hello” today, tomorrow, or on a different continent — identical result, every time. There's no randomness involved anywhere in the process.</a:t>
-            </a:r>
-          </a:p>
-        </p:txBody>
-      </p:sp>
-      <p:sp>
-        <p:nvSpPr>
-          <p:cNvPr id="7" name="Rounded Rectangle 6"/>
+      <p:pic>
+        <p:nvPicPr>
+          <p:cNvPr id="3" name="Picture 2" descr="_cover_01.jpg"/>
+          <p:cNvPicPr>
+            <a:picLocks noChangeAspect="1"/>
+          </p:cNvPicPr>
+          <p:nvPr/>
+        </p:nvPicPr>
+        <p:blipFill>
+          <a:blip r:embed="rId2"/>
+          <a:stretch>
+            <a:fillRect/>
+          </a:stretch>
+        </p:blipFill>
+        <p:spPr>
+          <a:xfrm>
+            <a:off x="0" y="0"/>
+            <a:ext cx="12191695" cy="6858000"/>
+          </a:xfrm>
+          <a:prstGeom prst="rect">
+            <a:avLst/>
+          </a:prstGeom>
+        </p:spPr>
+      </p:pic>
+      <p:sp>
+        <p:nvSpPr>
+          <p:cNvPr id="4" name="Rectangle 3"/>
           <p:cNvSpPr/>
           <p:nvPr/>
         </p:nvSpPr>
         <p:spPr>
           <a:xfrm>
-            <a:off x="822960" y="4434840"/>
-            <a:ext cx="10515600" cy="1280160"/>
-          </a:xfrm>
-          <a:prstGeom prst="roundRect">
-            <a:avLst>
-              <a:gd name="adj" fmla="val 6000"/>
-            </a:avLst>
+            <a:off x="0" y="0"/>
+            <a:ext cx="12191695" cy="6858000"/>
+          </a:xfrm>
+          <a:prstGeom prst="rect">
+            <a:avLst/>
           </a:prstGeom>
           <a:solidFill>
-            <a:srgbClr val="F8ECE9"/>
+            <a:srgbClr val="1C1730">
+              <a:alpha val="45000"/>
+            </a:srgbClr>
           </a:solidFill>
           <a:ln>
             <a:noFill/>
@@ -8452,14 +9409,138 @@
       </p:sp>
       <p:sp>
         <p:nvSpPr>
+          <p:cNvPr id="5" name="Rectangle 4"/>
+          <p:cNvSpPr/>
+          <p:nvPr/>
+        </p:nvSpPr>
+        <p:spPr>
+          <a:xfrm>
+            <a:off x="0" y="0"/>
+            <a:ext cx="12191695" cy="6858000"/>
+          </a:xfrm>
+          <a:prstGeom prst="rect">
+            <a:avLst/>
+          </a:prstGeom>
+          <a:solidFill>
+            <a:srgbClr val="C1432B">
+              <a:alpha val="35000"/>
+            </a:srgbClr>
+          </a:solidFill>
+          <a:ln>
+            <a:noFill/>
+          </a:ln>
+          <a:effectLst/>
+        </p:spPr>
+        <p:style>
+          <a:lnRef idx="1">
+            <a:schemeClr val="accent1"/>
+          </a:lnRef>
+          <a:fillRef idx="3">
+            <a:schemeClr val="accent1"/>
+          </a:fillRef>
+          <a:effectRef idx="2">
+            <a:schemeClr val="accent1"/>
+          </a:effectRef>
+          <a:fontRef idx="minor">
+            <a:schemeClr val="lt1"/>
+          </a:fontRef>
+        </p:style>
+        <p:txBody>
+          <a:bodyPr rtlCol="0" anchor="ctr"/>
+          <a:lstStyle/>
+          <a:p>
+            <a:pPr algn="ctr"/>
+          </a:p>
+        </p:txBody>
+      </p:sp>
+      <p:sp>
+        <p:nvSpPr>
+          <p:cNvPr id="6" name="TextBox 5"/>
+          <p:cNvSpPr txBox="1"/>
+          <p:nvPr/>
+        </p:nvSpPr>
+        <p:spPr>
+          <a:xfrm>
+            <a:off x="822960" y="502920"/>
+            <a:ext cx="9144000" cy="365760"/>
+          </a:xfrm>
+          <a:prstGeom prst="rect">
+            <a:avLst/>
+          </a:prstGeom>
+          <a:noFill/>
+        </p:spPr>
+        <p:txBody>
+          <a:bodyPr wrap="square" anchor="t" lIns="0" rIns="0" tIns="0" bIns="0">
+            <a:spAutoFit/>
+          </a:bodyPr>
+          <a:lstStyle/>
+          <a:p>
+            <a:pPr algn="l">
+              <a:lnSpc>
+                <a:spcPct val="115000"/>
+              </a:lnSpc>
+            </a:pPr>
+            <a:r>
+              <a:rPr sz="1300" b="1" i="0">
+                <a:solidFill>
+                  <a:srgbClr val="FFC53D"/>
+                </a:solidFill>
+                <a:latin typeface="Calibri"/>
+              </a:rPr>
+              <a:t>BlockchainCourse · Curriculum · Week 01 · Topic 01 of 04</a:t>
+            </a:r>
+          </a:p>
+        </p:txBody>
+      </p:sp>
+      <p:sp>
+        <p:nvSpPr>
+          <p:cNvPr id="7" name="TextBox 6"/>
+          <p:cNvSpPr txBox="1"/>
+          <p:nvPr/>
+        </p:nvSpPr>
+        <p:spPr>
+          <a:xfrm>
+            <a:off x="822960" y="1188720"/>
+            <a:ext cx="5486400" cy="1188720"/>
+          </a:xfrm>
+          <a:prstGeom prst="rect">
+            <a:avLst/>
+          </a:prstGeom>
+          <a:noFill/>
+        </p:spPr>
+        <p:txBody>
+          <a:bodyPr wrap="square" anchor="t" lIns="0" rIns="0" tIns="0" bIns="0">
+            <a:spAutoFit/>
+          </a:bodyPr>
+          <a:lstStyle/>
+          <a:p>
+            <a:pPr algn="l">
+              <a:lnSpc>
+                <a:spcPct val="115000"/>
+              </a:lnSpc>
+            </a:pPr>
+            <a:r>
+              <a:rPr sz="10000" b="1" i="0">
+                <a:solidFill>
+                  <a:srgbClr val="FFFFFF"/>
+                </a:solidFill>
+                <a:latin typeface="Century Gothic"/>
+              </a:rPr>
+              <a:t>01</a:t>
+            </a:r>
+          </a:p>
+        </p:txBody>
+      </p:sp>
+      <p:sp>
+        <p:nvSpPr>
           <p:cNvPr id="8" name="TextBox 7"/>
           <p:cNvSpPr txBox="1"/>
           <p:nvPr/>
         </p:nvSpPr>
         <p:spPr>
           <a:xfrm>
-            <a:off x="1143000" y="4617720"/>
-            <a:ext cx="9875520" cy="320040"/>
+            <a:off x="822960" y="2423160"/>
+            <a:ext cx="8961120" cy="1554480"/>
           </a:xfrm>
           <a:prstGeom prst="rect">
             <a:avLst/>
@@ -8474,63 +9555,334 @@
           <a:p>
             <a:pPr algn="l">
               <a:lnSpc>
+                <a:spcPct val="105000"/>
+              </a:lnSpc>
+            </a:pPr>
+            <a:r>
+              <a:rPr sz="4600" b="1" i="0">
+                <a:solidFill>
+                  <a:srgbClr val="FFFFFF"/>
+                </a:solidFill>
+                <a:latin typeface="Century Gothic"/>
+              </a:rPr>
+              <a:t>Hashing</a:t>
+            </a:r>
+          </a:p>
+        </p:txBody>
+      </p:sp>
+      <p:sp>
+        <p:nvSpPr>
+          <p:cNvPr id="9" name="TextBox 8"/>
+          <p:cNvSpPr txBox="1"/>
+          <p:nvPr/>
+        </p:nvSpPr>
+        <p:spPr>
+          <a:xfrm>
+            <a:off x="822960" y="4160520"/>
+            <a:ext cx="6858000" cy="1097280"/>
+          </a:xfrm>
+          <a:prstGeom prst="rect">
+            <a:avLst/>
+          </a:prstGeom>
+          <a:noFill/>
+        </p:spPr>
+        <p:txBody>
+          <a:bodyPr wrap="square" anchor="t" lIns="0" rIns="0" tIns="0" bIns="0">
+            <a:spAutoFit/>
+          </a:bodyPr>
+          <a:lstStyle/>
+          <a:p>
+            <a:pPr algn="l">
+              <a:lnSpc>
+                <a:spcPct val="125000"/>
+              </a:lnSpc>
+            </a:pPr>
+            <a:r>
+              <a:rPr sz="1900" b="0" i="0">
+                <a:solidFill>
+                  <a:srgbClr val="FFFFFF"/>
+                </a:solidFill>
+                <a:latin typeface="Calibri"/>
+              </a:rPr>
+              <a:t>A tamper-evident fingerprint for data — change one letter, get an unrecognizable result.</a:t>
+            </a:r>
+          </a:p>
+        </p:txBody>
+      </p:sp>
+      <p:sp>
+        <p:nvSpPr>
+          <p:cNvPr id="10" name="Rounded Rectangle 9"/>
+          <p:cNvSpPr/>
+          <p:nvPr/>
+        </p:nvSpPr>
+        <p:spPr>
+          <a:xfrm>
+            <a:off x="822960" y="5669280"/>
+            <a:ext cx="1100937" cy="402336"/>
+          </a:xfrm>
+          <a:prstGeom prst="roundRect">
+            <a:avLst>
+              <a:gd name="adj" fmla="val 50000"/>
+            </a:avLst>
+          </a:prstGeom>
+          <a:solidFill>
+            <a:srgbClr val="C1432B"/>
+          </a:solidFill>
+          <a:ln>
+            <a:noFill/>
+          </a:ln>
+          <a:effectLst/>
+        </p:spPr>
+        <p:style>
+          <a:lnRef idx="1">
+            <a:schemeClr val="accent1"/>
+          </a:lnRef>
+          <a:fillRef idx="3">
+            <a:schemeClr val="accent1"/>
+          </a:fillRef>
+          <a:effectRef idx="2">
+            <a:schemeClr val="accent1"/>
+          </a:effectRef>
+          <a:fontRef idx="minor">
+            <a:schemeClr val="lt1"/>
+          </a:fontRef>
+        </p:style>
+        <p:txBody>
+          <a:bodyPr rtlCol="0" anchor="ctr" lIns="109728" rIns="109728" tIns="18288" bIns="18288" wrap="none"/>
+          <a:lstStyle/>
+          <a:p>
+            <a:pPr algn="ctr"/>
+            <a:r>
+              <a:rPr sz="1100" b="1">
+                <a:solidFill>
+                  <a:srgbClr val="FFFFFF"/>
+                </a:solidFill>
+                <a:latin typeface="Calibri"/>
+              </a:rPr>
+              <a:t>01 · Hashing</a:t>
+            </a:r>
+          </a:p>
+        </p:txBody>
+      </p:sp>
+      <p:sp>
+        <p:nvSpPr>
+          <p:cNvPr id="11" name="Rounded Rectangle 10"/>
+          <p:cNvSpPr/>
+          <p:nvPr/>
+        </p:nvSpPr>
+        <p:spPr>
+          <a:xfrm>
+            <a:off x="2070201" y="5669280"/>
+            <a:ext cx="2022652" cy="402336"/>
+          </a:xfrm>
+          <a:prstGeom prst="roundRect">
+            <a:avLst>
+              <a:gd name="adj" fmla="val 50000"/>
+            </a:avLst>
+          </a:prstGeom>
+          <a:solidFill>
+            <a:srgbClr val="FFFFFF">
+              <a:alpha val="14000"/>
+            </a:srgbClr>
+          </a:solidFill>
+          <a:ln w="9525">
+            <a:solidFill>
+              <a:srgbClr val="FFFFFF"/>
+            </a:solidFill>
+          </a:ln>
+          <a:effectLst/>
+        </p:spPr>
+        <p:style>
+          <a:lnRef idx="1">
+            <a:schemeClr val="accent1"/>
+          </a:lnRef>
+          <a:fillRef idx="3">
+            <a:schemeClr val="accent1"/>
+          </a:fillRef>
+          <a:effectRef idx="2">
+            <a:schemeClr val="accent1"/>
+          </a:effectRef>
+          <a:fontRef idx="minor">
+            <a:schemeClr val="lt1"/>
+          </a:fontRef>
+        </p:style>
+        <p:txBody>
+          <a:bodyPr rtlCol="0" anchor="ctr" lIns="109728" rIns="109728" tIns="18288" bIns="18288" wrap="none"/>
+          <a:lstStyle/>
+          <a:p>
+            <a:pPr algn="ctr"/>
+            <a:r>
+              <a:rPr sz="1100" b="0">
+                <a:solidFill>
+                  <a:srgbClr val="DDD9E8"/>
+                </a:solidFill>
+                <a:latin typeface="Calibri"/>
+              </a:rPr>
+              <a:t>02 · Public / Private Keys</a:t>
+            </a:r>
+          </a:p>
+        </p:txBody>
+      </p:sp>
+      <p:sp>
+        <p:nvSpPr>
+          <p:cNvPr id="12" name="Rounded Rectangle 11"/>
+          <p:cNvSpPr/>
+          <p:nvPr/>
+        </p:nvSpPr>
+        <p:spPr>
+          <a:xfrm>
+            <a:off x="4239157" y="5669280"/>
+            <a:ext cx="1627632" cy="402336"/>
+          </a:xfrm>
+          <a:prstGeom prst="roundRect">
+            <a:avLst>
+              <a:gd name="adj" fmla="val 50000"/>
+            </a:avLst>
+          </a:prstGeom>
+          <a:solidFill>
+            <a:srgbClr val="FFFFFF">
+              <a:alpha val="14000"/>
+            </a:srgbClr>
+          </a:solidFill>
+          <a:ln w="9525">
+            <a:solidFill>
+              <a:srgbClr val="FFFFFF"/>
+            </a:solidFill>
+          </a:ln>
+          <a:effectLst/>
+        </p:spPr>
+        <p:style>
+          <a:lnRef idx="1">
+            <a:schemeClr val="accent1"/>
+          </a:lnRef>
+          <a:fillRef idx="3">
+            <a:schemeClr val="accent1"/>
+          </a:fillRef>
+          <a:effectRef idx="2">
+            <a:schemeClr val="accent1"/>
+          </a:effectRef>
+          <a:fontRef idx="minor">
+            <a:schemeClr val="lt1"/>
+          </a:fontRef>
+        </p:style>
+        <p:txBody>
+          <a:bodyPr rtlCol="0" anchor="ctr" lIns="109728" rIns="109728" tIns="18288" bIns="18288" wrap="none"/>
+          <a:lstStyle/>
+          <a:p>
+            <a:pPr algn="ctr"/>
+            <a:r>
+              <a:rPr sz="1100" b="0">
+                <a:solidFill>
+                  <a:srgbClr val="DDD9E8"/>
+                </a:solidFill>
+                <a:latin typeface="Calibri"/>
+              </a:rPr>
+              <a:t>03 · Blocks &amp; Chains</a:t>
+            </a:r>
+          </a:p>
+        </p:txBody>
+      </p:sp>
+      <p:sp>
+        <p:nvSpPr>
+          <p:cNvPr id="13" name="Rounded Rectangle 12"/>
+          <p:cNvSpPr/>
+          <p:nvPr/>
+        </p:nvSpPr>
+        <p:spPr>
+          <a:xfrm>
+            <a:off x="6013093" y="5669280"/>
+            <a:ext cx="1232611" cy="402336"/>
+          </a:xfrm>
+          <a:prstGeom prst="roundRect">
+            <a:avLst>
+              <a:gd name="adj" fmla="val 50000"/>
+            </a:avLst>
+          </a:prstGeom>
+          <a:solidFill>
+            <a:srgbClr val="FFFFFF">
+              <a:alpha val="14000"/>
+            </a:srgbClr>
+          </a:solidFill>
+          <a:ln w="9525">
+            <a:solidFill>
+              <a:srgbClr val="FFFFFF"/>
+            </a:solidFill>
+          </a:ln>
+          <a:effectLst/>
+        </p:spPr>
+        <p:style>
+          <a:lnRef idx="1">
+            <a:schemeClr val="accent1"/>
+          </a:lnRef>
+          <a:fillRef idx="3">
+            <a:schemeClr val="accent1"/>
+          </a:fillRef>
+          <a:effectRef idx="2">
+            <a:schemeClr val="accent1"/>
+          </a:effectRef>
+          <a:fontRef idx="minor">
+            <a:schemeClr val="lt1"/>
+          </a:fontRef>
+        </p:style>
+        <p:txBody>
+          <a:bodyPr rtlCol="0" anchor="ctr" lIns="109728" rIns="109728" tIns="18288" bIns="18288" wrap="none"/>
+          <a:lstStyle/>
+          <a:p>
+            <a:pPr algn="ctr"/>
+            <a:r>
+              <a:rPr sz="1100" b="0">
+                <a:solidFill>
+                  <a:srgbClr val="DDD9E8"/>
+                </a:solidFill>
+                <a:latin typeface="Calibri"/>
+              </a:rPr>
+              <a:t>04 · Consensus</a:t>
+            </a:r>
+          </a:p>
+        </p:txBody>
+      </p:sp>
+      <p:sp>
+        <p:nvSpPr>
+          <p:cNvPr id="14" name="TextBox 13"/>
+          <p:cNvSpPr txBox="1"/>
+          <p:nvPr/>
+        </p:nvSpPr>
+        <p:spPr>
+          <a:xfrm>
+            <a:off x="822960" y="6446520"/>
+            <a:ext cx="8229600" cy="320040"/>
+          </a:xfrm>
+          <a:prstGeom prst="rect">
+            <a:avLst/>
+          </a:prstGeom>
+          <a:noFill/>
+        </p:spPr>
+        <p:txBody>
+          <a:bodyPr wrap="square" anchor="t" lIns="0" rIns="0" tIns="0" bIns="0">
+            <a:spAutoFit/>
+          </a:bodyPr>
+          <a:lstStyle/>
+          <a:p>
+            <a:pPr algn="l">
+              <a:lnSpc>
                 <a:spcPct val="115000"/>
               </a:lnSpc>
             </a:pPr>
             <a:r>
-              <a:rPr sz="1100" b="1" i="0">
-                <a:solidFill>
-                  <a:srgbClr val="C1432B"/>
+              <a:rPr sz="1000" b="0" i="0">
+                <a:solidFill>
+                  <a:srgbClr val="E9E6F2"/>
                 </a:solidFill>
                 <a:latin typeface="Calibri"/>
               </a:rPr>
-              <a:t>EXAMPLE</a:t>
-            </a:r>
-          </a:p>
-        </p:txBody>
-      </p:sp>
-      <p:sp>
-        <p:nvSpPr>
-          <p:cNvPr id="9" name="TextBox 8"/>
-          <p:cNvSpPr txBox="1"/>
-          <p:nvPr/>
-        </p:nvSpPr>
-        <p:spPr>
-          <a:xfrm>
-            <a:off x="1143000" y="4956048"/>
-            <a:ext cx="9875520" cy="640080"/>
-          </a:xfrm>
-          <a:prstGeom prst="rect">
-            <a:avLst/>
-          </a:prstGeom>
-          <a:noFill/>
-        </p:spPr>
-        <p:txBody>
-          <a:bodyPr wrap="square" anchor="t" lIns="0" rIns="0" tIns="0" bIns="0">
-            <a:spAutoFit/>
-          </a:bodyPr>
-          <a:lstStyle/>
-          <a:p>
-            <a:pPr algn="l">
-              <a:lnSpc>
-                <a:spcPct val="130000"/>
-              </a:lnSpc>
-            </a:pPr>
-            <a:r>
-              <a:rPr sz="1400" b="0" i="0">
-                <a:solidFill>
-                  <a:srgbClr val="1C1730"/>
-                </a:solidFill>
-                <a:latin typeface="Consolas"/>
-              </a:rPr>
-              <a:t>"hello" → 2cf24dba...9824  (always, forever)</a:t>
-            </a:r>
-          </a:p>
-        </p:txBody>
-      </p:sp>
-      <p:sp>
-        <p:nvSpPr>
-          <p:cNvPr id="10" name="TextBox 9"/>
+              <a:t>Photo: Simon A. Eugster (LivingShadow) / Wikimedia Commons, CC BY-SA 3.0</a:t>
+            </a:r>
+          </a:p>
+        </p:txBody>
+      </p:sp>
+      <p:sp>
+        <p:nvSpPr>
+          <p:cNvPr id="15" name="TextBox 14"/>
           <p:cNvSpPr txBox="1"/>
           <p:nvPr/>
         </p:nvSpPr>
@@ -8562,7 +9914,7 @@
                 </a:solidFill>
                 <a:latin typeface="Consolas"/>
               </a:rPr>
-              <a:t>04 / 15</a:t>
+              <a:t>04 / 18</a:t>
             </a:r>
           </a:p>
         </p:txBody>
@@ -8676,21 +10028,99 @@
         </p:nvSpPr>
         <p:spPr>
           <a:xfrm>
-            <a:off x="8503920" y="640080"/>
-            <a:ext cx="2834640" cy="365760"/>
-          </a:xfrm>
-          <a:prstGeom prst="rect">
-            <a:avLst/>
-          </a:prstGeom>
-          <a:noFill/>
-        </p:spPr>
-        <p:txBody>
-          <a:bodyPr wrap="square" anchor="t" lIns="0" rIns="0" tIns="0" bIns="0">
-            <a:spAutoFit/>
-          </a:bodyPr>
-          <a:lstStyle/>
-          <a:p>
-            <a:pPr algn="r">
+            <a:off x="822960" y="1051560"/>
+            <a:ext cx="9601200" cy="1005840"/>
+          </a:xfrm>
+          <a:prstGeom prst="rect">
+            <a:avLst/>
+          </a:prstGeom>
+          <a:noFill/>
+        </p:spPr>
+        <p:txBody>
+          <a:bodyPr wrap="square" anchor="t" lIns="0" rIns="0" tIns="0" bIns="0">
+            <a:spAutoFit/>
+          </a:bodyPr>
+          <a:lstStyle/>
+          <a:p>
+            <a:pPr algn="l">
+              <a:lnSpc>
+                <a:spcPct val="105000"/>
+              </a:lnSpc>
+            </a:pPr>
+            <a:r>
+              <a:rPr sz="3200" b="1" i="0">
+                <a:solidFill>
+                  <a:srgbClr val="1C1730"/>
+                </a:solidFill>
+                <a:latin typeface="Century Gothic"/>
+              </a:rPr>
+              <a:t>Why This Matters</a:t>
+            </a:r>
+          </a:p>
+        </p:txBody>
+      </p:sp>
+      <p:sp>
+        <p:nvSpPr>
+          <p:cNvPr id="5" name="TextBox 4"/>
+          <p:cNvSpPr txBox="1"/>
+          <p:nvPr/>
+        </p:nvSpPr>
+        <p:spPr>
+          <a:xfrm>
+            <a:off x="822960" y="1965960"/>
+            <a:ext cx="9875520" cy="1463040"/>
+          </a:xfrm>
+          <a:prstGeom prst="rect">
+            <a:avLst/>
+          </a:prstGeom>
+          <a:noFill/>
+        </p:spPr>
+        <p:txBody>
+          <a:bodyPr wrap="square" anchor="t" lIns="0" rIns="0" tIns="0" bIns="0">
+            <a:spAutoFit/>
+          </a:bodyPr>
+          <a:lstStyle/>
+          <a:p>
+            <a:pPr algn="l">
+              <a:lnSpc>
+                <a:spcPct val="140000"/>
+              </a:lnSpc>
+            </a:pPr>
+            <a:r>
+              <a:rPr sz="1600" b="0" i="0">
+                <a:solidFill>
+                  <a:srgbClr val="5C576E"/>
+                </a:solidFill>
+                <a:latin typeface="Calibri"/>
+              </a:rPr>
+              <a:t>Before any other concept in this course makes sense, you need hashing — it's the primitive every other piece (signatures, blocks, chains) is built on top of. Everything from here on assumes you understand what a hash actually is and isn't.</a:t>
+            </a:r>
+          </a:p>
+        </p:txBody>
+      </p:sp>
+      <p:sp>
+        <p:nvSpPr>
+          <p:cNvPr id="6" name="TextBox 5"/>
+          <p:cNvSpPr txBox="1"/>
+          <p:nvPr/>
+        </p:nvSpPr>
+        <p:spPr>
+          <a:xfrm>
+            <a:off x="822960" y="3657600"/>
+            <a:ext cx="9875520" cy="365760"/>
+          </a:xfrm>
+          <a:prstGeom prst="rect">
+            <a:avLst/>
+          </a:prstGeom>
+          <a:noFill/>
+        </p:spPr>
+        <p:txBody>
+          <a:bodyPr wrap="square" anchor="t" lIns="0" rIns="0" tIns="0" bIns="0">
+            <a:spAutoFit/>
+          </a:bodyPr>
+          <a:lstStyle/>
+          <a:p>
+            <a:pPr algn="l">
               <a:lnSpc>
                 <a:spcPct val="115000"/>
               </a:lnSpc>
@@ -8698,111 +10128,31 @@
             <a:r>
               <a:rPr sz="1200" b="1" i="0">
                 <a:solidFill>
-                  <a:srgbClr val="5C576E"/>
+                  <a:srgbClr val="C1432B"/>
                 </a:solidFill>
                 <a:latin typeface="Calibri"/>
               </a:rPr>
-              <a:t>KEY IDEA 2 / 4</a:t>
-            </a:r>
-          </a:p>
-        </p:txBody>
-      </p:sp>
-      <p:sp>
-        <p:nvSpPr>
-          <p:cNvPr id="5" name="TextBox 4"/>
-          <p:cNvSpPr txBox="1"/>
-          <p:nvPr/>
-        </p:nvSpPr>
-        <p:spPr>
-          <a:xfrm>
-            <a:off x="822960" y="1097280"/>
-            <a:ext cx="9601200" cy="1005840"/>
-          </a:xfrm>
-          <a:prstGeom prst="rect">
-            <a:avLst/>
-          </a:prstGeom>
-          <a:noFill/>
-        </p:spPr>
-        <p:txBody>
-          <a:bodyPr wrap="square" anchor="t" lIns="0" rIns="0" tIns="0" bIns="0">
-            <a:spAutoFit/>
-          </a:bodyPr>
-          <a:lstStyle/>
-          <a:p>
-            <a:pPr algn="l">
-              <a:lnSpc>
-                <a:spcPct val="105000"/>
-              </a:lnSpc>
-            </a:pPr>
-            <a:r>
-              <a:rPr sz="3200" b="1" i="0">
-                <a:solidFill>
-                  <a:srgbClr val="1C1730"/>
-                </a:solidFill>
-                <a:latin typeface="Century Gothic"/>
-              </a:rPr>
-              <a:t>One-Way</a:t>
-            </a:r>
-          </a:p>
-        </p:txBody>
-      </p:sp>
-      <p:sp>
-        <p:nvSpPr>
-          <p:cNvPr id="6" name="TextBox 5"/>
-          <p:cNvSpPr txBox="1"/>
-          <p:nvPr/>
-        </p:nvSpPr>
-        <p:spPr>
-          <a:xfrm>
-            <a:off x="822960" y="2148840"/>
-            <a:ext cx="9875520" cy="2011680"/>
-          </a:xfrm>
-          <a:prstGeom prst="rect">
-            <a:avLst/>
-          </a:prstGeom>
-          <a:noFill/>
-        </p:spPr>
-        <p:txBody>
-          <a:bodyPr wrap="square" anchor="t" lIns="0" rIns="0" tIns="0" bIns="0">
-            <a:spAutoFit/>
-          </a:bodyPr>
-          <a:lstStyle/>
-          <a:p>
-            <a:pPr algn="l">
-              <a:lnSpc>
-                <a:spcPct val="150000"/>
-              </a:lnSpc>
-            </a:pPr>
-            <a:r>
-              <a:rPr sz="1650" b="0" i="0">
-                <a:solidFill>
-                  <a:srgbClr val="1C1730"/>
-                </a:solidFill>
-                <a:latin typeface="Calibri"/>
-              </a:rPr>
-              <a:t>Given a hash, there's no way to work backwards to the original input — other than guessing inputs and re-hashing until one matches, which for anything non-trivial would take longer than the age of the universe. Easy to fall through, impossible to climb back up.</a:t>
-            </a:r>
-          </a:p>
-        </p:txBody>
-      </p:sp>
-      <p:sp>
-        <p:nvSpPr>
-          <p:cNvPr id="7" name="Rounded Rectangle 6"/>
+              <a:t>WHAT THIS SECTION COVERS</a:t>
+            </a:r>
+          </a:p>
+        </p:txBody>
+      </p:sp>
+      <p:sp>
+        <p:nvSpPr>
+          <p:cNvPr id="7" name="Rectangle 6"/>
           <p:cNvSpPr/>
           <p:nvPr/>
         </p:nvSpPr>
         <p:spPr>
           <a:xfrm>
-            <a:off x="822960" y="4434840"/>
-            <a:ext cx="10515600" cy="1280160"/>
-          </a:xfrm>
-          <a:prstGeom prst="roundRect">
-            <a:avLst>
-              <a:gd name="adj" fmla="val 6000"/>
-            </a:avLst>
+            <a:off x="822960" y="4197096"/>
+            <a:ext cx="82296" cy="82296"/>
+          </a:xfrm>
+          <a:prstGeom prst="rect">
+            <a:avLst/>
           </a:prstGeom>
           <a:solidFill>
-            <a:srgbClr val="F8ECE9"/>
+            <a:srgbClr val="C1432B"/>
           </a:solidFill>
           <a:ln>
             <a:noFill/>
@@ -8839,8 +10189,8 @@
         </p:nvSpPr>
         <p:spPr>
           <a:xfrm>
-            <a:off x="1143000" y="4617720"/>
-            <a:ext cx="9875520" cy="320040"/>
+            <a:off x="1051560" y="4114800"/>
+            <a:ext cx="4709160" cy="365760"/>
           </a:xfrm>
           <a:prstGeom prst="rect">
             <a:avLst/>
@@ -8859,27 +10209,71 @@
               </a:lnSpc>
             </a:pPr>
             <a:r>
-              <a:rPr sz="1100" b="1" i="0">
-                <a:solidFill>
-                  <a:srgbClr val="C1432B"/>
+              <a:rPr sz="1350" b="0" i="0">
+                <a:solidFill>
+                  <a:srgbClr val="1C1730"/>
                 </a:solidFill>
                 <a:latin typeface="Calibri"/>
               </a:rPr>
-              <a:t>EXAMPLE</a:t>
-            </a:r>
-          </a:p>
-        </p:txBody>
-      </p:sp>
-      <p:sp>
-        <p:nvSpPr>
-          <p:cNvPr id="9" name="TextBox 8"/>
-          <p:cNvSpPr txBox="1"/>
-          <p:nvPr/>
-        </p:nvSpPr>
-        <p:spPr>
-          <a:xfrm>
-            <a:off x="1143000" y="4956048"/>
-            <a:ext cx="9875520" cy="640080"/>
+              <a:t>Core concept</a:t>
+            </a:r>
+          </a:p>
+        </p:txBody>
+      </p:sp>
+      <p:sp>
+        <p:nvSpPr>
+          <p:cNvPr id="9" name="Rectangle 8"/>
+          <p:cNvSpPr/>
+          <p:nvPr/>
+        </p:nvSpPr>
+        <p:spPr>
+          <a:xfrm>
+            <a:off x="6035040" y="4197096"/>
+            <a:ext cx="82296" cy="82296"/>
+          </a:xfrm>
+          <a:prstGeom prst="rect">
+            <a:avLst/>
+          </a:prstGeom>
+          <a:solidFill>
+            <a:srgbClr val="C1432B"/>
+          </a:solidFill>
+          <a:ln>
+            <a:noFill/>
+          </a:ln>
+          <a:effectLst/>
+        </p:spPr>
+        <p:style>
+          <a:lnRef idx="1">
+            <a:schemeClr val="accent1"/>
+          </a:lnRef>
+          <a:fillRef idx="3">
+            <a:schemeClr val="accent1"/>
+          </a:fillRef>
+          <a:effectRef idx="2">
+            <a:schemeClr val="accent1"/>
+          </a:effectRef>
+          <a:fontRef idx="minor">
+            <a:schemeClr val="lt1"/>
+          </a:fontRef>
+        </p:style>
+        <p:txBody>
+          <a:bodyPr rtlCol="0" anchor="ctr"/>
+          <a:lstStyle/>
+          <a:p>
+            <a:pPr algn="ctr"/>
+          </a:p>
+        </p:txBody>
+      </p:sp>
+      <p:sp>
+        <p:nvSpPr>
+          <p:cNvPr id="10" name="TextBox 9"/>
+          <p:cNvSpPr txBox="1"/>
+          <p:nvPr/>
+        </p:nvSpPr>
+        <p:spPr>
+          <a:xfrm>
+            <a:off x="6263640" y="4114800"/>
+            <a:ext cx="4709160" cy="365760"/>
           </a:xfrm>
           <a:prstGeom prst="rect">
             <a:avLst/>
@@ -8894,24 +10288,605 @@
           <a:p>
             <a:pPr algn="l">
               <a:lnSpc>
-                <a:spcPct val="130000"/>
-              </a:lnSpc>
-            </a:pPr>
-            <a:r>
-              <a:rPr sz="1400" b="0" i="0">
+                <a:spcPct val="115000"/>
+              </a:lnSpc>
+            </a:pPr>
+            <a:r>
+              <a:rPr sz="1350" b="0" i="0">
                 <a:solidFill>
                   <a:srgbClr val="1C1730"/>
                 </a:solidFill>
-                <a:latin typeface="Consolas"/>
-              </a:rPr>
-              <a:t>You can reverse-engineer neither a fingerprint into a face, nor a hash into its input.</a:t>
-            </a:r>
-          </a:p>
-        </p:txBody>
-      </p:sp>
-      <p:sp>
-        <p:nvSpPr>
-          <p:cNvPr id="10" name="TextBox 9"/>
+                <a:latin typeface="Calibri"/>
+              </a:rPr>
+              <a:t>Four key ideas, one at a time</a:t>
+            </a:r>
+          </a:p>
+        </p:txBody>
+      </p:sp>
+      <p:sp>
+        <p:nvSpPr>
+          <p:cNvPr id="11" name="Rectangle 10"/>
+          <p:cNvSpPr/>
+          <p:nvPr/>
+        </p:nvSpPr>
+        <p:spPr>
+          <a:xfrm>
+            <a:off x="822960" y="4654296"/>
+            <a:ext cx="82296" cy="82296"/>
+          </a:xfrm>
+          <a:prstGeom prst="rect">
+            <a:avLst/>
+          </a:prstGeom>
+          <a:solidFill>
+            <a:srgbClr val="C1432B"/>
+          </a:solidFill>
+          <a:ln>
+            <a:noFill/>
+          </a:ln>
+          <a:effectLst/>
+        </p:spPr>
+        <p:style>
+          <a:lnRef idx="1">
+            <a:schemeClr val="accent1"/>
+          </a:lnRef>
+          <a:fillRef idx="3">
+            <a:schemeClr val="accent1"/>
+          </a:fillRef>
+          <a:effectRef idx="2">
+            <a:schemeClr val="accent1"/>
+          </a:effectRef>
+          <a:fontRef idx="minor">
+            <a:schemeClr val="lt1"/>
+          </a:fontRef>
+        </p:style>
+        <p:txBody>
+          <a:bodyPr rtlCol="0" anchor="ctr"/>
+          <a:lstStyle/>
+          <a:p>
+            <a:pPr algn="ctr"/>
+          </a:p>
+        </p:txBody>
+      </p:sp>
+      <p:sp>
+        <p:nvSpPr>
+          <p:cNvPr id="12" name="TextBox 11"/>
+          <p:cNvSpPr txBox="1"/>
+          <p:nvPr/>
+        </p:nvSpPr>
+        <p:spPr>
+          <a:xfrm>
+            <a:off x="1051560" y="4572000"/>
+            <a:ext cx="4709160" cy="365760"/>
+          </a:xfrm>
+          <a:prstGeom prst="rect">
+            <a:avLst/>
+          </a:prstGeom>
+          <a:noFill/>
+        </p:spPr>
+        <p:txBody>
+          <a:bodyPr wrap="square" anchor="t" lIns="0" rIns="0" tIns="0" bIns="0">
+            <a:spAutoFit/>
+          </a:bodyPr>
+          <a:lstStyle/>
+          <a:p>
+            <a:pPr algn="l">
+              <a:lnSpc>
+                <a:spcPct val="115000"/>
+              </a:lnSpc>
+            </a:pPr>
+            <a:r>
+              <a:rPr sz="1350" b="0" i="0">
+                <a:solidFill>
+                  <a:srgbClr val="1C1730"/>
+                </a:solidFill>
+                <a:latin typeface="Calibri"/>
+              </a:rPr>
+              <a:t>A real, reproducible worked example</a:t>
+            </a:r>
+          </a:p>
+        </p:txBody>
+      </p:sp>
+      <p:sp>
+        <p:nvSpPr>
+          <p:cNvPr id="13" name="Rectangle 12"/>
+          <p:cNvSpPr/>
+          <p:nvPr/>
+        </p:nvSpPr>
+        <p:spPr>
+          <a:xfrm>
+            <a:off x="6035040" y="4654296"/>
+            <a:ext cx="82296" cy="82296"/>
+          </a:xfrm>
+          <a:prstGeom prst="rect">
+            <a:avLst/>
+          </a:prstGeom>
+          <a:solidFill>
+            <a:srgbClr val="C1432B"/>
+          </a:solidFill>
+          <a:ln>
+            <a:noFill/>
+          </a:ln>
+          <a:effectLst/>
+        </p:spPr>
+        <p:style>
+          <a:lnRef idx="1">
+            <a:schemeClr val="accent1"/>
+          </a:lnRef>
+          <a:fillRef idx="3">
+            <a:schemeClr val="accent1"/>
+          </a:fillRef>
+          <a:effectRef idx="2">
+            <a:schemeClr val="accent1"/>
+          </a:effectRef>
+          <a:fontRef idx="minor">
+            <a:schemeClr val="lt1"/>
+          </a:fontRef>
+        </p:style>
+        <p:txBody>
+          <a:bodyPr rtlCol="0" anchor="ctr"/>
+          <a:lstStyle/>
+          <a:p>
+            <a:pPr algn="ctr"/>
+          </a:p>
+        </p:txBody>
+      </p:sp>
+      <p:sp>
+        <p:nvSpPr>
+          <p:cNvPr id="14" name="TextBox 13"/>
+          <p:cNvSpPr txBox="1"/>
+          <p:nvPr/>
+        </p:nvSpPr>
+        <p:spPr>
+          <a:xfrm>
+            <a:off x="6263640" y="4572000"/>
+            <a:ext cx="4709160" cy="365760"/>
+          </a:xfrm>
+          <a:prstGeom prst="rect">
+            <a:avLst/>
+          </a:prstGeom>
+          <a:noFill/>
+        </p:spPr>
+        <p:txBody>
+          <a:bodyPr wrap="square" anchor="t" lIns="0" rIns="0" tIns="0" bIns="0">
+            <a:spAutoFit/>
+          </a:bodyPr>
+          <a:lstStyle/>
+          <a:p>
+            <a:pPr algn="l">
+              <a:lnSpc>
+                <a:spcPct val="115000"/>
+              </a:lnSpc>
+            </a:pPr>
+            <a:r>
+              <a:rPr sz="1350" b="0" i="0">
+                <a:solidFill>
+                  <a:srgbClr val="1C1730"/>
+                </a:solidFill>
+                <a:latin typeface="Calibri"/>
+              </a:rPr>
+              <a:t>Real-world uses beyond blockchain</a:t>
+            </a:r>
+          </a:p>
+        </p:txBody>
+      </p:sp>
+      <p:sp>
+        <p:nvSpPr>
+          <p:cNvPr id="15" name="Rectangle 14"/>
+          <p:cNvSpPr/>
+          <p:nvPr/>
+        </p:nvSpPr>
+        <p:spPr>
+          <a:xfrm>
+            <a:off x="822960" y="5111496"/>
+            <a:ext cx="82296" cy="82296"/>
+          </a:xfrm>
+          <a:prstGeom prst="rect">
+            <a:avLst/>
+          </a:prstGeom>
+          <a:solidFill>
+            <a:srgbClr val="C1432B"/>
+          </a:solidFill>
+          <a:ln>
+            <a:noFill/>
+          </a:ln>
+          <a:effectLst/>
+        </p:spPr>
+        <p:style>
+          <a:lnRef idx="1">
+            <a:schemeClr val="accent1"/>
+          </a:lnRef>
+          <a:fillRef idx="3">
+            <a:schemeClr val="accent1"/>
+          </a:fillRef>
+          <a:effectRef idx="2">
+            <a:schemeClr val="accent1"/>
+          </a:effectRef>
+          <a:fontRef idx="minor">
+            <a:schemeClr val="lt1"/>
+          </a:fontRef>
+        </p:style>
+        <p:txBody>
+          <a:bodyPr rtlCol="0" anchor="ctr"/>
+          <a:lstStyle/>
+          <a:p>
+            <a:pPr algn="ctr"/>
+          </a:p>
+        </p:txBody>
+      </p:sp>
+      <p:sp>
+        <p:nvSpPr>
+          <p:cNvPr id="16" name="TextBox 15"/>
+          <p:cNvSpPr txBox="1"/>
+          <p:nvPr/>
+        </p:nvSpPr>
+        <p:spPr>
+          <a:xfrm>
+            <a:off x="1051560" y="5029200"/>
+            <a:ext cx="4709160" cy="365760"/>
+          </a:xfrm>
+          <a:prstGeom prst="rect">
+            <a:avLst/>
+          </a:prstGeom>
+          <a:noFill/>
+        </p:spPr>
+        <p:txBody>
+          <a:bodyPr wrap="square" anchor="t" lIns="0" rIns="0" tIns="0" bIns="0">
+            <a:spAutoFit/>
+          </a:bodyPr>
+          <a:lstStyle/>
+          <a:p>
+            <a:pPr algn="l">
+              <a:lnSpc>
+                <a:spcPct val="115000"/>
+              </a:lnSpc>
+            </a:pPr>
+            <a:r>
+              <a:rPr sz="1350" b="0" i="0">
+                <a:solidFill>
+                  <a:srgbClr val="1C1730"/>
+                </a:solidFill>
+                <a:latin typeface="Calibri"/>
+              </a:rPr>
+              <a:t>A flagship case study</a:t>
+            </a:r>
+          </a:p>
+        </p:txBody>
+      </p:sp>
+      <p:sp>
+        <p:nvSpPr>
+          <p:cNvPr id="17" name="Rectangle 16"/>
+          <p:cNvSpPr/>
+          <p:nvPr/>
+        </p:nvSpPr>
+        <p:spPr>
+          <a:xfrm>
+            <a:off x="6035040" y="5111496"/>
+            <a:ext cx="82296" cy="82296"/>
+          </a:xfrm>
+          <a:prstGeom prst="rect">
+            <a:avLst/>
+          </a:prstGeom>
+          <a:solidFill>
+            <a:srgbClr val="C1432B"/>
+          </a:solidFill>
+          <a:ln>
+            <a:noFill/>
+          </a:ln>
+          <a:effectLst/>
+        </p:spPr>
+        <p:style>
+          <a:lnRef idx="1">
+            <a:schemeClr val="accent1"/>
+          </a:lnRef>
+          <a:fillRef idx="3">
+            <a:schemeClr val="accent1"/>
+          </a:fillRef>
+          <a:effectRef idx="2">
+            <a:schemeClr val="accent1"/>
+          </a:effectRef>
+          <a:fontRef idx="minor">
+            <a:schemeClr val="lt1"/>
+          </a:fontRef>
+        </p:style>
+        <p:txBody>
+          <a:bodyPr rtlCol="0" anchor="ctr"/>
+          <a:lstStyle/>
+          <a:p>
+            <a:pPr algn="ctr"/>
+          </a:p>
+        </p:txBody>
+      </p:sp>
+      <p:sp>
+        <p:nvSpPr>
+          <p:cNvPr id="18" name="TextBox 17"/>
+          <p:cNvSpPr txBox="1"/>
+          <p:nvPr/>
+        </p:nvSpPr>
+        <p:spPr>
+          <a:xfrm>
+            <a:off x="6263640" y="5029200"/>
+            <a:ext cx="4709160" cy="365760"/>
+          </a:xfrm>
+          <a:prstGeom prst="rect">
+            <a:avLst/>
+          </a:prstGeom>
+          <a:noFill/>
+        </p:spPr>
+        <p:txBody>
+          <a:bodyPr wrap="square" anchor="t" lIns="0" rIns="0" tIns="0" bIns="0">
+            <a:spAutoFit/>
+          </a:bodyPr>
+          <a:lstStyle/>
+          <a:p>
+            <a:pPr algn="l">
+              <a:lnSpc>
+                <a:spcPct val="115000"/>
+              </a:lnSpc>
+            </a:pPr>
+            <a:r>
+              <a:rPr sz="1350" b="0" i="0">
+                <a:solidFill>
+                  <a:srgbClr val="1C1730"/>
+                </a:solidFill>
+                <a:latin typeface="Calibri"/>
+              </a:rPr>
+              <a:t>A real-life analogy</a:t>
+            </a:r>
+          </a:p>
+        </p:txBody>
+      </p:sp>
+      <p:sp>
+        <p:nvSpPr>
+          <p:cNvPr id="19" name="Rectangle 18"/>
+          <p:cNvSpPr/>
+          <p:nvPr/>
+        </p:nvSpPr>
+        <p:spPr>
+          <a:xfrm>
+            <a:off x="822960" y="5568696"/>
+            <a:ext cx="82296" cy="82296"/>
+          </a:xfrm>
+          <a:prstGeom prst="rect">
+            <a:avLst/>
+          </a:prstGeom>
+          <a:solidFill>
+            <a:srgbClr val="C1432B"/>
+          </a:solidFill>
+          <a:ln>
+            <a:noFill/>
+          </a:ln>
+          <a:effectLst/>
+        </p:spPr>
+        <p:style>
+          <a:lnRef idx="1">
+            <a:schemeClr val="accent1"/>
+          </a:lnRef>
+          <a:fillRef idx="3">
+            <a:schemeClr val="accent1"/>
+          </a:fillRef>
+          <a:effectRef idx="2">
+            <a:schemeClr val="accent1"/>
+          </a:effectRef>
+          <a:fontRef idx="minor">
+            <a:schemeClr val="lt1"/>
+          </a:fontRef>
+        </p:style>
+        <p:txBody>
+          <a:bodyPr rtlCol="0" anchor="ctr"/>
+          <a:lstStyle/>
+          <a:p>
+            <a:pPr algn="ctr"/>
+          </a:p>
+        </p:txBody>
+      </p:sp>
+      <p:sp>
+        <p:nvSpPr>
+          <p:cNvPr id="20" name="TextBox 19"/>
+          <p:cNvSpPr txBox="1"/>
+          <p:nvPr/>
+        </p:nvSpPr>
+        <p:spPr>
+          <a:xfrm>
+            <a:off x="1051560" y="5486400"/>
+            <a:ext cx="4709160" cy="365760"/>
+          </a:xfrm>
+          <a:prstGeom prst="rect">
+            <a:avLst/>
+          </a:prstGeom>
+          <a:noFill/>
+        </p:spPr>
+        <p:txBody>
+          <a:bodyPr wrap="square" anchor="t" lIns="0" rIns="0" tIns="0" bIns="0">
+            <a:spAutoFit/>
+          </a:bodyPr>
+          <a:lstStyle/>
+          <a:p>
+            <a:pPr algn="l">
+              <a:lnSpc>
+                <a:spcPct val="115000"/>
+              </a:lnSpc>
+            </a:pPr>
+            <a:r>
+              <a:rPr sz="1350" b="0" i="0">
+                <a:solidFill>
+                  <a:srgbClr val="1C1730"/>
+                </a:solidFill>
+                <a:latin typeface="Calibri"/>
+              </a:rPr>
+              <a:t>Common misconceptions</a:t>
+            </a:r>
+          </a:p>
+        </p:txBody>
+      </p:sp>
+      <p:sp>
+        <p:nvSpPr>
+          <p:cNvPr id="21" name="Rectangle 20"/>
+          <p:cNvSpPr/>
+          <p:nvPr/>
+        </p:nvSpPr>
+        <p:spPr>
+          <a:xfrm>
+            <a:off x="6035040" y="5568696"/>
+            <a:ext cx="82296" cy="82296"/>
+          </a:xfrm>
+          <a:prstGeom prst="rect">
+            <a:avLst/>
+          </a:prstGeom>
+          <a:solidFill>
+            <a:srgbClr val="C1432B"/>
+          </a:solidFill>
+          <a:ln>
+            <a:noFill/>
+          </a:ln>
+          <a:effectLst/>
+        </p:spPr>
+        <p:style>
+          <a:lnRef idx="1">
+            <a:schemeClr val="accent1"/>
+          </a:lnRef>
+          <a:fillRef idx="3">
+            <a:schemeClr val="accent1"/>
+          </a:fillRef>
+          <a:effectRef idx="2">
+            <a:schemeClr val="accent1"/>
+          </a:effectRef>
+          <a:fontRef idx="minor">
+            <a:schemeClr val="lt1"/>
+          </a:fontRef>
+        </p:style>
+        <p:txBody>
+          <a:bodyPr rtlCol="0" anchor="ctr"/>
+          <a:lstStyle/>
+          <a:p>
+            <a:pPr algn="ctr"/>
+          </a:p>
+        </p:txBody>
+      </p:sp>
+      <p:sp>
+        <p:nvSpPr>
+          <p:cNvPr id="22" name="TextBox 21"/>
+          <p:cNvSpPr txBox="1"/>
+          <p:nvPr/>
+        </p:nvSpPr>
+        <p:spPr>
+          <a:xfrm>
+            <a:off x="6263640" y="5486400"/>
+            <a:ext cx="4709160" cy="365760"/>
+          </a:xfrm>
+          <a:prstGeom prst="rect">
+            <a:avLst/>
+          </a:prstGeom>
+          <a:noFill/>
+        </p:spPr>
+        <p:txBody>
+          <a:bodyPr wrap="square" anchor="t" lIns="0" rIns="0" tIns="0" bIns="0">
+            <a:spAutoFit/>
+          </a:bodyPr>
+          <a:lstStyle/>
+          <a:p>
+            <a:pPr algn="l">
+              <a:lnSpc>
+                <a:spcPct val="115000"/>
+              </a:lnSpc>
+            </a:pPr>
+            <a:r>
+              <a:rPr sz="1350" b="0" i="0">
+                <a:solidFill>
+                  <a:srgbClr val="1C1730"/>
+                </a:solidFill>
+                <a:latin typeface="Calibri"/>
+              </a:rPr>
+              <a:t>Hands-on practice</a:t>
+            </a:r>
+          </a:p>
+        </p:txBody>
+      </p:sp>
+      <p:sp>
+        <p:nvSpPr>
+          <p:cNvPr id="23" name="Rectangle 22"/>
+          <p:cNvSpPr/>
+          <p:nvPr/>
+        </p:nvSpPr>
+        <p:spPr>
+          <a:xfrm>
+            <a:off x="822960" y="6025896"/>
+            <a:ext cx="82296" cy="82296"/>
+          </a:xfrm>
+          <a:prstGeom prst="rect">
+            <a:avLst/>
+          </a:prstGeom>
+          <a:solidFill>
+            <a:srgbClr val="C1432B"/>
+          </a:solidFill>
+          <a:ln>
+            <a:noFill/>
+          </a:ln>
+          <a:effectLst/>
+        </p:spPr>
+        <p:style>
+          <a:lnRef idx="1">
+            <a:schemeClr val="accent1"/>
+          </a:lnRef>
+          <a:fillRef idx="3">
+            <a:schemeClr val="accent1"/>
+          </a:fillRef>
+          <a:effectRef idx="2">
+            <a:schemeClr val="accent1"/>
+          </a:effectRef>
+          <a:fontRef idx="minor">
+            <a:schemeClr val="lt1"/>
+          </a:fontRef>
+        </p:style>
+        <p:txBody>
+          <a:bodyPr rtlCol="0" anchor="ctr"/>
+          <a:lstStyle/>
+          <a:p>
+            <a:pPr algn="ctr"/>
+          </a:p>
+        </p:txBody>
+      </p:sp>
+      <p:sp>
+        <p:nvSpPr>
+          <p:cNvPr id="24" name="TextBox 23"/>
+          <p:cNvSpPr txBox="1"/>
+          <p:nvPr/>
+        </p:nvSpPr>
+        <p:spPr>
+          <a:xfrm>
+            <a:off x="1051560" y="5943600"/>
+            <a:ext cx="4709160" cy="365760"/>
+          </a:xfrm>
+          <a:prstGeom prst="rect">
+            <a:avLst/>
+          </a:prstGeom>
+          <a:noFill/>
+        </p:spPr>
+        <p:txBody>
+          <a:bodyPr wrap="square" anchor="t" lIns="0" rIns="0" tIns="0" bIns="0">
+            <a:spAutoFit/>
+          </a:bodyPr>
+          <a:lstStyle/>
+          <a:p>
+            <a:pPr algn="l">
+              <a:lnSpc>
+                <a:spcPct val="115000"/>
+              </a:lnSpc>
+            </a:pPr>
+            <a:r>
+              <a:rPr sz="1350" b="0" i="0">
+                <a:solidFill>
+                  <a:srgbClr val="1C1730"/>
+                </a:solidFill>
+                <a:latin typeface="Calibri"/>
+              </a:rPr>
+              <a:t>Take-home assignment</a:t>
+            </a:r>
+          </a:p>
+        </p:txBody>
+      </p:sp>
+      <p:sp>
+        <p:nvSpPr>
+          <p:cNvPr id="25" name="TextBox 24"/>
           <p:cNvSpPr txBox="1"/>
           <p:nvPr/>
         </p:nvSpPr>
@@ -8943,7 +10918,7 @@
                 </a:solidFill>
                 <a:latin typeface="Consolas"/>
               </a:rPr>
-              <a:t>05 / 15</a:t>
+              <a:t>05 / 18</a:t>
             </a:r>
           </a:p>
         </p:txBody>
@@ -9057,45 +11032,6 @@
         </p:nvSpPr>
         <p:spPr>
           <a:xfrm>
-            <a:off x="8503920" y="640080"/>
-            <a:ext cx="2834640" cy="365760"/>
-          </a:xfrm>
-          <a:prstGeom prst="rect">
-            <a:avLst/>
-          </a:prstGeom>
-          <a:noFill/>
-        </p:spPr>
-        <p:txBody>
-          <a:bodyPr wrap="square" anchor="t" lIns="0" rIns="0" tIns="0" bIns="0">
-            <a:spAutoFit/>
-          </a:bodyPr>
-          <a:lstStyle/>
-          <a:p>
-            <a:pPr algn="r">
-              <a:lnSpc>
-                <a:spcPct val="115000"/>
-              </a:lnSpc>
-            </a:pPr>
-            <a:r>
-              <a:rPr sz="1200" b="1" i="0">
-                <a:solidFill>
-                  <a:srgbClr val="5C576E"/>
-                </a:solidFill>
-                <a:latin typeface="Calibri"/>
-              </a:rPr>
-              <a:t>KEY IDEA 3 / 4</a:t>
-            </a:r>
-          </a:p>
-        </p:txBody>
-      </p:sp>
-      <p:sp>
-        <p:nvSpPr>
-          <p:cNvPr id="5" name="TextBox 4"/>
-          <p:cNvSpPr txBox="1"/>
-          <p:nvPr/>
-        </p:nvSpPr>
-        <p:spPr>
-          <a:xfrm>
             <a:off x="822960" y="1097280"/>
             <a:ext cx="9601200" cy="1005840"/>
           </a:xfrm>
@@ -9116,74 +11052,35 @@
               </a:lnSpc>
             </a:pPr>
             <a:r>
-              <a:rPr sz="3200" b="1" i="0">
+              <a:rPr sz="3400" b="1" i="0">
                 <a:solidFill>
                   <a:srgbClr val="1C1730"/>
                 </a:solidFill>
                 <a:latin typeface="Century Gothic"/>
               </a:rPr>
-              <a:t>Avalanche Effect</a:t>
-            </a:r>
-          </a:p>
-        </p:txBody>
-      </p:sp>
-      <p:sp>
-        <p:nvSpPr>
-          <p:cNvPr id="6" name="TextBox 5"/>
-          <p:cNvSpPr txBox="1"/>
-          <p:nvPr/>
-        </p:nvSpPr>
-        <p:spPr>
-          <a:xfrm>
-            <a:off x="822960" y="2148840"/>
-            <a:ext cx="9875520" cy="2011680"/>
-          </a:xfrm>
-          <a:prstGeom prst="rect">
-            <a:avLst/>
-          </a:prstGeom>
-          <a:noFill/>
-        </p:spPr>
-        <p:txBody>
-          <a:bodyPr wrap="square" anchor="t" lIns="0" rIns="0" tIns="0" bIns="0">
-            <a:spAutoFit/>
-          </a:bodyPr>
-          <a:lstStyle/>
-          <a:p>
-            <a:pPr algn="l">
-              <a:lnSpc>
-                <a:spcPct val="150000"/>
-              </a:lnSpc>
-            </a:pPr>
-            <a:r>
-              <a:rPr sz="1650" b="0" i="0">
-                <a:solidFill>
-                  <a:srgbClr val="1C1730"/>
-                </a:solidFill>
-                <a:latin typeface="Calibri"/>
-              </a:rPr>
-              <a:t>Changing even a single character of input — flipping one letter's capitalization — produces a completely different, unrecognizable hash. There's no partial similarity between hashes of similar inputs.</a:t>
-            </a:r>
-          </a:p>
-        </p:txBody>
-      </p:sp>
-      <p:sp>
-        <p:nvSpPr>
-          <p:cNvPr id="7" name="Rounded Rectangle 6"/>
+              <a:t>The Core Concept</a:t>
+            </a:r>
+          </a:p>
+        </p:txBody>
+      </p:sp>
+      <p:sp>
+        <p:nvSpPr>
+          <p:cNvPr id="5" name="Rounded Rectangle 4"/>
           <p:cNvSpPr/>
           <p:nvPr/>
         </p:nvSpPr>
         <p:spPr>
           <a:xfrm>
-            <a:off x="822960" y="4434840"/>
-            <a:ext cx="10515600" cy="1280160"/>
+            <a:off x="822960" y="2286000"/>
+            <a:ext cx="10515600" cy="3291840"/>
           </a:xfrm>
           <a:prstGeom prst="roundRect">
             <a:avLst>
-              <a:gd name="adj" fmla="val 6000"/>
+              <a:gd name="adj" fmla="val 4000"/>
             </a:avLst>
           </a:prstGeom>
           <a:solidFill>
-            <a:srgbClr val="F8ECE9"/>
+            <a:srgbClr val="FFFFFF"/>
           </a:solidFill>
           <a:ln>
             <a:noFill/>
@@ -9214,85 +11111,90 @@
       </p:sp>
       <p:sp>
         <p:nvSpPr>
+          <p:cNvPr id="6" name="Rectangle 5"/>
+          <p:cNvSpPr/>
+          <p:nvPr/>
+        </p:nvSpPr>
+        <p:spPr>
+          <a:xfrm>
+            <a:off x="822960" y="2286000"/>
+            <a:ext cx="91440" cy="3291840"/>
+          </a:xfrm>
+          <a:prstGeom prst="rect">
+            <a:avLst/>
+          </a:prstGeom>
+          <a:solidFill>
+            <a:srgbClr val="C1432B"/>
+          </a:solidFill>
+          <a:ln>
+            <a:noFill/>
+          </a:ln>
+          <a:effectLst/>
+        </p:spPr>
+        <p:style>
+          <a:lnRef idx="1">
+            <a:schemeClr val="accent1"/>
+          </a:lnRef>
+          <a:fillRef idx="3">
+            <a:schemeClr val="accent1"/>
+          </a:fillRef>
+          <a:effectRef idx="2">
+            <a:schemeClr val="accent1"/>
+          </a:effectRef>
+          <a:fontRef idx="minor">
+            <a:schemeClr val="lt1"/>
+          </a:fontRef>
+        </p:style>
+        <p:txBody>
+          <a:bodyPr rtlCol="0" anchor="ctr"/>
+          <a:lstStyle/>
+          <a:p>
+            <a:pPr algn="ctr"/>
+          </a:p>
+        </p:txBody>
+      </p:sp>
+      <p:sp>
+        <p:nvSpPr>
+          <p:cNvPr id="7" name="TextBox 6"/>
+          <p:cNvSpPr txBox="1"/>
+          <p:nvPr/>
+        </p:nvSpPr>
+        <p:spPr>
+          <a:xfrm>
+            <a:off x="1280160" y="2697480"/>
+            <a:ext cx="9601200" cy="2560320"/>
+          </a:xfrm>
+          <a:prstGeom prst="rect">
+            <a:avLst/>
+          </a:prstGeom>
+          <a:noFill/>
+        </p:spPr>
+        <p:txBody>
+          <a:bodyPr wrap="square" anchor="t" lIns="0" rIns="0" tIns="0" bIns="0">
+            <a:spAutoFit/>
+          </a:bodyPr>
+          <a:lstStyle/>
+          <a:p>
+            <a:pPr algn="l">
+              <a:lnSpc>
+                <a:spcPct val="155000"/>
+              </a:lnSpc>
+            </a:pPr>
+            <a:r>
+              <a:rPr sz="2000" b="0" i="0">
+                <a:solidFill>
+                  <a:srgbClr val="1C1730"/>
+                </a:solidFill>
+                <a:latin typeface="Calibri"/>
+              </a:rPr>
+              <a:t>A hash function takes any input — a letter, a word, a gigabyte of data — and turns it into a fixed-length string of characters called a hash. For blockchain, that function is SHA-256 (Bitcoin) or Keccak-256 (Ethereum). Same input, same output, every time — but there's no way back.</a:t>
+            </a:r>
+          </a:p>
+        </p:txBody>
+      </p:sp>
+      <p:sp>
+        <p:nvSpPr>
           <p:cNvPr id="8" name="TextBox 7"/>
-          <p:cNvSpPr txBox="1"/>
-          <p:nvPr/>
-        </p:nvSpPr>
-        <p:spPr>
-          <a:xfrm>
-            <a:off x="1143000" y="4617720"/>
-            <a:ext cx="9875520" cy="320040"/>
-          </a:xfrm>
-          <a:prstGeom prst="rect">
-            <a:avLst/>
-          </a:prstGeom>
-          <a:noFill/>
-        </p:spPr>
-        <p:txBody>
-          <a:bodyPr wrap="square" anchor="t" lIns="0" rIns="0" tIns="0" bIns="0">
-            <a:spAutoFit/>
-          </a:bodyPr>
-          <a:lstStyle/>
-          <a:p>
-            <a:pPr algn="l">
-              <a:lnSpc>
-                <a:spcPct val="115000"/>
-              </a:lnSpc>
-            </a:pPr>
-            <a:r>
-              <a:rPr sz="1100" b="1" i="0">
-                <a:solidFill>
-                  <a:srgbClr val="C1432B"/>
-                </a:solidFill>
-                <a:latin typeface="Calibri"/>
-              </a:rPr>
-              <a:t>EXAMPLE</a:t>
-            </a:r>
-          </a:p>
-        </p:txBody>
-      </p:sp>
-      <p:sp>
-        <p:nvSpPr>
-          <p:cNvPr id="9" name="TextBox 8"/>
-          <p:cNvSpPr txBox="1"/>
-          <p:nvPr/>
-        </p:nvSpPr>
-        <p:spPr>
-          <a:xfrm>
-            <a:off x="1143000" y="4956048"/>
-            <a:ext cx="9875520" cy="640080"/>
-          </a:xfrm>
-          <a:prstGeom prst="rect">
-            <a:avLst/>
-          </a:prstGeom>
-          <a:noFill/>
-        </p:spPr>
-        <p:txBody>
-          <a:bodyPr wrap="square" anchor="t" lIns="0" rIns="0" tIns="0" bIns="0">
-            <a:spAutoFit/>
-          </a:bodyPr>
-          <a:lstStyle/>
-          <a:p>
-            <a:pPr algn="l">
-              <a:lnSpc>
-                <a:spcPct val="130000"/>
-              </a:lnSpc>
-            </a:pPr>
-            <a:r>
-              <a:rPr sz="1400" b="0" i="0">
-                <a:solidFill>
-                  <a:srgbClr val="1C1730"/>
-                </a:solidFill>
-                <a:latin typeface="Consolas"/>
-              </a:rPr>
-              <a:t>"Alice" vs "Alicf" → two totally unrelated 64-character hashes</a:t>
-            </a:r>
-          </a:p>
-        </p:txBody>
-      </p:sp>
-      <p:sp>
-        <p:nvSpPr>
-          <p:cNvPr id="10" name="TextBox 9"/>
           <p:cNvSpPr txBox="1"/>
           <p:nvPr/>
         </p:nvSpPr>
@@ -9324,7 +11226,7 @@
                 </a:solidFill>
                 <a:latin typeface="Consolas"/>
               </a:rPr>
-              <a:t>06 / 15</a:t>
+              <a:t>06 / 18</a:t>
             </a:r>
           </a:p>
         </p:txBody>
@@ -9464,7 +11366,7 @@
                 </a:solidFill>
                 <a:latin typeface="Calibri"/>
               </a:rPr>
-              <a:t>KEY IDEA 4 / 4</a:t>
+              <a:t>KEY IDEA 1 / 4</a:t>
             </a:r>
           </a:p>
         </p:txBody>
@@ -9503,7 +11405,7 @@
                 </a:solidFill>
                 <a:latin typeface="Century Gothic"/>
               </a:rPr>
-              <a:t>Collision-Resistant</a:t>
+              <a:t>Deterministic</a:t>
             </a:r>
           </a:p>
         </p:txBody>
@@ -9542,7 +11444,7 @@
                 </a:solidFill>
                 <a:latin typeface="Calibri"/>
               </a:rPr>
-              <a:t>It should be practically impossible to find two different inputs that produce the same hash. This is what makes a hash trustworthy as a stand-in for the original data — one hash, one piece of data.</a:t>
+              <a:t>The same input always produces the exact same output. Hash the word “hello” today, tomorrow, or on a different continent — identical result, every time. There's no randomness involved anywhere in the process.</a:t>
             </a:r>
           </a:p>
         </p:txBody>
@@ -9666,7 +11568,7 @@
                 </a:solidFill>
                 <a:latin typeface="Consolas"/>
               </a:rPr>
-              <a:t>No two distinct files should ever share a SHA-256 hash in practice.</a:t>
+              <a:t>"hello" → 2cf24dba...9824  (always, forever)</a:t>
             </a:r>
           </a:p>
         </p:txBody>
@@ -9705,7 +11607,7 @@
                 </a:solidFill>
                 <a:latin typeface="Consolas"/>
               </a:rPr>
-              <a:t>07 / 15</a:t>
+              <a:t>07 / 18</a:t>
             </a:r>
           </a:p>
         </p:txBody>
@@ -9806,7 +11708,7 @@
                 </a:solidFill>
                 <a:latin typeface="Calibri"/>
               </a:rPr>
-              <a:t>WORKED EXAMPLE — PART 1</a:t>
+              <a:t>TOPIC 01 — HASHING</a:t>
             </a:r>
           </a:p>
         </p:txBody>
@@ -9819,8 +11721,47 @@
         </p:nvSpPr>
         <p:spPr>
           <a:xfrm>
-            <a:off x="822960" y="1051560"/>
-            <a:ext cx="10332720" cy="1005840"/>
+            <a:off x="8503920" y="640080"/>
+            <a:ext cx="2834640" cy="365760"/>
+          </a:xfrm>
+          <a:prstGeom prst="rect">
+            <a:avLst/>
+          </a:prstGeom>
+          <a:noFill/>
+        </p:spPr>
+        <p:txBody>
+          <a:bodyPr wrap="square" anchor="t" lIns="0" rIns="0" tIns="0" bIns="0">
+            <a:spAutoFit/>
+          </a:bodyPr>
+          <a:lstStyle/>
+          <a:p>
+            <a:pPr algn="r">
+              <a:lnSpc>
+                <a:spcPct val="115000"/>
+              </a:lnSpc>
+            </a:pPr>
+            <a:r>
+              <a:rPr sz="1200" b="1" i="0">
+                <a:solidFill>
+                  <a:srgbClr val="5C576E"/>
+                </a:solidFill>
+                <a:latin typeface="Calibri"/>
+              </a:rPr>
+              <a:t>KEY IDEA 2 / 4</a:t>
+            </a:r>
+          </a:p>
+        </p:txBody>
+      </p:sp>
+      <p:sp>
+        <p:nvSpPr>
+          <p:cNvPr id="5" name="TextBox 4"/>
+          <p:cNvSpPr txBox="1"/>
+          <p:nvPr/>
+        </p:nvSpPr>
+        <p:spPr>
+          <a:xfrm>
+            <a:off x="822960" y="1097280"/>
+            <a:ext cx="9601200" cy="1005840"/>
           </a:xfrm>
           <a:prstGeom prst="rect">
             <a:avLst/>
@@ -9839,35 +11780,74 @@
               </a:lnSpc>
             </a:pPr>
             <a:r>
-              <a:rPr sz="2700" b="1" i="0">
+              <a:rPr sz="3200" b="1" i="0">
                 <a:solidFill>
                   <a:srgbClr val="1C1730"/>
                 </a:solidFill>
                 <a:latin typeface="Century Gothic"/>
               </a:rPr>
-              <a:t>Determinism, Proven On A Real Machine</a:t>
-            </a:r>
-          </a:p>
-        </p:txBody>
-      </p:sp>
-      <p:sp>
-        <p:nvSpPr>
-          <p:cNvPr id="5" name="Rounded Rectangle 4"/>
+              <a:t>One-Way</a:t>
+            </a:r>
+          </a:p>
+        </p:txBody>
+      </p:sp>
+      <p:sp>
+        <p:nvSpPr>
+          <p:cNvPr id="6" name="TextBox 5"/>
+          <p:cNvSpPr txBox="1"/>
+          <p:nvPr/>
+        </p:nvSpPr>
+        <p:spPr>
+          <a:xfrm>
+            <a:off x="822960" y="2148840"/>
+            <a:ext cx="9875520" cy="2011680"/>
+          </a:xfrm>
+          <a:prstGeom prst="rect">
+            <a:avLst/>
+          </a:prstGeom>
+          <a:noFill/>
+        </p:spPr>
+        <p:txBody>
+          <a:bodyPr wrap="square" anchor="t" lIns="0" rIns="0" tIns="0" bIns="0">
+            <a:spAutoFit/>
+          </a:bodyPr>
+          <a:lstStyle/>
+          <a:p>
+            <a:pPr algn="l">
+              <a:lnSpc>
+                <a:spcPct val="150000"/>
+              </a:lnSpc>
+            </a:pPr>
+            <a:r>
+              <a:rPr sz="1650" b="0" i="0">
+                <a:solidFill>
+                  <a:srgbClr val="1C1730"/>
+                </a:solidFill>
+                <a:latin typeface="Calibri"/>
+              </a:rPr>
+              <a:t>Given a hash, there's no way to work backwards to the original input — other than guessing inputs and re-hashing until one matches, which for anything non-trivial would take longer than the age of the universe. Easy to fall through, impossible to climb back up.</a:t>
+            </a:r>
+          </a:p>
+        </p:txBody>
+      </p:sp>
+      <p:sp>
+        <p:nvSpPr>
+          <p:cNvPr id="7" name="Rounded Rectangle 6"/>
           <p:cNvSpPr/>
           <p:nvPr/>
         </p:nvSpPr>
         <p:spPr>
           <a:xfrm>
-            <a:off x="822960" y="1965960"/>
-            <a:ext cx="10515600" cy="3840480"/>
+            <a:off x="822960" y="4434840"/>
+            <a:ext cx="10515600" cy="1280160"/>
           </a:xfrm>
           <a:prstGeom prst="roundRect">
             <a:avLst>
-              <a:gd name="adj" fmla="val 4500"/>
+              <a:gd name="adj" fmla="val 6000"/>
             </a:avLst>
           </a:prstGeom>
           <a:solidFill>
-            <a:srgbClr val="141026"/>
+            <a:srgbClr val="F8ECE9"/>
           </a:solidFill>
           <a:ln>
             <a:noFill/>
@@ -9898,133 +11878,40 @@
       </p:sp>
       <p:sp>
         <p:nvSpPr>
-          <p:cNvPr id="6" name="Oval 5"/>
-          <p:cNvSpPr/>
-          <p:nvPr/>
-        </p:nvSpPr>
-        <p:spPr>
-          <a:xfrm>
-            <a:off x="1024128" y="2130552"/>
-            <a:ext cx="109728" cy="109728"/>
-          </a:xfrm>
-          <a:prstGeom prst="ellipse">
-            <a:avLst/>
-          </a:prstGeom>
-          <a:solidFill>
-            <a:srgbClr val="FF6459"/>
-          </a:solidFill>
-          <a:ln>
-            <a:noFill/>
-          </a:ln>
-          <a:effectLst/>
-        </p:spPr>
-        <p:style>
-          <a:lnRef idx="1">
-            <a:schemeClr val="accent1"/>
-          </a:lnRef>
-          <a:fillRef idx="3">
-            <a:schemeClr val="accent1"/>
-          </a:fillRef>
-          <a:effectRef idx="2">
-            <a:schemeClr val="accent1"/>
-          </a:effectRef>
-          <a:fontRef idx="minor">
-            <a:schemeClr val="lt1"/>
-          </a:fontRef>
-        </p:style>
-        <p:txBody>
-          <a:bodyPr rtlCol="0" anchor="ctr"/>
-          <a:lstStyle/>
-          <a:p>
-            <a:pPr algn="ctr"/>
-          </a:p>
-        </p:txBody>
-      </p:sp>
-      <p:sp>
-        <p:nvSpPr>
-          <p:cNvPr id="7" name="Oval 6"/>
-          <p:cNvSpPr/>
-          <p:nvPr/>
-        </p:nvSpPr>
-        <p:spPr>
-          <a:xfrm>
-            <a:off x="1225296" y="2130552"/>
-            <a:ext cx="109728" cy="109728"/>
-          </a:xfrm>
-          <a:prstGeom prst="ellipse">
-            <a:avLst/>
-          </a:prstGeom>
-          <a:solidFill>
-            <a:srgbClr val="FFC02E"/>
-          </a:solidFill>
-          <a:ln>
-            <a:noFill/>
-          </a:ln>
-          <a:effectLst/>
-        </p:spPr>
-        <p:style>
-          <a:lnRef idx="1">
-            <a:schemeClr val="accent1"/>
-          </a:lnRef>
-          <a:fillRef idx="3">
-            <a:schemeClr val="accent1"/>
-          </a:fillRef>
-          <a:effectRef idx="2">
-            <a:schemeClr val="accent1"/>
-          </a:effectRef>
-          <a:fontRef idx="minor">
-            <a:schemeClr val="lt1"/>
-          </a:fontRef>
-        </p:style>
-        <p:txBody>
-          <a:bodyPr rtlCol="0" anchor="ctr"/>
-          <a:lstStyle/>
-          <a:p>
-            <a:pPr algn="ctr"/>
-          </a:p>
-        </p:txBody>
-      </p:sp>
-      <p:sp>
-        <p:nvSpPr>
-          <p:cNvPr id="8" name="Oval 7"/>
-          <p:cNvSpPr/>
-          <p:nvPr/>
-        </p:nvSpPr>
-        <p:spPr>
-          <a:xfrm>
-            <a:off x="1426464" y="2130552"/>
-            <a:ext cx="109728" cy="109728"/>
-          </a:xfrm>
-          <a:prstGeom prst="ellipse">
-            <a:avLst/>
-          </a:prstGeom>
-          <a:solidFill>
-            <a:srgbClr val="28C93F"/>
-          </a:solidFill>
-          <a:ln>
-            <a:noFill/>
-          </a:ln>
-          <a:effectLst/>
-        </p:spPr>
-        <p:style>
-          <a:lnRef idx="1">
-            <a:schemeClr val="accent1"/>
-          </a:lnRef>
-          <a:fillRef idx="3">
-            <a:schemeClr val="accent1"/>
-          </a:fillRef>
-          <a:effectRef idx="2">
-            <a:schemeClr val="accent1"/>
-          </a:effectRef>
-          <a:fontRef idx="minor">
-            <a:schemeClr val="lt1"/>
-          </a:fontRef>
-        </p:style>
-        <p:txBody>
-          <a:bodyPr rtlCol="0" anchor="ctr"/>
-          <a:lstStyle/>
-          <a:p>
-            <a:pPr algn="ctr"/>
+          <p:cNvPr id="8" name="TextBox 7"/>
+          <p:cNvSpPr txBox="1"/>
+          <p:nvPr/>
+        </p:nvSpPr>
+        <p:spPr>
+          <a:xfrm>
+            <a:off x="1143000" y="4617720"/>
+            <a:ext cx="9875520" cy="320040"/>
+          </a:xfrm>
+          <a:prstGeom prst="rect">
+            <a:avLst/>
+          </a:prstGeom>
+          <a:noFill/>
+        </p:spPr>
+        <p:txBody>
+          <a:bodyPr wrap="square" anchor="t" lIns="0" rIns="0" tIns="0" bIns="0">
+            <a:spAutoFit/>
+          </a:bodyPr>
+          <a:lstStyle/>
+          <a:p>
+            <a:pPr algn="l">
+              <a:lnSpc>
+                <a:spcPct val="115000"/>
+              </a:lnSpc>
+            </a:pPr>
+            <a:r>
+              <a:rPr sz="1100" b="1" i="0">
+                <a:solidFill>
+                  <a:srgbClr val="C1432B"/>
+                </a:solidFill>
+                <a:latin typeface="Calibri"/>
+              </a:rPr>
+              <a:t>EXAMPLE</a:t>
+            </a:r>
           </a:p>
         </p:txBody>
       </p:sp>
@@ -10036,8 +11923,8 @@
         </p:nvSpPr>
         <p:spPr>
           <a:xfrm>
-            <a:off x="1078992" y="2350008"/>
-            <a:ext cx="10003536" cy="3273552"/>
+            <a:off x="1143000" y="4956048"/>
+            <a:ext cx="9875520" cy="640080"/>
           </a:xfrm>
           <a:prstGeom prst="rect">
             <a:avLst/>
@@ -10052,147 +11939,17 @@
           <a:p>
             <a:pPr algn="l">
               <a:lnSpc>
-                <a:spcPct val="135000"/>
-              </a:lnSpc>
-            </a:pPr>
-            <a:r>
-              <a:rPr sz="1350" b="1">
-                <a:solidFill>
-                  <a:srgbClr val="9C93C9"/>
+                <a:spcPct val="130000"/>
+              </a:lnSpc>
+            </a:pPr>
+            <a:r>
+              <a:rPr sz="1400" b="0" i="0">
+                <a:solidFill>
+                  <a:srgbClr val="1C1730"/>
                 </a:solidFill>
                 <a:latin typeface="Consolas"/>
               </a:rPr>
-              <a:t>$ </a:t>
-            </a:r>
-            <a:r>
-              <a:rPr sz="1350" b="0">
-                <a:solidFill>
-                  <a:srgbClr val="EDE9F7"/>
-                </a:solidFill>
-                <a:latin typeface="Consolas"/>
-              </a:rPr>
-              <a:t>echo -n "hello" | shasum -a 256</a:t>
-            </a:r>
-          </a:p>
-          <a:p>
-            <a:pPr algn="l">
-              <a:lnSpc>
-                <a:spcPct val="135000"/>
-              </a:lnSpc>
-            </a:pPr>
-            <a:r>
-              <a:rPr sz="1350" b="0">
-                <a:solidFill>
-                  <a:srgbClr val="7FE0C4"/>
-                </a:solidFill>
-                <a:latin typeface="Consolas"/>
-              </a:rPr>
-              <a:t>2cf24dba5fb0a30e26e83b2ac5b9e29e1b161e5c1fa7425e73043362938b9824</a:t>
-            </a:r>
-          </a:p>
-          <a:p>
-            <a:pPr algn="l">
-              <a:lnSpc>
-                <a:spcPct val="135000"/>
-              </a:lnSpc>
-            </a:pPr>
-            <a:r>
-              <a:rPr sz="1350" b="0">
-                <a:solidFill>
-                  <a:srgbClr val="EDE9F7"/>
-                </a:solidFill>
-                <a:latin typeface="Consolas"/>
-              </a:rPr>
-              <a:t/>
-            </a:r>
-          </a:p>
-          <a:p>
-            <a:pPr algn="l">
-              <a:lnSpc>
-                <a:spcPct val="135000"/>
-              </a:lnSpc>
-            </a:pPr>
-            <a:r>
-              <a:rPr sz="1350" b="0">
-                <a:solidFill>
-                  <a:srgbClr val="8B84AD"/>
-                </a:solidFill>
-                <a:latin typeface="Consolas"/>
-              </a:rPr>
-              <a:t># run it again, on a totally separate invocation —</a:t>
-            </a:r>
-          </a:p>
-          <a:p>
-            <a:pPr algn="l">
-              <a:lnSpc>
-                <a:spcPct val="135000"/>
-              </a:lnSpc>
-            </a:pPr>
-            <a:r>
-              <a:rPr sz="1350" b="1">
-                <a:solidFill>
-                  <a:srgbClr val="9C93C9"/>
-                </a:solidFill>
-                <a:latin typeface="Consolas"/>
-              </a:rPr>
-              <a:t>$ </a:t>
-            </a:r>
-            <a:r>
-              <a:rPr sz="1350" b="0">
-                <a:solidFill>
-                  <a:srgbClr val="EDE9F7"/>
-                </a:solidFill>
-                <a:latin typeface="Consolas"/>
-              </a:rPr>
-              <a:t>echo -n "hello" | shasum -a 256</a:t>
-            </a:r>
-          </a:p>
-          <a:p>
-            <a:pPr algn="l">
-              <a:lnSpc>
-                <a:spcPct val="135000"/>
-              </a:lnSpc>
-            </a:pPr>
-            <a:r>
-              <a:rPr sz="1350" b="0">
-                <a:solidFill>
-                  <a:srgbClr val="7FE0C4"/>
-                </a:solidFill>
-                <a:latin typeface="Consolas"/>
-              </a:rPr>
-              <a:t>2cf24dba5fb0a30e26e83b2ac5b9e29e1b161e5c1fa7425e73043362938b9824</a:t>
-            </a:r>
-          </a:p>
-          <a:p>
-            <a:pPr algn="l">
-              <a:lnSpc>
-                <a:spcPct val="135000"/>
-              </a:lnSpc>
-            </a:pPr>
-            <a:r>
-              <a:rPr sz="1350" b="0">
-                <a:solidFill>
-                  <a:srgbClr val="EDE9F7"/>
-                </a:solidFill>
-                <a:latin typeface="Consolas"/>
-              </a:rPr>
-              <a:t/>
-            </a:r>
-          </a:p>
-          <a:p>
-            <a:pPr algn="l">
-              <a:lnSpc>
-                <a:spcPct val="135000"/>
-              </a:lnSpc>
-            </a:pPr>
-            <a:r>
-              <a:rPr sz="1350" b="0">
-                <a:solidFill>
-                  <a:srgbClr val="8B84AD"/>
-                </a:solidFill>
-                <a:latin typeface="Consolas"/>
-              </a:rPr>
-              <a:t># identical, character for character. no randomness.</a:t>
+              <a:t>You can reverse-engineer neither a fingerprint into a face, nor a hash into its input.</a:t>
             </a:r>
           </a:p>
         </p:txBody>
@@ -10200,45 +11957,6 @@
       <p:sp>
         <p:nvSpPr>
           <p:cNvPr id="10" name="TextBox 9"/>
-          <p:cNvSpPr txBox="1"/>
-          <p:nvPr/>
-        </p:nvSpPr>
-        <p:spPr>
-          <a:xfrm>
-            <a:off x="822960" y="6446520"/>
-            <a:ext cx="10058400" cy="320040"/>
-          </a:xfrm>
-          <a:prstGeom prst="rect">
-            <a:avLst/>
-          </a:prstGeom>
-          <a:noFill/>
-        </p:spPr>
-        <p:txBody>
-          <a:bodyPr wrap="square" anchor="t" lIns="0" rIns="0" tIns="0" bIns="0">
-            <a:spAutoFit/>
-          </a:bodyPr>
-          <a:lstStyle/>
-          <a:p>
-            <a:pPr algn="l">
-              <a:lnSpc>
-                <a:spcPct val="115000"/>
-              </a:lnSpc>
-            </a:pPr>
-            <a:r>
-              <a:rPr sz="1050" b="0" i="0">
-                <a:solidFill>
-                  <a:srgbClr val="5C576E"/>
-                </a:solidFill>
-                <a:latin typeface="Calibri"/>
-              </a:rPr>
-              <a:t>Try it yourself: shasum -a 256 (macOS) or sha256sum (Linux) — already on your machine.</a:t>
-            </a:r>
-          </a:p>
-        </p:txBody>
-      </p:sp>
-      <p:sp>
-        <p:nvSpPr>
-          <p:cNvPr id="11" name="TextBox 10"/>
           <p:cNvSpPr txBox="1"/>
           <p:nvPr/>
         </p:nvSpPr>
@@ -10270,7 +11988,7 @@
                 </a:solidFill>
                 <a:latin typeface="Consolas"/>
               </a:rPr>
-              <a:t>08 / 15</a:t>
+              <a:t>08 / 18</a:t>
             </a:r>
           </a:p>
         </p:txBody>
@@ -10371,7 +12089,7 @@
                 </a:solidFill>
                 <a:latin typeface="Calibri"/>
               </a:rPr>
-              <a:t>WORKED EXAMPLE — PART 2</a:t>
+              <a:t>TOPIC 01 — HASHING</a:t>
             </a:r>
           </a:p>
         </p:txBody>
@@ -10384,8 +12102,47 @@
         </p:nvSpPr>
         <p:spPr>
           <a:xfrm>
-            <a:off x="822960" y="1051560"/>
-            <a:ext cx="10332720" cy="1005840"/>
+            <a:off x="8503920" y="640080"/>
+            <a:ext cx="2834640" cy="365760"/>
+          </a:xfrm>
+          <a:prstGeom prst="rect">
+            <a:avLst/>
+          </a:prstGeom>
+          <a:noFill/>
+        </p:spPr>
+        <p:txBody>
+          <a:bodyPr wrap="square" anchor="t" lIns="0" rIns="0" tIns="0" bIns="0">
+            <a:spAutoFit/>
+          </a:bodyPr>
+          <a:lstStyle/>
+          <a:p>
+            <a:pPr algn="r">
+              <a:lnSpc>
+                <a:spcPct val="115000"/>
+              </a:lnSpc>
+            </a:pPr>
+            <a:r>
+              <a:rPr sz="1200" b="1" i="0">
+                <a:solidFill>
+                  <a:srgbClr val="5C576E"/>
+                </a:solidFill>
+                <a:latin typeface="Calibri"/>
+              </a:rPr>
+              <a:t>KEY IDEA 3 / 4</a:t>
+            </a:r>
+          </a:p>
+        </p:txBody>
+      </p:sp>
+      <p:sp>
+        <p:nvSpPr>
+          <p:cNvPr id="5" name="TextBox 4"/>
+          <p:cNvSpPr txBox="1"/>
+          <p:nvPr/>
+        </p:nvSpPr>
+        <p:spPr>
+          <a:xfrm>
+            <a:off x="822960" y="1097280"/>
+            <a:ext cx="9601200" cy="1005840"/>
           </a:xfrm>
           <a:prstGeom prst="rect">
             <a:avLst/>
@@ -10404,35 +12161,74 @@
               </a:lnSpc>
             </a:pPr>
             <a:r>
-              <a:rPr sz="2700" b="1" i="0">
+              <a:rPr sz="3200" b="1" i="0">
                 <a:solidFill>
                   <a:srgbClr val="1C1730"/>
                 </a:solidFill>
                 <a:latin typeface="Century Gothic"/>
               </a:rPr>
-              <a:t>The Avalanche Effect, Proven With A Real Transaction-Like String</a:t>
-            </a:r>
-          </a:p>
-        </p:txBody>
-      </p:sp>
-      <p:sp>
-        <p:nvSpPr>
-          <p:cNvPr id="5" name="Rounded Rectangle 4"/>
+              <a:t>Avalanche Effect</a:t>
+            </a:r>
+          </a:p>
+        </p:txBody>
+      </p:sp>
+      <p:sp>
+        <p:nvSpPr>
+          <p:cNvPr id="6" name="TextBox 5"/>
+          <p:cNvSpPr txBox="1"/>
+          <p:nvPr/>
+        </p:nvSpPr>
+        <p:spPr>
+          <a:xfrm>
+            <a:off x="822960" y="2148840"/>
+            <a:ext cx="9875520" cy="2011680"/>
+          </a:xfrm>
+          <a:prstGeom prst="rect">
+            <a:avLst/>
+          </a:prstGeom>
+          <a:noFill/>
+        </p:spPr>
+        <p:txBody>
+          <a:bodyPr wrap="square" anchor="t" lIns="0" rIns="0" tIns="0" bIns="0">
+            <a:spAutoFit/>
+          </a:bodyPr>
+          <a:lstStyle/>
+          <a:p>
+            <a:pPr algn="l">
+              <a:lnSpc>
+                <a:spcPct val="150000"/>
+              </a:lnSpc>
+            </a:pPr>
+            <a:r>
+              <a:rPr sz="1650" b="0" i="0">
+                <a:solidFill>
+                  <a:srgbClr val="1C1730"/>
+                </a:solidFill>
+                <a:latin typeface="Calibri"/>
+              </a:rPr>
+              <a:t>Changing even a single character of input — flipping one letter's capitalization — produces a completely different, unrecognizable hash. There's no partial similarity between hashes of similar inputs.</a:t>
+            </a:r>
+          </a:p>
+        </p:txBody>
+      </p:sp>
+      <p:sp>
+        <p:nvSpPr>
+          <p:cNvPr id="7" name="Rounded Rectangle 6"/>
           <p:cNvSpPr/>
           <p:nvPr/>
         </p:nvSpPr>
         <p:spPr>
           <a:xfrm>
-            <a:off x="822960" y="1965960"/>
-            <a:ext cx="10515600" cy="3840480"/>
+            <a:off x="822960" y="4434840"/>
+            <a:ext cx="10515600" cy="1280160"/>
           </a:xfrm>
           <a:prstGeom prst="roundRect">
             <a:avLst>
-              <a:gd name="adj" fmla="val 4500"/>
+              <a:gd name="adj" fmla="val 6000"/>
             </a:avLst>
           </a:prstGeom>
           <a:solidFill>
-            <a:srgbClr val="141026"/>
+            <a:srgbClr val="F8ECE9"/>
           </a:solidFill>
           <a:ln>
             <a:noFill/>
@@ -10463,133 +12259,40 @@
       </p:sp>
       <p:sp>
         <p:nvSpPr>
-          <p:cNvPr id="6" name="Oval 5"/>
-          <p:cNvSpPr/>
-          <p:nvPr/>
-        </p:nvSpPr>
-        <p:spPr>
-          <a:xfrm>
-            <a:off x="1024128" y="2130552"/>
-            <a:ext cx="109728" cy="109728"/>
-          </a:xfrm>
-          <a:prstGeom prst="ellipse">
-            <a:avLst/>
-          </a:prstGeom>
-          <a:solidFill>
-            <a:srgbClr val="FF6459"/>
-          </a:solidFill>
-          <a:ln>
-            <a:noFill/>
-          </a:ln>
-          <a:effectLst/>
-        </p:spPr>
-        <p:style>
-          <a:lnRef idx="1">
-            <a:schemeClr val="accent1"/>
-          </a:lnRef>
-          <a:fillRef idx="3">
-            <a:schemeClr val="accent1"/>
-          </a:fillRef>
-          <a:effectRef idx="2">
-            <a:schemeClr val="accent1"/>
-          </a:effectRef>
-          <a:fontRef idx="minor">
-            <a:schemeClr val="lt1"/>
-          </a:fontRef>
-        </p:style>
-        <p:txBody>
-          <a:bodyPr rtlCol="0" anchor="ctr"/>
-          <a:lstStyle/>
-          <a:p>
-            <a:pPr algn="ctr"/>
-          </a:p>
-        </p:txBody>
-      </p:sp>
-      <p:sp>
-        <p:nvSpPr>
-          <p:cNvPr id="7" name="Oval 6"/>
-          <p:cNvSpPr/>
-          <p:nvPr/>
-        </p:nvSpPr>
-        <p:spPr>
-          <a:xfrm>
-            <a:off x="1225296" y="2130552"/>
-            <a:ext cx="109728" cy="109728"/>
-          </a:xfrm>
-          <a:prstGeom prst="ellipse">
-            <a:avLst/>
-          </a:prstGeom>
-          <a:solidFill>
-            <a:srgbClr val="FFC02E"/>
-          </a:solidFill>
-          <a:ln>
-            <a:noFill/>
-          </a:ln>
-          <a:effectLst/>
-        </p:spPr>
-        <p:style>
-          <a:lnRef idx="1">
-            <a:schemeClr val="accent1"/>
-          </a:lnRef>
-          <a:fillRef idx="3">
-            <a:schemeClr val="accent1"/>
-          </a:fillRef>
-          <a:effectRef idx="2">
-            <a:schemeClr val="accent1"/>
-          </a:effectRef>
-          <a:fontRef idx="minor">
-            <a:schemeClr val="lt1"/>
-          </a:fontRef>
-        </p:style>
-        <p:txBody>
-          <a:bodyPr rtlCol="0" anchor="ctr"/>
-          <a:lstStyle/>
-          <a:p>
-            <a:pPr algn="ctr"/>
-          </a:p>
-        </p:txBody>
-      </p:sp>
-      <p:sp>
-        <p:nvSpPr>
-          <p:cNvPr id="8" name="Oval 7"/>
-          <p:cNvSpPr/>
-          <p:nvPr/>
-        </p:nvSpPr>
-        <p:spPr>
-          <a:xfrm>
-            <a:off x="1426464" y="2130552"/>
-            <a:ext cx="109728" cy="109728"/>
-          </a:xfrm>
-          <a:prstGeom prst="ellipse">
-            <a:avLst/>
-          </a:prstGeom>
-          <a:solidFill>
-            <a:srgbClr val="28C93F"/>
-          </a:solidFill>
-          <a:ln>
-            <a:noFill/>
-          </a:ln>
-          <a:effectLst/>
-        </p:spPr>
-        <p:style>
-          <a:lnRef idx="1">
-            <a:schemeClr val="accent1"/>
-          </a:lnRef>
-          <a:fillRef idx="3">
-            <a:schemeClr val="accent1"/>
-          </a:fillRef>
-          <a:effectRef idx="2">
-            <a:schemeClr val="accent1"/>
-          </a:effectRef>
-          <a:fontRef idx="minor">
-            <a:schemeClr val="lt1"/>
-          </a:fontRef>
-        </p:style>
-        <p:txBody>
-          <a:bodyPr rtlCol="0" anchor="ctr"/>
-          <a:lstStyle/>
-          <a:p>
-            <a:pPr algn="ctr"/>
+          <p:cNvPr id="8" name="TextBox 7"/>
+          <p:cNvSpPr txBox="1"/>
+          <p:nvPr/>
+        </p:nvSpPr>
+        <p:spPr>
+          <a:xfrm>
+            <a:off x="1143000" y="4617720"/>
+            <a:ext cx="9875520" cy="320040"/>
+          </a:xfrm>
+          <a:prstGeom prst="rect">
+            <a:avLst/>
+          </a:prstGeom>
+          <a:noFill/>
+        </p:spPr>
+        <p:txBody>
+          <a:bodyPr wrap="square" anchor="t" lIns="0" rIns="0" tIns="0" bIns="0">
+            <a:spAutoFit/>
+          </a:bodyPr>
+          <a:lstStyle/>
+          <a:p>
+            <a:pPr algn="l">
+              <a:lnSpc>
+                <a:spcPct val="115000"/>
+              </a:lnSpc>
+            </a:pPr>
+            <a:r>
+              <a:rPr sz="1100" b="1" i="0">
+                <a:solidFill>
+                  <a:srgbClr val="C1432B"/>
+                </a:solidFill>
+                <a:latin typeface="Calibri"/>
+              </a:rPr>
+              <a:t>EXAMPLE</a:t>
+            </a:r>
           </a:p>
         </p:txBody>
       </p:sp>
@@ -10601,8 +12304,8 @@
         </p:nvSpPr>
         <p:spPr>
           <a:xfrm>
-            <a:off x="1078992" y="2350008"/>
-            <a:ext cx="10003536" cy="3273552"/>
+            <a:off x="1143000" y="4956048"/>
+            <a:ext cx="9875520" cy="640080"/>
           </a:xfrm>
           <a:prstGeom prst="rect">
             <a:avLst/>
@@ -10617,131 +12320,17 @@
           <a:p>
             <a:pPr algn="l">
               <a:lnSpc>
-                <a:spcPct val="135000"/>
-              </a:lnSpc>
-            </a:pPr>
-            <a:r>
-              <a:rPr sz="1350" b="1">
-                <a:solidFill>
-                  <a:srgbClr val="9C93C9"/>
+                <a:spcPct val="130000"/>
+              </a:lnSpc>
+            </a:pPr>
+            <a:r>
+              <a:rPr sz="1400" b="0" i="0">
+                <a:solidFill>
+                  <a:srgbClr val="1C1730"/>
                 </a:solidFill>
                 <a:latin typeface="Consolas"/>
               </a:rPr>
-              <a:t>$ </a:t>
-            </a:r>
-            <a:r>
-              <a:rPr sz="1350" b="0">
-                <a:solidFill>
-                  <a:srgbClr val="EDE9F7"/>
-                </a:solidFill>
-                <a:latin typeface="Consolas"/>
-              </a:rPr>
-              <a:t>echo -n "Send 1 ETH to Alice" | shasum -a 256</a:t>
-            </a:r>
-          </a:p>
-          <a:p>
-            <a:pPr algn="l">
-              <a:lnSpc>
-                <a:spcPct val="135000"/>
-              </a:lnSpc>
-            </a:pPr>
-            <a:r>
-              <a:rPr sz="1350" b="0">
-                <a:solidFill>
-                  <a:srgbClr val="7FE0C4"/>
-                </a:solidFill>
-                <a:latin typeface="Consolas"/>
-              </a:rPr>
-              <a:t>9bed087e0a716e203d57c1ba36493085f7a87628da1cb1fe18bf5b4631bd7e45</a:t>
-            </a:r>
-          </a:p>
-          <a:p>
-            <a:pPr algn="l">
-              <a:lnSpc>
-                <a:spcPct val="135000"/>
-              </a:lnSpc>
-            </a:pPr>
-            <a:r>
-              <a:rPr sz="1350" b="0">
-                <a:solidFill>
-                  <a:srgbClr val="EDE9F7"/>
-                </a:solidFill>
-                <a:latin typeface="Consolas"/>
-              </a:rPr>
-              <a:t/>
-            </a:r>
-          </a:p>
-          <a:p>
-            <a:pPr algn="l">
-              <a:lnSpc>
-                <a:spcPct val="135000"/>
-              </a:lnSpc>
-            </a:pPr>
-            <a:r>
-              <a:rPr sz="1350" b="1">
-                <a:solidFill>
-                  <a:srgbClr val="9C93C9"/>
-                </a:solidFill>
-                <a:latin typeface="Consolas"/>
-              </a:rPr>
-              <a:t>$ </a:t>
-            </a:r>
-            <a:r>
-              <a:rPr sz="1350" b="0">
-                <a:solidFill>
-                  <a:srgbClr val="EDE9F7"/>
-                </a:solidFill>
-                <a:latin typeface="Consolas"/>
-              </a:rPr>
-              <a:t>echo -n "Send 1 ETH to Alicf" | shasum -a 256</a:t>
-            </a:r>
-          </a:p>
-          <a:p>
-            <a:pPr algn="l">
-              <a:lnSpc>
-                <a:spcPct val="135000"/>
-              </a:lnSpc>
-            </a:pPr>
-            <a:r>
-              <a:rPr sz="1350" b="0">
-                <a:solidFill>
-                  <a:srgbClr val="FF8E7D"/>
-                </a:solidFill>
-                <a:latin typeface="Consolas"/>
-              </a:rPr>
-              <a:t>94f17d20a09db58f6a7fe2cf97f00b2ae2dc1a67802b6e74776b0b6785e4b1eb</a:t>
-            </a:r>
-          </a:p>
-          <a:p>
-            <a:pPr algn="l">
-              <a:lnSpc>
-                <a:spcPct val="135000"/>
-              </a:lnSpc>
-            </a:pPr>
-            <a:r>
-              <a:rPr sz="1350" b="0">
-                <a:solidFill>
-                  <a:srgbClr val="EDE9F7"/>
-                </a:solidFill>
-                <a:latin typeface="Consolas"/>
-              </a:rPr>
-              <a:t/>
-            </a:r>
-          </a:p>
-          <a:p>
-            <a:pPr algn="l">
-              <a:lnSpc>
-                <a:spcPct val="135000"/>
-              </a:lnSpc>
-            </a:pPr>
-            <a:r>
-              <a:rPr sz="1350" b="0">
-                <a:solidFill>
-                  <a:srgbClr val="8B84AD"/>
-                </a:solidFill>
-                <a:latin typeface="Consolas"/>
-              </a:rPr>
-              <a:t># one letter changed: e → f. total, unrelated mismatch.</a:t>
+              <a:t>"Alice" vs "Alicf" → two totally unrelated 64-character hashes</a:t>
             </a:r>
           </a:p>
         </p:txBody>
@@ -10749,45 +12338,6 @@
       <p:sp>
         <p:nvSpPr>
           <p:cNvPr id="10" name="TextBox 9"/>
-          <p:cNvSpPr txBox="1"/>
-          <p:nvPr/>
-        </p:nvSpPr>
-        <p:spPr>
-          <a:xfrm>
-            <a:off x="822960" y="6446520"/>
-            <a:ext cx="10058400" cy="320040"/>
-          </a:xfrm>
-          <a:prstGeom prst="rect">
-            <a:avLst/>
-          </a:prstGeom>
-          <a:noFill/>
-        </p:spPr>
-        <p:txBody>
-          <a:bodyPr wrap="square" anchor="t" lIns="0" rIns="0" tIns="0" bIns="0">
-            <a:spAutoFit/>
-          </a:bodyPr>
-          <a:lstStyle/>
-          <a:p>
-            <a:pPr algn="l">
-              <a:lnSpc>
-                <a:spcPct val="115000"/>
-              </a:lnSpc>
-            </a:pPr>
-            <a:r>
-              <a:rPr sz="1050" b="0" i="0">
-                <a:solidFill>
-                  <a:srgbClr val="5C576E"/>
-                </a:solidFill>
-                <a:latin typeface="Calibri"/>
-              </a:rPr>
-              <a:t>This is exactly why altering one digit of a real transaction is instantly detectable.</a:t>
-            </a:r>
-          </a:p>
-        </p:txBody>
-      </p:sp>
-      <p:sp>
-        <p:nvSpPr>
-          <p:cNvPr id="11" name="TextBox 10"/>
           <p:cNvSpPr txBox="1"/>
           <p:nvPr/>
         </p:nvSpPr>
@@ -10819,7 +12369,7 @@
                 </a:solidFill>
                 <a:latin typeface="Consolas"/>
               </a:rPr>
-              <a:t>09 / 15</a:t>
+              <a:t>09 / 18</a:t>
             </a:r>
           </a:p>
         </p:txBody>
